--- a/rust_friday_session.pptx
+++ b/rust_friday_session.pptx
@@ -5,7 +5,7 @@
     <p:sldMasterId id="2147483648" r:id="rId1"/>
   </p:sldMasterIdLst>
   <p:notesMasterIdLst>
-    <p:notesMasterId r:id="rId31"/>
+    <p:notesMasterId r:id="rId38"/>
   </p:notesMasterIdLst>
   <p:sldIdLst>
     <p:sldId id="256" r:id="rId2"/>
@@ -37,6 +37,13 @@
     <p:sldId id="318" r:id="rId28"/>
     <p:sldId id="319" r:id="rId29"/>
     <p:sldId id="320" r:id="rId30"/>
+    <p:sldId id="325" r:id="rId31"/>
+    <p:sldId id="322" r:id="rId32"/>
+    <p:sldId id="329" r:id="rId33"/>
+    <p:sldId id="331" r:id="rId34"/>
+    <p:sldId id="334" r:id="rId35"/>
+    <p:sldId id="336" r:id="rId36"/>
+    <p:sldId id="337" r:id="rId37"/>
   </p:sldIdLst>
   <p:sldSz cx="12192000" cy="6858000"/>
   <p:notesSz cx="6858000" cy="9144000"/>
@@ -225,7 +232,7 @@
           <a:p>
             <a:fld id="{901B2C63-9184-7B41-897D-B987911E75C8}" type="datetimeFigureOut">
               <a:rPr lang="en-US" smtClean="0"/>
-              <a:t>5/7/26</a:t>
+              <a:t>5/18/26</a:t>
             </a:fld>
             <a:endParaRPr lang="en-US"/>
           </a:p>
@@ -1532,7 +1539,7 @@
           <a:p>
             <a:fld id="{4998A69A-3EA9-0A47-8D25-10A00CFA088E}" type="datetimeFigureOut">
               <a:rPr lang="en-US" smtClean="0"/>
-              <a:t>5/7/26</a:t>
+              <a:t>5/18/26</a:t>
             </a:fld>
             <a:endParaRPr lang="en-US"/>
           </a:p>
@@ -1730,7 +1737,7 @@
           <a:p>
             <a:fld id="{4998A69A-3EA9-0A47-8D25-10A00CFA088E}" type="datetimeFigureOut">
               <a:rPr lang="en-US" smtClean="0"/>
-              <a:t>5/7/26</a:t>
+              <a:t>5/18/26</a:t>
             </a:fld>
             <a:endParaRPr lang="en-US"/>
           </a:p>
@@ -1938,7 +1945,7 @@
           <a:p>
             <a:fld id="{4998A69A-3EA9-0A47-8D25-10A00CFA088E}" type="datetimeFigureOut">
               <a:rPr lang="en-US" smtClean="0"/>
-              <a:t>5/7/26</a:t>
+              <a:t>5/18/26</a:t>
             </a:fld>
             <a:endParaRPr lang="en-US"/>
           </a:p>
@@ -2136,7 +2143,7 @@
           <a:p>
             <a:fld id="{4998A69A-3EA9-0A47-8D25-10A00CFA088E}" type="datetimeFigureOut">
               <a:rPr lang="en-US" smtClean="0"/>
-              <a:t>5/7/26</a:t>
+              <a:t>5/18/26</a:t>
             </a:fld>
             <a:endParaRPr lang="en-US"/>
           </a:p>
@@ -2411,7 +2418,7 @@
           <a:p>
             <a:fld id="{4998A69A-3EA9-0A47-8D25-10A00CFA088E}" type="datetimeFigureOut">
               <a:rPr lang="en-US" smtClean="0"/>
-              <a:t>5/7/26</a:t>
+              <a:t>5/18/26</a:t>
             </a:fld>
             <a:endParaRPr lang="en-US"/>
           </a:p>
@@ -2676,7 +2683,7 @@
           <a:p>
             <a:fld id="{4998A69A-3EA9-0A47-8D25-10A00CFA088E}" type="datetimeFigureOut">
               <a:rPr lang="en-US" smtClean="0"/>
-              <a:t>5/7/26</a:t>
+              <a:t>5/18/26</a:t>
             </a:fld>
             <a:endParaRPr lang="en-US"/>
           </a:p>
@@ -3088,7 +3095,7 @@
           <a:p>
             <a:fld id="{4998A69A-3EA9-0A47-8D25-10A00CFA088E}" type="datetimeFigureOut">
               <a:rPr lang="en-US" smtClean="0"/>
-              <a:t>5/7/26</a:t>
+              <a:t>5/18/26</a:t>
             </a:fld>
             <a:endParaRPr lang="en-US"/>
           </a:p>
@@ -3229,7 +3236,7 @@
           <a:p>
             <a:fld id="{4998A69A-3EA9-0A47-8D25-10A00CFA088E}" type="datetimeFigureOut">
               <a:rPr lang="en-US" smtClean="0"/>
-              <a:t>5/7/26</a:t>
+              <a:t>5/18/26</a:t>
             </a:fld>
             <a:endParaRPr lang="en-US"/>
           </a:p>
@@ -3342,7 +3349,7 @@
           <a:p>
             <a:fld id="{4998A69A-3EA9-0A47-8D25-10A00CFA088E}" type="datetimeFigureOut">
               <a:rPr lang="en-US" smtClean="0"/>
-              <a:t>5/7/26</a:t>
+              <a:t>5/18/26</a:t>
             </a:fld>
             <a:endParaRPr lang="en-US"/>
           </a:p>
@@ -3653,7 +3660,7 @@
           <a:p>
             <a:fld id="{4998A69A-3EA9-0A47-8D25-10A00CFA088E}" type="datetimeFigureOut">
               <a:rPr lang="en-US" smtClean="0"/>
-              <a:t>5/7/26</a:t>
+              <a:t>5/18/26</a:t>
             </a:fld>
             <a:endParaRPr lang="en-US"/>
           </a:p>
@@ -3941,7 +3948,7 @@
           <a:p>
             <a:fld id="{4998A69A-3EA9-0A47-8D25-10A00CFA088E}" type="datetimeFigureOut">
               <a:rPr lang="en-US" smtClean="0"/>
-              <a:t>5/7/26</a:t>
+              <a:t>5/18/26</a:t>
             </a:fld>
             <a:endParaRPr lang="en-US"/>
           </a:p>
@@ -4182,7 +4189,7 @@
           <a:p>
             <a:fld id="{4998A69A-3EA9-0A47-8D25-10A00CFA088E}" type="datetimeFigureOut">
               <a:rPr lang="en-US" smtClean="0"/>
-              <a:t>5/7/26</a:t>
+              <a:t>5/18/26</a:t>
             </a:fld>
             <a:endParaRPr lang="en-US"/>
           </a:p>
@@ -20494,7 +20501,18 @@
                   <a:srgbClr val="1F2937"/>
                 </a:solidFill>
               </a:rPr>
-              <a:t>OOP  kind of – Structs, Traits  </a:t>
+              <a:t>OOPs  </a:t>
+            </a:r>
+          </a:p>
+          <a:p>
+            <a:pPr algn="l"/>
+            <a:r>
+              <a:rPr lang="en-US" sz="1400" b="1" dirty="0">
+                <a:solidFill>
+                  <a:srgbClr val="1F2937"/>
+                </a:solidFill>
+              </a:rPr>
+              <a:t>Structs, Traits  </a:t>
             </a:r>
           </a:p>
         </p:txBody>
@@ -38045,6 +38063,7734 @@
     <p:extLst>
       <p:ext uri="{BB962C8B-B14F-4D97-AF65-F5344CB8AC3E}">
         <p14:creationId xmlns:p14="http://schemas.microsoft.com/office/powerpoint/2010/main" val="1527401460"/>
+      </p:ext>
+    </p:extLst>
+  </p:cSld>
+  <p:clrMapOvr>
+    <a:masterClrMapping/>
+  </p:clrMapOvr>
+</p:sld>
+</file>
+
+<file path=ppt/slides/slide30.xml><?xml version="1.0" encoding="utf-8"?>
+<p:sld xmlns:a="http://schemas.openxmlformats.org/drawingml/2006/main" xmlns:r="http://schemas.openxmlformats.org/officeDocument/2006/relationships" xmlns:p="http://schemas.openxmlformats.org/presentationml/2006/main">
+  <p:cSld>
+    <p:spTree>
+      <p:nvGrpSpPr>
+        <p:cNvPr id="1" name=""/>
+        <p:cNvGrpSpPr/>
+        <p:nvPr/>
+      </p:nvGrpSpPr>
+      <p:grpSpPr>
+        <a:xfrm>
+          <a:off x="0" y="0"/>
+          <a:ext cx="0" cy="0"/>
+          <a:chOff x="0" y="0"/>
+          <a:chExt cx="0" cy="0"/>
+        </a:xfrm>
+      </p:grpSpPr>
+      <p:sp>
+        <p:nvSpPr>
+          <p:cNvPr id="2" name="TextBox 1">
+            <a:extLst>
+              <a:ext uri="{FF2B5EF4-FFF2-40B4-BE49-F238E27FC236}">
+                <a16:creationId xmlns:a16="http://schemas.microsoft.com/office/drawing/2014/main" id="{4770C813-8FDF-DB4D-82A1-40D496CE5242}"/>
+              </a:ext>
+            </a:extLst>
+          </p:cNvPr>
+          <p:cNvSpPr txBox="1"/>
+          <p:nvPr/>
+        </p:nvSpPr>
+        <p:spPr>
+          <a:xfrm>
+            <a:off x="838200" y="317500"/>
+            <a:ext cx="10515600" cy="558800"/>
+          </a:xfrm>
+          <a:prstGeom prst="rect">
+            <a:avLst/>
+          </a:prstGeom>
+          <a:noFill/>
+        </p:spPr>
+        <p:txBody>
+          <a:bodyPr vertOverflow="overflow" vert="horz" wrap="square" rtlCol="0" anchor="t">
+            <a:noAutofit/>
+          </a:bodyPr>
+          <a:lstStyle/>
+          <a:p>
+            <a:pPr algn="l"/>
+            <a:r>
+              <a:rPr lang="en-US" sz="3000" b="1">
+                <a:solidFill>
+                  <a:srgbClr val="1E1E1E"/>
+                </a:solidFill>
+              </a:rPr>
+              <a:t>Rust has no exceptions</a:t>
+            </a:r>
+          </a:p>
+        </p:txBody>
+      </p:sp>
+      <p:sp>
+        <p:nvSpPr>
+          <p:cNvPr id="3" name="Rectangle 2">
+            <a:extLst>
+              <a:ext uri="{FF2B5EF4-FFF2-40B4-BE49-F238E27FC236}">
+                <a16:creationId xmlns:a16="http://schemas.microsoft.com/office/drawing/2014/main" id="{B2637500-D459-B543-83A5-49F678646AC7}"/>
+              </a:ext>
+            </a:extLst>
+          </p:cNvPr>
+          <p:cNvSpPr/>
+          <p:nvPr/>
+        </p:nvSpPr>
+        <p:spPr>
+          <a:xfrm>
+            <a:off x="838200" y="914400"/>
+            <a:ext cx="762000" cy="50800"/>
+          </a:xfrm>
+          <a:prstGeom prst="rect">
+            <a:avLst/>
+          </a:prstGeom>
+          <a:solidFill>
+            <a:srgbClr val="CE422B"/>
+          </a:solidFill>
+          <a:ln w="19050" cap="flat" cmpd="sng" algn="ctr">
+            <a:noFill/>
+            <a:prstDash val="solid"/>
+            <a:miter lim="800000"/>
+          </a:ln>
+        </p:spPr>
+        <p:style>
+          <a:lnRef idx="2">
+            <a:schemeClr val="accent1">
+              <a:shade val="15000"/>
+            </a:schemeClr>
+          </a:lnRef>
+          <a:fillRef idx="1">
+            <a:schemeClr val="accent1"/>
+          </a:fillRef>
+          <a:effectRef idx="0">
+            <a:schemeClr val="accent1"/>
+          </a:effectRef>
+          <a:fontRef idx="minor">
+            <a:schemeClr val="lt1"/>
+          </a:fontRef>
+        </p:style>
+        <p:txBody>
+          <a:bodyPr vertOverflow="clip" horzOverflow="clip" rtlCol="0" anchor="t"/>
+          <a:lstStyle/>
+          <a:p>
+            <a:pPr algn="l"/>
+            <a:endParaRPr lang="en-US"/>
+          </a:p>
+        </p:txBody>
+      </p:sp>
+      <p:sp>
+        <p:nvSpPr>
+          <p:cNvPr id="4" name="TextBox 3">
+            <a:extLst>
+              <a:ext uri="{FF2B5EF4-FFF2-40B4-BE49-F238E27FC236}">
+                <a16:creationId xmlns:a16="http://schemas.microsoft.com/office/drawing/2014/main" id="{FDE23632-33CF-174F-B21C-A20A9A2D3615}"/>
+              </a:ext>
+            </a:extLst>
+          </p:cNvPr>
+          <p:cNvSpPr txBox="1"/>
+          <p:nvPr/>
+        </p:nvSpPr>
+        <p:spPr>
+          <a:xfrm>
+            <a:off x="838200" y="1066800"/>
+            <a:ext cx="10515600" cy="304800"/>
+          </a:xfrm>
+          <a:prstGeom prst="rect">
+            <a:avLst/>
+          </a:prstGeom>
+          <a:noFill/>
+        </p:spPr>
+        <p:txBody>
+          <a:bodyPr vertOverflow="overflow" vert="horz" wrap="square" rtlCol="0" anchor="t">
+            <a:noAutofit/>
+          </a:bodyPr>
+          <a:lstStyle/>
+          <a:p>
+            <a:pPr algn="l"/>
+            <a:r>
+              <a:rPr lang="en-US" sz="1400">
+                <a:solidFill>
+                  <a:srgbClr val="555555"/>
+                </a:solidFill>
+              </a:rPr>
+              <a:t>Errors are values of type Result&lt;T, E&gt; — handled with combinators and the ? operator</a:t>
+            </a:r>
+          </a:p>
+        </p:txBody>
+      </p:sp>
+      <p:sp>
+        <p:nvSpPr>
+          <p:cNvPr id="5" name="Rectangle 4">
+            <a:extLst>
+              <a:ext uri="{FF2B5EF4-FFF2-40B4-BE49-F238E27FC236}">
+                <a16:creationId xmlns:a16="http://schemas.microsoft.com/office/drawing/2014/main" id="{29EB60D3-388F-604D-96CF-AE2A3DC1CE9D}"/>
+              </a:ext>
+            </a:extLst>
+          </p:cNvPr>
+          <p:cNvSpPr/>
+          <p:nvPr/>
+        </p:nvSpPr>
+        <p:spPr>
+          <a:xfrm>
+            <a:off x="342900" y="1485900"/>
+            <a:ext cx="5676900" cy="330200"/>
+          </a:xfrm>
+          <a:prstGeom prst="rect">
+            <a:avLst/>
+          </a:prstGeom>
+          <a:solidFill>
+            <a:srgbClr val="1E1E1E"/>
+          </a:solidFill>
+          <a:ln w="19050" cap="flat" cmpd="sng" algn="ctr">
+            <a:noFill/>
+            <a:prstDash val="solid"/>
+            <a:miter lim="800000"/>
+          </a:ln>
+        </p:spPr>
+        <p:style>
+          <a:lnRef idx="2">
+            <a:schemeClr val="accent1">
+              <a:shade val="15000"/>
+            </a:schemeClr>
+          </a:lnRef>
+          <a:fillRef idx="1">
+            <a:schemeClr val="accent1"/>
+          </a:fillRef>
+          <a:effectRef idx="0">
+            <a:schemeClr val="accent1"/>
+          </a:effectRef>
+          <a:fontRef idx="minor">
+            <a:schemeClr val="lt1"/>
+          </a:fontRef>
+        </p:style>
+        <p:txBody>
+          <a:bodyPr vertOverflow="clip" horzOverflow="clip" rtlCol="0" anchor="t"/>
+          <a:lstStyle/>
+          <a:p>
+            <a:pPr algn="l"/>
+            <a:endParaRPr lang="en-US"/>
+          </a:p>
+        </p:txBody>
+      </p:sp>
+      <p:sp>
+        <p:nvSpPr>
+          <p:cNvPr id="6" name="TextBox 5">
+            <a:extLst>
+              <a:ext uri="{FF2B5EF4-FFF2-40B4-BE49-F238E27FC236}">
+                <a16:creationId xmlns:a16="http://schemas.microsoft.com/office/drawing/2014/main" id="{AD5EB0BF-6D4C-F045-B0C0-01E058930D75}"/>
+              </a:ext>
+            </a:extLst>
+          </p:cNvPr>
+          <p:cNvSpPr txBox="1"/>
+          <p:nvPr/>
+        </p:nvSpPr>
+        <p:spPr>
+          <a:xfrm>
+            <a:off x="469900" y="1536700"/>
+            <a:ext cx="5422900" cy="292100"/>
+          </a:xfrm>
+          <a:prstGeom prst="rect">
+            <a:avLst/>
+          </a:prstGeom>
+          <a:noFill/>
+        </p:spPr>
+        <p:txBody>
+          <a:bodyPr vertOverflow="overflow" vert="horz" wrap="square" rtlCol="0" anchor="t">
+            <a:noAutofit/>
+          </a:bodyPr>
+          <a:lstStyle/>
+          <a:p>
+            <a:pPr algn="l"/>
+            <a:r>
+              <a:rPr lang="en-US" sz="1300" b="1">
+                <a:solidFill>
+                  <a:srgbClr val="FFFFFF"/>
+                </a:solidFill>
+              </a:rPr>
+              <a:t>The model</a:t>
+            </a:r>
+          </a:p>
+        </p:txBody>
+      </p:sp>
+      <p:sp>
+        <p:nvSpPr>
+          <p:cNvPr id="7" name="Rectangle 6">
+            <a:extLst>
+              <a:ext uri="{FF2B5EF4-FFF2-40B4-BE49-F238E27FC236}">
+                <a16:creationId xmlns:a16="http://schemas.microsoft.com/office/drawing/2014/main" id="{37A9F2D3-BB3D-734B-BAA9-B37DF6CBD58E}"/>
+              </a:ext>
+            </a:extLst>
+          </p:cNvPr>
+          <p:cNvSpPr/>
+          <p:nvPr/>
+        </p:nvSpPr>
+        <p:spPr>
+          <a:xfrm>
+            <a:off x="342900" y="1816100"/>
+            <a:ext cx="5676900" cy="3987800"/>
+          </a:xfrm>
+          <a:prstGeom prst="rect">
+            <a:avLst/>
+          </a:prstGeom>
+          <a:solidFill>
+            <a:srgbClr val="F5F0EB"/>
+          </a:solidFill>
+          <a:ln w="19050" cap="flat" cmpd="sng" algn="ctr">
+            <a:noFill/>
+            <a:prstDash val="solid"/>
+            <a:miter lim="800000"/>
+          </a:ln>
+        </p:spPr>
+        <p:style>
+          <a:lnRef idx="2">
+            <a:schemeClr val="accent1">
+              <a:shade val="15000"/>
+            </a:schemeClr>
+          </a:lnRef>
+          <a:fillRef idx="1">
+            <a:schemeClr val="accent1"/>
+          </a:fillRef>
+          <a:effectRef idx="0">
+            <a:schemeClr val="accent1"/>
+          </a:effectRef>
+          <a:fontRef idx="minor">
+            <a:schemeClr val="lt1"/>
+          </a:fontRef>
+        </p:style>
+        <p:txBody>
+          <a:bodyPr vertOverflow="clip" horzOverflow="clip" rtlCol="0" anchor="t"/>
+          <a:lstStyle/>
+          <a:p>
+            <a:pPr algn="l"/>
+            <a:endParaRPr lang="en-US"/>
+          </a:p>
+        </p:txBody>
+      </p:sp>
+      <p:sp>
+        <p:nvSpPr>
+          <p:cNvPr id="8" name="TextBox 7">
+            <a:extLst>
+              <a:ext uri="{FF2B5EF4-FFF2-40B4-BE49-F238E27FC236}">
+                <a16:creationId xmlns:a16="http://schemas.microsoft.com/office/drawing/2014/main" id="{075BA65B-D5DB-FC42-85FD-0A83DC9CBBCB}"/>
+              </a:ext>
+            </a:extLst>
+          </p:cNvPr>
+          <p:cNvSpPr txBox="1"/>
+          <p:nvPr/>
+        </p:nvSpPr>
+        <p:spPr>
+          <a:xfrm>
+            <a:off x="596900" y="1943100"/>
+            <a:ext cx="5168900" cy="3733800"/>
+          </a:xfrm>
+          <a:prstGeom prst="rect">
+            <a:avLst/>
+          </a:prstGeom>
+          <a:noFill/>
+        </p:spPr>
+        <p:txBody>
+          <a:bodyPr vertOverflow="overflow" vert="horz" wrap="square" rtlCol="0" anchor="t">
+            <a:noAutofit/>
+          </a:bodyPr>
+          <a:lstStyle/>
+          <a:p>
+            <a:pPr algn="l">
+              <a:spcBef>
+                <a:spcPts val="0"/>
+              </a:spcBef>
+              <a:buNone/>
+            </a:pPr>
+            <a:r>
+              <a:rPr lang="en-US" sz="1400" b="1" dirty="0">
+                <a:solidFill>
+                  <a:srgbClr val="CE422B"/>
+                </a:solidFill>
+              </a:rPr>
+              <a:t>Two enums carry failure</a:t>
+            </a:r>
+          </a:p>
+          <a:p>
+            <a:pPr algn="l">
+              <a:spcBef>
+                <a:spcPts val="300"/>
+              </a:spcBef>
+              <a:buNone/>
+            </a:pPr>
+            <a:r>
+              <a:rPr lang="en-US" sz="1300" b="1" dirty="0">
+                <a:latin typeface="Consolas"/>
+                <a:cs typeface="Consolas"/>
+              </a:rPr>
+              <a:t>Result&lt;T, E&gt;</a:t>
+            </a:r>
+            <a:r>
+              <a:rPr lang="en-US" sz="1300" dirty="0">
+                <a:solidFill>
+                  <a:srgbClr val="1E1E1E"/>
+                </a:solidFill>
+              </a:rPr>
+              <a:t> — Ok(T) or Err(E), for operations that can fail</a:t>
+            </a:r>
+          </a:p>
+          <a:p>
+            <a:pPr algn="l">
+              <a:spcBef>
+                <a:spcPts val="300"/>
+              </a:spcBef>
+              <a:buNone/>
+            </a:pPr>
+            <a:r>
+              <a:rPr lang="en-US" sz="1300" b="1" dirty="0">
+                <a:latin typeface="Consolas"/>
+                <a:cs typeface="Consolas"/>
+              </a:rPr>
+              <a:t>Option&lt;T&gt;</a:t>
+            </a:r>
+            <a:r>
+              <a:rPr lang="en-US" sz="1300" dirty="0">
+                <a:solidFill>
+                  <a:srgbClr val="1E1E1E"/>
+                </a:solidFill>
+              </a:rPr>
+              <a:t> — Some(T) or None, for absence</a:t>
+            </a:r>
+          </a:p>
+          <a:p>
+            <a:pPr algn="l">
+              <a:spcBef>
+                <a:spcPts val="600"/>
+              </a:spcBef>
+              <a:buNone/>
+            </a:pPr>
+            <a:r>
+              <a:rPr lang="en-US" sz="1400" b="1" dirty="0">
+                <a:solidFill>
+                  <a:srgbClr val="CE422B"/>
+                </a:solidFill>
+              </a:rPr>
+              <a:t>The ? operator</a:t>
+            </a:r>
+          </a:p>
+          <a:p>
+            <a:pPr algn="l">
+              <a:spcBef>
+                <a:spcPts val="300"/>
+              </a:spcBef>
+              <a:buNone/>
+            </a:pPr>
+            <a:r>
+              <a:rPr lang="en-US" sz="1300" dirty="0">
+                <a:solidFill>
+                  <a:srgbClr val="1E1E1E"/>
+                </a:solidFill>
+              </a:rPr>
+              <a:t>On Err, return early; on Ok, unwrap the value. Works inside any fn returning Result (or Option).</a:t>
+            </a:r>
+          </a:p>
+          <a:p>
+            <a:pPr algn="l">
+              <a:spcBef>
+                <a:spcPts val="600"/>
+              </a:spcBef>
+              <a:buNone/>
+            </a:pPr>
+            <a:r>
+              <a:rPr lang="en-US" sz="1400" b="1" dirty="0">
+                <a:solidFill>
+                  <a:srgbClr val="CE422B"/>
+                </a:solidFill>
+              </a:rPr>
+              <a:t>panic! is for bugs, not errors</a:t>
+            </a:r>
+          </a:p>
+          <a:p>
+            <a:pPr algn="l">
+              <a:spcBef>
+                <a:spcPts val="300"/>
+              </a:spcBef>
+              <a:buNone/>
+            </a:pPr>
+            <a:r>
+              <a:rPr lang="en-US" sz="1300" dirty="0">
+                <a:solidFill>
+                  <a:srgbClr val="1E1E1E"/>
+                </a:solidFill>
+              </a:rPr>
+              <a:t>Unwinds the stack and aborts the thread. Use for invariants that must hold — not for recoverable failure.</a:t>
+            </a:r>
+          </a:p>
+        </p:txBody>
+      </p:sp>
+      <p:sp>
+        <p:nvSpPr>
+          <p:cNvPr id="9" name="Rectangle 8">
+            <a:extLst>
+              <a:ext uri="{FF2B5EF4-FFF2-40B4-BE49-F238E27FC236}">
+                <a16:creationId xmlns:a16="http://schemas.microsoft.com/office/drawing/2014/main" id="{EA9D4DC1-6C7B-7B43-A561-EC737FCEE3F3}"/>
+              </a:ext>
+            </a:extLst>
+          </p:cNvPr>
+          <p:cNvSpPr/>
+          <p:nvPr/>
+        </p:nvSpPr>
+        <p:spPr>
+          <a:xfrm>
+            <a:off x="6223000" y="1485900"/>
+            <a:ext cx="5676900" cy="330200"/>
+          </a:xfrm>
+          <a:prstGeom prst="rect">
+            <a:avLst/>
+          </a:prstGeom>
+          <a:solidFill>
+            <a:srgbClr val="1E1E1E"/>
+          </a:solidFill>
+          <a:ln w="19050" cap="flat" cmpd="sng" algn="ctr">
+            <a:noFill/>
+            <a:prstDash val="solid"/>
+            <a:miter lim="800000"/>
+          </a:ln>
+        </p:spPr>
+        <p:style>
+          <a:lnRef idx="2">
+            <a:schemeClr val="accent1">
+              <a:shade val="15000"/>
+            </a:schemeClr>
+          </a:lnRef>
+          <a:fillRef idx="1">
+            <a:schemeClr val="accent1"/>
+          </a:fillRef>
+          <a:effectRef idx="0">
+            <a:schemeClr val="accent1"/>
+          </a:effectRef>
+          <a:fontRef idx="minor">
+            <a:schemeClr val="lt1"/>
+          </a:fontRef>
+        </p:style>
+        <p:txBody>
+          <a:bodyPr vertOverflow="clip" horzOverflow="clip" rtlCol="0" anchor="t"/>
+          <a:lstStyle/>
+          <a:p>
+            <a:pPr algn="l"/>
+            <a:endParaRPr lang="en-US"/>
+          </a:p>
+        </p:txBody>
+      </p:sp>
+      <p:sp>
+        <p:nvSpPr>
+          <p:cNvPr id="10" name="TextBox 9">
+            <a:extLst>
+              <a:ext uri="{FF2B5EF4-FFF2-40B4-BE49-F238E27FC236}">
+                <a16:creationId xmlns:a16="http://schemas.microsoft.com/office/drawing/2014/main" id="{50B8F8D2-3273-5746-B8FD-5B9EB1EF2979}"/>
+              </a:ext>
+            </a:extLst>
+          </p:cNvPr>
+          <p:cNvSpPr txBox="1"/>
+          <p:nvPr/>
+        </p:nvSpPr>
+        <p:spPr>
+          <a:xfrm>
+            <a:off x="6350000" y="1536700"/>
+            <a:ext cx="5422900" cy="292100"/>
+          </a:xfrm>
+          <a:prstGeom prst="rect">
+            <a:avLst/>
+          </a:prstGeom>
+          <a:noFill/>
+        </p:spPr>
+        <p:txBody>
+          <a:bodyPr vertOverflow="overflow" vert="horz" wrap="square" rtlCol="0" anchor="t">
+            <a:noAutofit/>
+          </a:bodyPr>
+          <a:lstStyle/>
+          <a:p>
+            <a:pPr algn="l"/>
+            <a:r>
+              <a:rPr lang="en-US" sz="1300" b="1">
+                <a:solidFill>
+                  <a:srgbClr val="FFFFFF"/>
+                </a:solidFill>
+              </a:rPr>
+              <a:t>Combinator cheatsheet</a:t>
+            </a:r>
+          </a:p>
+        </p:txBody>
+      </p:sp>
+      <p:sp>
+        <p:nvSpPr>
+          <p:cNvPr id="11" name="Rectangle 10">
+            <a:extLst>
+              <a:ext uri="{FF2B5EF4-FFF2-40B4-BE49-F238E27FC236}">
+                <a16:creationId xmlns:a16="http://schemas.microsoft.com/office/drawing/2014/main" id="{9D2AABCC-7A96-9542-8697-2958BB8722BB}"/>
+              </a:ext>
+            </a:extLst>
+          </p:cNvPr>
+          <p:cNvSpPr/>
+          <p:nvPr/>
+        </p:nvSpPr>
+        <p:spPr>
+          <a:xfrm>
+            <a:off x="6223000" y="1816100"/>
+            <a:ext cx="5676900" cy="3987800"/>
+          </a:xfrm>
+          <a:prstGeom prst="rect">
+            <a:avLst/>
+          </a:prstGeom>
+          <a:solidFill>
+            <a:srgbClr val="1E1E1E"/>
+          </a:solidFill>
+          <a:ln w="19050" cap="flat" cmpd="sng" algn="ctr">
+            <a:noFill/>
+            <a:prstDash val="solid"/>
+            <a:miter lim="800000"/>
+          </a:ln>
+        </p:spPr>
+        <p:style>
+          <a:lnRef idx="2">
+            <a:schemeClr val="accent1">
+              <a:shade val="15000"/>
+            </a:schemeClr>
+          </a:lnRef>
+          <a:fillRef idx="1">
+            <a:schemeClr val="accent1"/>
+          </a:fillRef>
+          <a:effectRef idx="0">
+            <a:schemeClr val="accent1"/>
+          </a:effectRef>
+          <a:fontRef idx="minor">
+            <a:schemeClr val="lt1"/>
+          </a:fontRef>
+        </p:style>
+        <p:txBody>
+          <a:bodyPr vertOverflow="clip" horzOverflow="clip" rtlCol="0" anchor="t"/>
+          <a:lstStyle/>
+          <a:p>
+            <a:pPr algn="l"/>
+            <a:endParaRPr lang="en-US"/>
+          </a:p>
+        </p:txBody>
+      </p:sp>
+      <p:sp>
+        <p:nvSpPr>
+          <p:cNvPr id="12" name="TextBox 11">
+            <a:extLst>
+              <a:ext uri="{FF2B5EF4-FFF2-40B4-BE49-F238E27FC236}">
+                <a16:creationId xmlns:a16="http://schemas.microsoft.com/office/drawing/2014/main" id="{C001106C-63F5-CF4C-9721-382EE35519E8}"/>
+              </a:ext>
+            </a:extLst>
+          </p:cNvPr>
+          <p:cNvSpPr txBox="1"/>
+          <p:nvPr/>
+        </p:nvSpPr>
+        <p:spPr>
+          <a:xfrm>
+            <a:off x="6350000" y="1892300"/>
+            <a:ext cx="5422900" cy="3848100"/>
+          </a:xfrm>
+          <a:prstGeom prst="rect">
+            <a:avLst/>
+          </a:prstGeom>
+          <a:noFill/>
+        </p:spPr>
+        <p:txBody>
+          <a:bodyPr vertOverflow="overflow" vert="horz" wrap="square" rtlCol="0" anchor="t">
+            <a:noAutofit/>
+          </a:bodyPr>
+          <a:lstStyle/>
+          <a:p>
+            <a:pPr algn="l">
+              <a:spcBef>
+                <a:spcPts val="0"/>
+              </a:spcBef>
+              <a:buNone/>
+            </a:pPr>
+            <a:r>
+              <a:rPr lang="en-US" sz="1200" b="1" dirty="0">
+                <a:solidFill>
+                  <a:srgbClr val="FF8A65"/>
+                </a:solidFill>
+              </a:rPr>
+              <a:t>TRANSFORM</a:t>
+            </a:r>
+          </a:p>
+          <a:p>
+            <a:pPr algn="l">
+              <a:spcBef>
+                <a:spcPts val="200"/>
+              </a:spcBef>
+              <a:buNone/>
+            </a:pPr>
+            <a:r>
+              <a:rPr lang="en-US" sz="1400" b="1" dirty="0">
+                <a:solidFill>
+                  <a:schemeClr val="bg1"/>
+                </a:solidFill>
+                <a:latin typeface="Consolas"/>
+                <a:cs typeface="Consolas"/>
+              </a:rPr>
+              <a:t>.map(f)</a:t>
+            </a:r>
+            <a:r>
+              <a:rPr lang="en-US" sz="1400" dirty="0">
+                <a:solidFill>
+                  <a:schemeClr val="bg1"/>
+                </a:solidFill>
+              </a:rPr>
+              <a:t>  Ok(T) → Ok(U)</a:t>
+            </a:r>
+          </a:p>
+          <a:p>
+            <a:pPr algn="l">
+              <a:spcBef>
+                <a:spcPts val="200"/>
+              </a:spcBef>
+              <a:buNone/>
+            </a:pPr>
+            <a:r>
+              <a:rPr lang="en-US" sz="1400" b="1" dirty="0">
+                <a:solidFill>
+                  <a:schemeClr val="bg1"/>
+                </a:solidFill>
+                <a:latin typeface="Consolas"/>
+                <a:cs typeface="Consolas"/>
+              </a:rPr>
+              <a:t>.map_err(f)</a:t>
+            </a:r>
+            <a:r>
+              <a:rPr lang="en-US" sz="1400" dirty="0">
+                <a:solidFill>
+                  <a:schemeClr val="bg1"/>
+                </a:solidFill>
+              </a:rPr>
+              <a:t>  Err(E) → Err(F)</a:t>
+            </a:r>
+          </a:p>
+          <a:p>
+            <a:pPr algn="l">
+              <a:spcBef>
+                <a:spcPts val="200"/>
+              </a:spcBef>
+              <a:buNone/>
+            </a:pPr>
+            <a:r>
+              <a:rPr lang="en-US" sz="1400" b="1" dirty="0">
+                <a:solidFill>
+                  <a:schemeClr val="bg1"/>
+                </a:solidFill>
+                <a:latin typeface="Consolas"/>
+                <a:cs typeface="Consolas"/>
+              </a:rPr>
+              <a:t>.and_then(f)</a:t>
+            </a:r>
+            <a:r>
+              <a:rPr lang="en-US" sz="1400" dirty="0">
+                <a:solidFill>
+                  <a:schemeClr val="bg1"/>
+                </a:solidFill>
+              </a:rPr>
+              <a:t>  chain: Ok(T) → Result&lt;U,E&gt;</a:t>
+            </a:r>
+          </a:p>
+          <a:p>
+            <a:pPr algn="l">
+              <a:spcBef>
+                <a:spcPts val="500"/>
+              </a:spcBef>
+              <a:buNone/>
+            </a:pPr>
+            <a:r>
+              <a:rPr lang="en-US" sz="1200" b="1" dirty="0">
+                <a:solidFill>
+                  <a:srgbClr val="FF8A65"/>
+                </a:solidFill>
+              </a:rPr>
+              <a:t>RECOVER</a:t>
+            </a:r>
+          </a:p>
+          <a:p>
+            <a:pPr algn="l">
+              <a:spcBef>
+                <a:spcPts val="200"/>
+              </a:spcBef>
+              <a:buNone/>
+            </a:pPr>
+            <a:r>
+              <a:rPr lang="en-US" sz="1400" b="1" dirty="0">
+                <a:solidFill>
+                  <a:schemeClr val="bg1"/>
+                </a:solidFill>
+                <a:latin typeface="Consolas"/>
+                <a:cs typeface="Consolas"/>
+              </a:rPr>
+              <a:t>.unwrap_or(v)</a:t>
+            </a:r>
+            <a:r>
+              <a:rPr lang="en-US" sz="1400" dirty="0">
+                <a:solidFill>
+                  <a:schemeClr val="bg1"/>
+                </a:solidFill>
+              </a:rPr>
+              <a:t>  default value on Err / None</a:t>
+            </a:r>
+          </a:p>
+          <a:p>
+            <a:pPr algn="l">
+              <a:spcBef>
+                <a:spcPts val="200"/>
+              </a:spcBef>
+              <a:buNone/>
+            </a:pPr>
+            <a:r>
+              <a:rPr lang="en-US" sz="1400" b="1" dirty="0">
+                <a:solidFill>
+                  <a:schemeClr val="bg1"/>
+                </a:solidFill>
+                <a:latin typeface="Consolas"/>
+                <a:cs typeface="Consolas"/>
+              </a:rPr>
+              <a:t>.unwrap_or_else(f)</a:t>
+            </a:r>
+            <a:r>
+              <a:rPr lang="en-US" sz="1400" dirty="0">
+                <a:solidFill>
+                  <a:schemeClr val="bg1"/>
+                </a:solidFill>
+              </a:rPr>
+              <a:t>  compute default from error</a:t>
+            </a:r>
+          </a:p>
+          <a:p>
+            <a:pPr algn="l">
+              <a:spcBef>
+                <a:spcPts val="200"/>
+              </a:spcBef>
+              <a:buNone/>
+            </a:pPr>
+            <a:r>
+              <a:rPr lang="en-US" sz="1400" b="1" dirty="0">
+                <a:solidFill>
+                  <a:schemeClr val="bg1"/>
+                </a:solidFill>
+                <a:latin typeface="Consolas"/>
+                <a:cs typeface="Consolas"/>
+              </a:rPr>
+              <a:t>.or_else(f)</a:t>
+            </a:r>
+            <a:r>
+              <a:rPr lang="en-US" sz="1400" dirty="0">
+                <a:solidFill>
+                  <a:schemeClr val="bg1"/>
+                </a:solidFill>
+              </a:rPr>
+              <a:t>  try a fallback Result</a:t>
+            </a:r>
+          </a:p>
+          <a:p>
+            <a:pPr algn="l">
+              <a:spcBef>
+                <a:spcPts val="500"/>
+              </a:spcBef>
+              <a:buNone/>
+            </a:pPr>
+            <a:r>
+              <a:rPr lang="en-US" sz="1200" b="1" dirty="0">
+                <a:solidFill>
+                  <a:srgbClr val="FF8A65"/>
+                </a:solidFill>
+              </a:rPr>
+              <a:t>INSPECT &amp; CONVERT</a:t>
+            </a:r>
+          </a:p>
+          <a:p>
+            <a:pPr algn="l">
+              <a:spcBef>
+                <a:spcPts val="200"/>
+              </a:spcBef>
+              <a:buNone/>
+            </a:pPr>
+            <a:r>
+              <a:rPr lang="en-US" sz="1400" b="1" dirty="0">
+                <a:solidFill>
+                  <a:schemeClr val="bg1"/>
+                </a:solidFill>
+                <a:latin typeface="Consolas"/>
+                <a:cs typeface="Consolas"/>
+              </a:rPr>
+              <a:t>.ok()</a:t>
+            </a:r>
+            <a:r>
+              <a:rPr lang="en-US" sz="1400" dirty="0">
+                <a:solidFill>
+                  <a:schemeClr val="bg1"/>
+                </a:solidFill>
+              </a:rPr>
+              <a:t>  Result&lt;T,E&gt; → Option&lt;T&gt;</a:t>
+            </a:r>
+          </a:p>
+          <a:p>
+            <a:pPr algn="l">
+              <a:spcBef>
+                <a:spcPts val="200"/>
+              </a:spcBef>
+              <a:buNone/>
+            </a:pPr>
+            <a:r>
+              <a:rPr lang="en-US" sz="1400" b="1" dirty="0">
+                <a:solidFill>
+                  <a:schemeClr val="bg1"/>
+                </a:solidFill>
+                <a:latin typeface="Consolas"/>
+                <a:cs typeface="Consolas"/>
+              </a:rPr>
+              <a:t>.is_ok() / .is_err()</a:t>
+            </a:r>
+            <a:r>
+              <a:rPr lang="en-US" sz="1400" dirty="0">
+                <a:solidFill>
+                  <a:schemeClr val="bg1"/>
+                </a:solidFill>
+              </a:rPr>
+              <a:t>  predicate checks</a:t>
+            </a:r>
+          </a:p>
+          <a:p>
+            <a:pPr algn="l">
+              <a:spcBef>
+                <a:spcPts val="200"/>
+              </a:spcBef>
+              <a:buNone/>
+            </a:pPr>
+            <a:r>
+              <a:rPr lang="en-US" sz="1400" b="1" dirty="0">
+                <a:solidFill>
+                  <a:schemeClr val="bg1"/>
+                </a:solidFill>
+                <a:latin typeface="Consolas"/>
+                <a:cs typeface="Consolas"/>
+              </a:rPr>
+              <a:t>?</a:t>
+            </a:r>
+            <a:r>
+              <a:rPr lang="en-US" sz="1400" dirty="0">
+                <a:solidFill>
+                  <a:schemeClr val="bg1"/>
+                </a:solidFill>
+              </a:rPr>
+              <a:t>  propagate Err up the call stack</a:t>
+            </a:r>
+          </a:p>
+        </p:txBody>
+      </p:sp>
+      <p:sp>
+        <p:nvSpPr>
+          <p:cNvPr id="13" name="Rectangle 12">
+            <a:extLst>
+              <a:ext uri="{FF2B5EF4-FFF2-40B4-BE49-F238E27FC236}">
+                <a16:creationId xmlns:a16="http://schemas.microsoft.com/office/drawing/2014/main" id="{6C5491A0-12FA-F846-AD5B-9CFCE97A991E}"/>
+              </a:ext>
+            </a:extLst>
+          </p:cNvPr>
+          <p:cNvSpPr/>
+          <p:nvPr/>
+        </p:nvSpPr>
+        <p:spPr>
+          <a:xfrm>
+            <a:off x="342900" y="5905500"/>
+            <a:ext cx="11557000" cy="635000"/>
+          </a:xfrm>
+          <a:prstGeom prst="rect">
+            <a:avLst/>
+          </a:prstGeom>
+          <a:solidFill>
+            <a:srgbClr val="F5F0EB"/>
+          </a:solidFill>
+          <a:ln w="19050" cap="flat" cmpd="sng" algn="ctr">
+            <a:noFill/>
+            <a:prstDash val="solid"/>
+            <a:miter lim="800000"/>
+          </a:ln>
+        </p:spPr>
+        <p:style>
+          <a:lnRef idx="2">
+            <a:schemeClr val="accent1">
+              <a:shade val="15000"/>
+            </a:schemeClr>
+          </a:lnRef>
+          <a:fillRef idx="1">
+            <a:schemeClr val="accent1"/>
+          </a:fillRef>
+          <a:effectRef idx="0">
+            <a:schemeClr val="accent1"/>
+          </a:effectRef>
+          <a:fontRef idx="minor">
+            <a:schemeClr val="lt1"/>
+          </a:fontRef>
+        </p:style>
+        <p:txBody>
+          <a:bodyPr vertOverflow="clip" horzOverflow="clip" rtlCol="0" anchor="t"/>
+          <a:lstStyle/>
+          <a:p>
+            <a:pPr algn="l"/>
+            <a:endParaRPr lang="en-US"/>
+          </a:p>
+        </p:txBody>
+      </p:sp>
+      <p:sp>
+        <p:nvSpPr>
+          <p:cNvPr id="14" name="TextBox 13">
+            <a:extLst>
+              <a:ext uri="{FF2B5EF4-FFF2-40B4-BE49-F238E27FC236}">
+                <a16:creationId xmlns:a16="http://schemas.microsoft.com/office/drawing/2014/main" id="{39EE2867-1658-A441-8E10-21B109C6EC57}"/>
+              </a:ext>
+            </a:extLst>
+          </p:cNvPr>
+          <p:cNvSpPr txBox="1"/>
+          <p:nvPr/>
+        </p:nvSpPr>
+        <p:spPr>
+          <a:xfrm>
+            <a:off x="469900" y="5981700"/>
+            <a:ext cx="11303000" cy="482600"/>
+          </a:xfrm>
+          <a:prstGeom prst="rect">
+            <a:avLst/>
+          </a:prstGeom>
+          <a:noFill/>
+        </p:spPr>
+        <p:txBody>
+          <a:bodyPr vertOverflow="overflow" vert="horz" wrap="square" rtlCol="0" anchor="t">
+            <a:noAutofit/>
+          </a:bodyPr>
+          <a:lstStyle/>
+          <a:p>
+            <a:pPr algn="l"/>
+            <a:r>
+              <a:rPr lang="en-US" sz="1300" b="1">
+                <a:solidFill>
+                  <a:srgbClr val="1E1E1E"/>
+                </a:solidFill>
+              </a:rPr>
+              <a:t>Takeaway: </a:t>
+            </a:r>
+            <a:r>
+              <a:rPr lang="en-US" sz="1300">
+                <a:solidFill>
+                  <a:srgbClr val="333333"/>
+                </a:solidFill>
+              </a:rPr>
+              <a:t>errors are data. Compose them with combinators, propagate with ?, and the compiler enforces handling.</a:t>
+            </a:r>
+          </a:p>
+        </p:txBody>
+      </p:sp>
+    </p:spTree>
+    <p:extLst>
+      <p:ext uri="{BB962C8B-B14F-4D97-AF65-F5344CB8AC3E}">
+        <p14:creationId xmlns:p14="http://schemas.microsoft.com/office/powerpoint/2010/main" val="1446761243"/>
+      </p:ext>
+    </p:extLst>
+  </p:cSld>
+  <p:clrMapOvr>
+    <a:masterClrMapping/>
+  </p:clrMapOvr>
+</p:sld>
+</file>
+
+<file path=ppt/slides/slide31.xml><?xml version="1.0" encoding="utf-8"?>
+<p:sld xmlns:a="http://schemas.openxmlformats.org/drawingml/2006/main" xmlns:r="http://schemas.openxmlformats.org/officeDocument/2006/relationships" xmlns:p="http://schemas.openxmlformats.org/presentationml/2006/main">
+  <p:cSld>
+    <p:spTree>
+      <p:nvGrpSpPr>
+        <p:cNvPr id="1" name=""/>
+        <p:cNvGrpSpPr/>
+        <p:nvPr/>
+      </p:nvGrpSpPr>
+      <p:grpSpPr>
+        <a:xfrm>
+          <a:off x="0" y="0"/>
+          <a:ext cx="0" cy="0"/>
+          <a:chOff x="0" y="0"/>
+          <a:chExt cx="0" cy="0"/>
+        </a:xfrm>
+      </p:grpSpPr>
+      <p:sp>
+        <p:nvSpPr>
+          <p:cNvPr id="2" name="TextBox 1">
+            <a:extLst>
+              <a:ext uri="{FF2B5EF4-FFF2-40B4-BE49-F238E27FC236}">
+                <a16:creationId xmlns:a16="http://schemas.microsoft.com/office/drawing/2014/main" id="{9D568BE4-36BF-7848-B9F2-AAD03B57D0C1}"/>
+              </a:ext>
+            </a:extLst>
+          </p:cNvPr>
+          <p:cNvSpPr txBox="1"/>
+          <p:nvPr/>
+        </p:nvSpPr>
+        <p:spPr>
+          <a:xfrm>
+            <a:off x="838200" y="317500"/>
+            <a:ext cx="10515600" cy="558800"/>
+          </a:xfrm>
+          <a:prstGeom prst="rect">
+            <a:avLst/>
+          </a:prstGeom>
+          <a:noFill/>
+        </p:spPr>
+        <p:txBody>
+          <a:bodyPr vertOverflow="overflow" vert="horz" wrap="none" rtlCol="0" anchor="t">
+            <a:noAutofit/>
+          </a:bodyPr>
+          <a:lstStyle/>
+          <a:p>
+            <a:pPr algn="l"/>
+            <a:r>
+              <a:rPr lang="en-US" sz="3000" b="1">
+                <a:solidFill>
+                  <a:srgbClr val="1E1E1E"/>
+                </a:solidFill>
+              </a:rPr>
+              <a:t>Error handling</a:t>
+            </a:r>
+          </a:p>
+        </p:txBody>
+      </p:sp>
+      <p:sp>
+        <p:nvSpPr>
+          <p:cNvPr id="3" name="Rectangle 2">
+            <a:extLst>
+              <a:ext uri="{FF2B5EF4-FFF2-40B4-BE49-F238E27FC236}">
+                <a16:creationId xmlns:a16="http://schemas.microsoft.com/office/drawing/2014/main" id="{8AA66068-C584-0643-8278-1BB8CACBF6A5}"/>
+              </a:ext>
+            </a:extLst>
+          </p:cNvPr>
+          <p:cNvSpPr/>
+          <p:nvPr/>
+        </p:nvSpPr>
+        <p:spPr>
+          <a:xfrm>
+            <a:off x="838200" y="914400"/>
+            <a:ext cx="762000" cy="50800"/>
+          </a:xfrm>
+          <a:prstGeom prst="rect">
+            <a:avLst/>
+          </a:prstGeom>
+          <a:solidFill>
+            <a:srgbClr val="CE422B"/>
+          </a:solidFill>
+          <a:ln w="19050" cap="flat" cmpd="sng" algn="ctr">
+            <a:noFill/>
+            <a:prstDash val="solid"/>
+            <a:miter lim="800000"/>
+          </a:ln>
+        </p:spPr>
+        <p:style>
+          <a:lnRef idx="2">
+            <a:schemeClr val="accent1">
+              <a:shade val="15000"/>
+            </a:schemeClr>
+          </a:lnRef>
+          <a:fillRef idx="1">
+            <a:schemeClr val="accent1"/>
+          </a:fillRef>
+          <a:effectRef idx="0">
+            <a:schemeClr val="accent1"/>
+          </a:effectRef>
+          <a:fontRef idx="minor">
+            <a:schemeClr val="lt1"/>
+          </a:fontRef>
+        </p:style>
+        <p:txBody>
+          <a:bodyPr vertOverflow="clip" horzOverflow="clip" rtlCol="0" anchor="t"/>
+          <a:lstStyle/>
+          <a:p>
+            <a:pPr algn="l"/>
+            <a:endParaRPr lang="en-US"/>
+          </a:p>
+        </p:txBody>
+      </p:sp>
+      <p:sp>
+        <p:nvSpPr>
+          <p:cNvPr id="4" name="TextBox 3">
+            <a:extLst>
+              <a:ext uri="{FF2B5EF4-FFF2-40B4-BE49-F238E27FC236}">
+                <a16:creationId xmlns:a16="http://schemas.microsoft.com/office/drawing/2014/main" id="{7CED85E7-1D8D-3E41-A557-AD4BC740330D}"/>
+              </a:ext>
+            </a:extLst>
+          </p:cNvPr>
+          <p:cNvSpPr txBox="1"/>
+          <p:nvPr/>
+        </p:nvSpPr>
+        <p:spPr>
+          <a:xfrm>
+            <a:off x="838200" y="1066800"/>
+            <a:ext cx="10515600" cy="304800"/>
+          </a:xfrm>
+          <a:prstGeom prst="rect">
+            <a:avLst/>
+          </a:prstGeom>
+          <a:noFill/>
+        </p:spPr>
+        <p:txBody>
+          <a:bodyPr vertOverflow="overflow" vert="horz" wrap="none" rtlCol="0" anchor="t">
+            <a:noAutofit/>
+          </a:bodyPr>
+          <a:lstStyle/>
+          <a:p>
+            <a:pPr algn="l"/>
+            <a:r>
+              <a:rPr lang="en-US" sz="1400">
+                <a:solidFill>
+                  <a:srgbClr val="555555"/>
+                </a:solidFill>
+              </a:rPr>
+              <a:t>Result and ? are the path — unwrap and panic are the anti-pattern</a:t>
+            </a:r>
+          </a:p>
+        </p:txBody>
+      </p:sp>
+      <p:sp>
+        <p:nvSpPr>
+          <p:cNvPr id="5" name="Rectangle 4">
+            <a:extLst>
+              <a:ext uri="{FF2B5EF4-FFF2-40B4-BE49-F238E27FC236}">
+                <a16:creationId xmlns:a16="http://schemas.microsoft.com/office/drawing/2014/main" id="{96F1B3EE-9914-054A-91BE-9824D8659669}"/>
+              </a:ext>
+            </a:extLst>
+          </p:cNvPr>
+          <p:cNvSpPr/>
+          <p:nvPr/>
+        </p:nvSpPr>
+        <p:spPr>
+          <a:xfrm>
+            <a:off x="342900" y="1485900"/>
+            <a:ext cx="5676900" cy="330200"/>
+          </a:xfrm>
+          <a:prstGeom prst="rect">
+            <a:avLst/>
+          </a:prstGeom>
+          <a:solidFill>
+            <a:srgbClr val="3F7D3F"/>
+          </a:solidFill>
+          <a:ln w="19050" cap="flat" cmpd="sng" algn="ctr">
+            <a:noFill/>
+            <a:prstDash val="solid"/>
+            <a:miter lim="800000"/>
+          </a:ln>
+        </p:spPr>
+        <p:style>
+          <a:lnRef idx="2">
+            <a:schemeClr val="accent1">
+              <a:shade val="15000"/>
+            </a:schemeClr>
+          </a:lnRef>
+          <a:fillRef idx="1">
+            <a:schemeClr val="accent1"/>
+          </a:fillRef>
+          <a:effectRef idx="0">
+            <a:schemeClr val="accent1"/>
+          </a:effectRef>
+          <a:fontRef idx="minor">
+            <a:schemeClr val="lt1"/>
+          </a:fontRef>
+        </p:style>
+        <p:txBody>
+          <a:bodyPr vertOverflow="clip" horzOverflow="clip" rtlCol="0" anchor="t"/>
+          <a:lstStyle/>
+          <a:p>
+            <a:pPr algn="l"/>
+            <a:endParaRPr lang="en-US"/>
+          </a:p>
+        </p:txBody>
+      </p:sp>
+      <p:sp>
+        <p:nvSpPr>
+          <p:cNvPr id="6" name="TextBox 5">
+            <a:extLst>
+              <a:ext uri="{FF2B5EF4-FFF2-40B4-BE49-F238E27FC236}">
+                <a16:creationId xmlns:a16="http://schemas.microsoft.com/office/drawing/2014/main" id="{31E70209-0B52-4A4B-86F5-7CDB1F41D2FA}"/>
+              </a:ext>
+            </a:extLst>
+          </p:cNvPr>
+          <p:cNvSpPr txBox="1"/>
+          <p:nvPr/>
+        </p:nvSpPr>
+        <p:spPr>
+          <a:xfrm>
+            <a:off x="469900" y="1536700"/>
+            <a:ext cx="5422900" cy="292100"/>
+          </a:xfrm>
+          <a:prstGeom prst="rect">
+            <a:avLst/>
+          </a:prstGeom>
+          <a:noFill/>
+        </p:spPr>
+        <p:txBody>
+          <a:bodyPr vertOverflow="overflow" vert="horz" wrap="none" rtlCol="0" anchor="t">
+            <a:noAutofit/>
+          </a:bodyPr>
+          <a:lstStyle/>
+          <a:p>
+            <a:pPr algn="l"/>
+            <a:r>
+              <a:rPr lang="en-US" sz="1300" b="1">
+                <a:solidFill>
+                  <a:srgbClr val="FFFFFF"/>
+                </a:solidFill>
+              </a:rPr>
+              <a:t>✓  Patterns</a:t>
+            </a:r>
+          </a:p>
+        </p:txBody>
+      </p:sp>
+      <p:sp>
+        <p:nvSpPr>
+          <p:cNvPr id="7" name="Rectangle 6">
+            <a:extLst>
+              <a:ext uri="{FF2B5EF4-FFF2-40B4-BE49-F238E27FC236}">
+                <a16:creationId xmlns:a16="http://schemas.microsoft.com/office/drawing/2014/main" id="{10CA2B75-5051-E349-91EF-C8D7BEE0CF37}"/>
+              </a:ext>
+            </a:extLst>
+          </p:cNvPr>
+          <p:cNvSpPr/>
+          <p:nvPr/>
+        </p:nvSpPr>
+        <p:spPr>
+          <a:xfrm>
+            <a:off x="342900" y="1816100"/>
+            <a:ext cx="5676900" cy="3987800"/>
+          </a:xfrm>
+          <a:prstGeom prst="rect">
+            <a:avLst/>
+          </a:prstGeom>
+          <a:solidFill>
+            <a:srgbClr val="1E1E1E"/>
+          </a:solidFill>
+          <a:ln w="19050" cap="flat" cmpd="sng" algn="ctr">
+            <a:noFill/>
+            <a:prstDash val="solid"/>
+            <a:miter lim="800000"/>
+          </a:ln>
+        </p:spPr>
+        <p:style>
+          <a:lnRef idx="2">
+            <a:schemeClr val="accent1">
+              <a:shade val="15000"/>
+            </a:schemeClr>
+          </a:lnRef>
+          <a:fillRef idx="1">
+            <a:schemeClr val="accent1"/>
+          </a:fillRef>
+          <a:effectRef idx="0">
+            <a:schemeClr val="accent1"/>
+          </a:effectRef>
+          <a:fontRef idx="minor">
+            <a:schemeClr val="lt1"/>
+          </a:fontRef>
+        </p:style>
+        <p:txBody>
+          <a:bodyPr vertOverflow="clip" horzOverflow="clip" rtlCol="0" anchor="t"/>
+          <a:lstStyle/>
+          <a:p>
+            <a:pPr algn="l"/>
+            <a:endParaRPr lang="en-US"/>
+          </a:p>
+        </p:txBody>
+      </p:sp>
+      <p:sp>
+        <p:nvSpPr>
+          <p:cNvPr id="8" name="TextBox 7">
+            <a:extLst>
+              <a:ext uri="{FF2B5EF4-FFF2-40B4-BE49-F238E27FC236}">
+                <a16:creationId xmlns:a16="http://schemas.microsoft.com/office/drawing/2014/main" id="{FC2DB5F1-DEB5-A841-BA0A-F1DE7D8B6B59}"/>
+              </a:ext>
+            </a:extLst>
+          </p:cNvPr>
+          <p:cNvSpPr txBox="1"/>
+          <p:nvPr/>
+        </p:nvSpPr>
+        <p:spPr>
+          <a:xfrm>
+            <a:off x="469900" y="1892300"/>
+            <a:ext cx="5422900" cy="3848100"/>
+          </a:xfrm>
+          <a:prstGeom prst="rect">
+            <a:avLst/>
+          </a:prstGeom>
+          <a:noFill/>
+        </p:spPr>
+        <p:txBody>
+          <a:bodyPr vertOverflow="overflow" vert="horz" wrap="square" rtlCol="0" anchor="t">
+            <a:noAutofit/>
+          </a:bodyPr>
+          <a:lstStyle/>
+          <a:p>
+            <a:pPr algn="l">
+              <a:spcBef>
+                <a:spcPts val="100"/>
+              </a:spcBef>
+              <a:buNone/>
+            </a:pPr>
+            <a:r>
+              <a:rPr lang="en-US" sz="1100" dirty="0">
+                <a:solidFill>
+                  <a:srgbClr val="8FBF8F"/>
+                </a:solidFill>
+                <a:latin typeface="Consolas"/>
+                <a:cs typeface="Consolas"/>
+              </a:rPr>
+              <a:t>// Propagate with ? — concise, typed</a:t>
+            </a:r>
+          </a:p>
+          <a:p>
+            <a:pPr algn="l">
+              <a:spcBef>
+                <a:spcPts val="100"/>
+              </a:spcBef>
+              <a:buNone/>
+            </a:pPr>
+            <a:r>
+              <a:rPr lang="en-US" sz="1100" dirty="0">
+                <a:solidFill>
+                  <a:srgbClr val="EEEEEE"/>
+                </a:solidFill>
+                <a:latin typeface="Consolas"/>
+                <a:cs typeface="Consolas"/>
+              </a:rPr>
+              <a:t>fn load(path: &amp;str) -&gt; Result&lt;Config, Error&gt; {</a:t>
+            </a:r>
+          </a:p>
+          <a:p>
+            <a:pPr algn="l">
+              <a:spcBef>
+                <a:spcPts val="100"/>
+              </a:spcBef>
+              <a:buNone/>
+            </a:pPr>
+            <a:r>
+              <a:rPr lang="en-US" sz="1100" dirty="0">
+                <a:solidFill>
+                  <a:srgbClr val="EEEEEE"/>
+                </a:solidFill>
+                <a:latin typeface="Consolas"/>
+                <a:cs typeface="Consolas"/>
+              </a:rPr>
+              <a:t>    let text = fs::read_to_string(path)?;</a:t>
+            </a:r>
+          </a:p>
+          <a:p>
+            <a:pPr algn="l">
+              <a:spcBef>
+                <a:spcPts val="100"/>
+              </a:spcBef>
+              <a:buNone/>
+            </a:pPr>
+            <a:r>
+              <a:rPr lang="en-US" sz="1100" dirty="0">
+                <a:solidFill>
+                  <a:srgbClr val="EEEEEE"/>
+                </a:solidFill>
+                <a:latin typeface="Consolas"/>
+                <a:cs typeface="Consolas"/>
+              </a:rPr>
+              <a:t>    let cfg: Config = toml::from_str(&amp;text)?;</a:t>
+            </a:r>
+          </a:p>
+          <a:p>
+            <a:pPr algn="l">
+              <a:spcBef>
+                <a:spcPts val="100"/>
+              </a:spcBef>
+              <a:buNone/>
+            </a:pPr>
+            <a:r>
+              <a:rPr lang="en-US" sz="1100" dirty="0">
+                <a:solidFill>
+                  <a:srgbClr val="EEEEEE"/>
+                </a:solidFill>
+                <a:latin typeface="Consolas"/>
+                <a:cs typeface="Consolas"/>
+              </a:rPr>
+              <a:t>    Ok(cfg)</a:t>
+            </a:r>
+          </a:p>
+          <a:p>
+            <a:pPr algn="l">
+              <a:spcBef>
+                <a:spcPts val="100"/>
+              </a:spcBef>
+              <a:buNone/>
+            </a:pPr>
+            <a:r>
+              <a:rPr lang="en-US" sz="1100" dirty="0">
+                <a:solidFill>
+                  <a:srgbClr val="EEEEEE"/>
+                </a:solidFill>
+                <a:latin typeface="Consolas"/>
+                <a:cs typeface="Consolas"/>
+              </a:rPr>
+              <a:t>}</a:t>
+            </a:r>
+          </a:p>
+          <a:p>
+            <a:pPr algn="l">
+              <a:spcBef>
+                <a:spcPts val="100"/>
+              </a:spcBef>
+              <a:buNone/>
+            </a:pPr>
+            <a:endParaRPr lang="en-US" sz="1100" dirty="0">
+              <a:solidFill>
+                <a:srgbClr val="EEEEEE"/>
+              </a:solidFill>
+              <a:latin typeface="Consolas"/>
+              <a:cs typeface="Consolas"/>
+            </a:endParaRPr>
+          </a:p>
+          <a:p>
+            <a:pPr algn="l">
+              <a:spcBef>
+                <a:spcPts val="100"/>
+              </a:spcBef>
+              <a:buNone/>
+            </a:pPr>
+            <a:r>
+              <a:rPr lang="en-US" sz="1100" dirty="0">
+                <a:solidFill>
+                  <a:srgbClr val="8FBF8F"/>
+                </a:solidFill>
+                <a:latin typeface="Consolas"/>
+                <a:cs typeface="Consolas"/>
+              </a:rPr>
+              <a:t>// Match when each variant matters</a:t>
+            </a:r>
+          </a:p>
+          <a:p>
+            <a:pPr algn="l">
+              <a:spcBef>
+                <a:spcPts val="100"/>
+              </a:spcBef>
+              <a:buNone/>
+            </a:pPr>
+            <a:r>
+              <a:rPr lang="en-US" sz="1100" dirty="0">
+                <a:solidFill>
+                  <a:srgbClr val="EEEEEE"/>
+                </a:solidFill>
+                <a:latin typeface="Consolas"/>
+                <a:cs typeface="Consolas"/>
+              </a:rPr>
+              <a:t>match parse(s) {</a:t>
+            </a:r>
+          </a:p>
+          <a:p>
+            <a:pPr algn="l">
+              <a:spcBef>
+                <a:spcPts val="100"/>
+              </a:spcBef>
+              <a:buNone/>
+            </a:pPr>
+            <a:r>
+              <a:rPr lang="en-US" sz="1100" dirty="0">
+                <a:solidFill>
+                  <a:srgbClr val="EEEEEE"/>
+                </a:solidFill>
+                <a:latin typeface="Consolas"/>
+                <a:cs typeface="Consolas"/>
+              </a:rPr>
+              <a:t>    Ok(v)  =&gt; use_it(v),</a:t>
+            </a:r>
+          </a:p>
+          <a:p>
+            <a:pPr algn="l">
+              <a:spcBef>
+                <a:spcPts val="100"/>
+              </a:spcBef>
+              <a:buNone/>
+            </a:pPr>
+            <a:r>
+              <a:rPr lang="en-US" sz="1100" dirty="0">
+                <a:solidFill>
+                  <a:srgbClr val="EEEEEE"/>
+                </a:solidFill>
+                <a:latin typeface="Consolas"/>
+                <a:cs typeface="Consolas"/>
+              </a:rPr>
+              <a:t>    Err(e) =&gt; log::warn!("bad input: {e}"),</a:t>
+            </a:r>
+          </a:p>
+          <a:p>
+            <a:pPr algn="l">
+              <a:spcBef>
+                <a:spcPts val="100"/>
+              </a:spcBef>
+              <a:buNone/>
+            </a:pPr>
+            <a:r>
+              <a:rPr lang="en-US" sz="1100" dirty="0">
+                <a:solidFill>
+                  <a:srgbClr val="EEEEEE"/>
+                </a:solidFill>
+                <a:latin typeface="Consolas"/>
+                <a:cs typeface="Consolas"/>
+              </a:rPr>
+              <a:t>}</a:t>
+            </a:r>
+          </a:p>
+          <a:p>
+            <a:pPr algn="l">
+              <a:spcBef>
+                <a:spcPts val="100"/>
+              </a:spcBef>
+              <a:buNone/>
+            </a:pPr>
+            <a:endParaRPr lang="en-US" sz="1100" dirty="0">
+              <a:solidFill>
+                <a:srgbClr val="EEEEEE"/>
+              </a:solidFill>
+              <a:latin typeface="Consolas"/>
+              <a:cs typeface="Consolas"/>
+            </a:endParaRPr>
+          </a:p>
+          <a:p>
+            <a:pPr algn="l">
+              <a:spcBef>
+                <a:spcPts val="100"/>
+              </a:spcBef>
+              <a:buNone/>
+            </a:pPr>
+            <a:r>
+              <a:rPr lang="en-US" sz="1100" dirty="0">
+                <a:solidFill>
+                  <a:srgbClr val="8FBF8F"/>
+                </a:solidFill>
+                <a:latin typeface="Consolas"/>
+                <a:cs typeface="Consolas"/>
+              </a:rPr>
+              <a:t>// Recover with a default</a:t>
+            </a:r>
+          </a:p>
+          <a:p>
+            <a:pPr algn="l">
+              <a:spcBef>
+                <a:spcPts val="100"/>
+              </a:spcBef>
+              <a:buNone/>
+            </a:pPr>
+            <a:r>
+              <a:rPr lang="en-US" sz="1100" dirty="0">
+                <a:solidFill>
+                  <a:srgbClr val="EEEEEE"/>
+                </a:solidFill>
+                <a:latin typeface="Consolas"/>
+                <a:cs typeface="Consolas"/>
+              </a:rPr>
+              <a:t>let port = env_port().unwrap_or(8080);</a:t>
+            </a:r>
+          </a:p>
+          <a:p>
+            <a:pPr algn="l">
+              <a:spcBef>
+                <a:spcPts val="100"/>
+              </a:spcBef>
+              <a:buNone/>
+            </a:pPr>
+            <a:endParaRPr lang="en-US" sz="1100" dirty="0">
+              <a:solidFill>
+                <a:srgbClr val="EEEEEE"/>
+              </a:solidFill>
+              <a:latin typeface="Consolas"/>
+              <a:cs typeface="Consolas"/>
+            </a:endParaRPr>
+          </a:p>
+          <a:p>
+            <a:pPr algn="l">
+              <a:spcBef>
+                <a:spcPts val="100"/>
+              </a:spcBef>
+              <a:buNone/>
+            </a:pPr>
+            <a:r>
+              <a:rPr lang="en-US" sz="1100" dirty="0">
+                <a:solidFill>
+                  <a:srgbClr val="8FBF8F"/>
+                </a:solidFill>
+                <a:latin typeface="Consolas"/>
+                <a:cs typeface="Consolas"/>
+              </a:rPr>
+              <a:t>// Add context at boundaries (anyhow)</a:t>
+            </a:r>
+          </a:p>
+          <a:p>
+            <a:pPr algn="l">
+              <a:spcBef>
+                <a:spcPts val="100"/>
+              </a:spcBef>
+              <a:buNone/>
+            </a:pPr>
+            <a:r>
+              <a:rPr lang="en-US" sz="1100" dirty="0">
+                <a:solidFill>
+                  <a:srgbClr val="EEEEEE"/>
+                </a:solidFill>
+                <a:latin typeface="Consolas"/>
+                <a:cs typeface="Consolas"/>
+              </a:rPr>
+              <a:t>file.parse().context("parsing config")?;</a:t>
+            </a:r>
+          </a:p>
+        </p:txBody>
+      </p:sp>
+      <p:sp>
+        <p:nvSpPr>
+          <p:cNvPr id="9" name="Rectangle 8">
+            <a:extLst>
+              <a:ext uri="{FF2B5EF4-FFF2-40B4-BE49-F238E27FC236}">
+                <a16:creationId xmlns:a16="http://schemas.microsoft.com/office/drawing/2014/main" id="{E1FF20CC-C3D6-7149-9FA9-995DBED58952}"/>
+              </a:ext>
+            </a:extLst>
+          </p:cNvPr>
+          <p:cNvSpPr/>
+          <p:nvPr/>
+        </p:nvSpPr>
+        <p:spPr>
+          <a:xfrm>
+            <a:off x="6223000" y="1485900"/>
+            <a:ext cx="5676900" cy="330200"/>
+          </a:xfrm>
+          <a:prstGeom prst="rect">
+            <a:avLst/>
+          </a:prstGeom>
+          <a:solidFill>
+            <a:srgbClr val="CE422B"/>
+          </a:solidFill>
+          <a:ln w="19050" cap="flat" cmpd="sng" algn="ctr">
+            <a:noFill/>
+            <a:prstDash val="solid"/>
+            <a:miter lim="800000"/>
+          </a:ln>
+        </p:spPr>
+        <p:style>
+          <a:lnRef idx="2">
+            <a:schemeClr val="accent1">
+              <a:shade val="15000"/>
+            </a:schemeClr>
+          </a:lnRef>
+          <a:fillRef idx="1">
+            <a:schemeClr val="accent1"/>
+          </a:fillRef>
+          <a:effectRef idx="0">
+            <a:schemeClr val="accent1"/>
+          </a:effectRef>
+          <a:fontRef idx="minor">
+            <a:schemeClr val="lt1"/>
+          </a:fontRef>
+        </p:style>
+        <p:txBody>
+          <a:bodyPr vertOverflow="clip" horzOverflow="clip" rtlCol="0" anchor="t"/>
+          <a:lstStyle/>
+          <a:p>
+            <a:pPr algn="l"/>
+            <a:endParaRPr lang="en-US"/>
+          </a:p>
+        </p:txBody>
+      </p:sp>
+      <p:sp>
+        <p:nvSpPr>
+          <p:cNvPr id="10" name="TextBox 9">
+            <a:extLst>
+              <a:ext uri="{FF2B5EF4-FFF2-40B4-BE49-F238E27FC236}">
+                <a16:creationId xmlns:a16="http://schemas.microsoft.com/office/drawing/2014/main" id="{7D56BBC8-7077-844B-A483-004E7D5ACDDA}"/>
+              </a:ext>
+            </a:extLst>
+          </p:cNvPr>
+          <p:cNvSpPr txBox="1"/>
+          <p:nvPr/>
+        </p:nvSpPr>
+        <p:spPr>
+          <a:xfrm>
+            <a:off x="6350000" y="1536700"/>
+            <a:ext cx="5422900" cy="292100"/>
+          </a:xfrm>
+          <a:prstGeom prst="rect">
+            <a:avLst/>
+          </a:prstGeom>
+          <a:noFill/>
+        </p:spPr>
+        <p:txBody>
+          <a:bodyPr vertOverflow="overflow" vert="horz" wrap="none" rtlCol="0" anchor="t">
+            <a:noAutofit/>
+          </a:bodyPr>
+          <a:lstStyle/>
+          <a:p>
+            <a:pPr algn="l"/>
+            <a:r>
+              <a:rPr lang="en-US" sz="1300" b="1">
+                <a:solidFill>
+                  <a:srgbClr val="FFFFFF"/>
+                </a:solidFill>
+              </a:rPr>
+              <a:t>✗  Anti-patterns</a:t>
+            </a:r>
+          </a:p>
+        </p:txBody>
+      </p:sp>
+      <p:sp>
+        <p:nvSpPr>
+          <p:cNvPr id="11" name="Rectangle 10">
+            <a:extLst>
+              <a:ext uri="{FF2B5EF4-FFF2-40B4-BE49-F238E27FC236}">
+                <a16:creationId xmlns:a16="http://schemas.microsoft.com/office/drawing/2014/main" id="{87ADC5DE-F248-4D45-A011-8D9AF8C5B37F}"/>
+              </a:ext>
+            </a:extLst>
+          </p:cNvPr>
+          <p:cNvSpPr/>
+          <p:nvPr/>
+        </p:nvSpPr>
+        <p:spPr>
+          <a:xfrm>
+            <a:off x="6223000" y="1816100"/>
+            <a:ext cx="5676900" cy="3987800"/>
+          </a:xfrm>
+          <a:prstGeom prst="rect">
+            <a:avLst/>
+          </a:prstGeom>
+          <a:solidFill>
+            <a:srgbClr val="1E1E1E"/>
+          </a:solidFill>
+          <a:ln w="19050" cap="flat" cmpd="sng" algn="ctr">
+            <a:noFill/>
+            <a:prstDash val="solid"/>
+            <a:miter lim="800000"/>
+          </a:ln>
+        </p:spPr>
+        <p:style>
+          <a:lnRef idx="2">
+            <a:schemeClr val="accent1">
+              <a:shade val="15000"/>
+            </a:schemeClr>
+          </a:lnRef>
+          <a:fillRef idx="1">
+            <a:schemeClr val="accent1"/>
+          </a:fillRef>
+          <a:effectRef idx="0">
+            <a:schemeClr val="accent1"/>
+          </a:effectRef>
+          <a:fontRef idx="minor">
+            <a:schemeClr val="lt1"/>
+          </a:fontRef>
+        </p:style>
+        <p:txBody>
+          <a:bodyPr vertOverflow="clip" horzOverflow="clip" rtlCol="0" anchor="t"/>
+          <a:lstStyle/>
+          <a:p>
+            <a:pPr algn="l"/>
+            <a:endParaRPr lang="en-US"/>
+          </a:p>
+        </p:txBody>
+      </p:sp>
+      <p:sp>
+        <p:nvSpPr>
+          <p:cNvPr id="12" name="TextBox 11">
+            <a:extLst>
+              <a:ext uri="{FF2B5EF4-FFF2-40B4-BE49-F238E27FC236}">
+                <a16:creationId xmlns:a16="http://schemas.microsoft.com/office/drawing/2014/main" id="{9563ECAC-678F-1549-9D18-F2C8E8FA72A2}"/>
+              </a:ext>
+            </a:extLst>
+          </p:cNvPr>
+          <p:cNvSpPr txBox="1"/>
+          <p:nvPr/>
+        </p:nvSpPr>
+        <p:spPr>
+          <a:xfrm>
+            <a:off x="6350000" y="1892300"/>
+            <a:ext cx="5422900" cy="3848100"/>
+          </a:xfrm>
+          <a:prstGeom prst="rect">
+            <a:avLst/>
+          </a:prstGeom>
+          <a:noFill/>
+        </p:spPr>
+        <p:txBody>
+          <a:bodyPr vertOverflow="overflow" vert="horz" wrap="square" rtlCol="0" anchor="t">
+            <a:noAutofit/>
+          </a:bodyPr>
+          <a:lstStyle/>
+          <a:p>
+            <a:pPr algn="l">
+              <a:spcBef>
+                <a:spcPts val="100"/>
+              </a:spcBef>
+              <a:buNone/>
+            </a:pPr>
+            <a:r>
+              <a:rPr lang="en-US" sz="1100" dirty="0">
+                <a:solidFill>
+                  <a:srgbClr val="E89A8A"/>
+                </a:solidFill>
+                <a:latin typeface="Consolas"/>
+                <a:cs typeface="Consolas"/>
+              </a:rPr>
+              <a:t>// .unwrap() in library / prod code</a:t>
+            </a:r>
+          </a:p>
+          <a:p>
+            <a:pPr algn="l">
+              <a:spcBef>
+                <a:spcPts val="100"/>
+              </a:spcBef>
+              <a:buNone/>
+            </a:pPr>
+            <a:r>
+              <a:rPr lang="en-US" sz="1100" dirty="0">
+                <a:solidFill>
+                  <a:srgbClr val="EEEEEE"/>
+                </a:solidFill>
+                <a:latin typeface="Consolas"/>
+                <a:cs typeface="Consolas"/>
+              </a:rPr>
+              <a:t>let cfg = fs::read_to_string(path).unwrap();</a:t>
+            </a:r>
+          </a:p>
+          <a:p>
+            <a:pPr algn="l">
+              <a:spcBef>
+                <a:spcPts val="100"/>
+              </a:spcBef>
+              <a:buNone/>
+            </a:pPr>
+            <a:r>
+              <a:rPr lang="en-US" sz="1100" dirty="0">
+                <a:solidFill>
+                  <a:srgbClr val="888888"/>
+                </a:solidFill>
+                <a:latin typeface="Consolas"/>
+                <a:cs typeface="Consolas"/>
+              </a:rPr>
+              <a:t>// panics on any I/O error — no context</a:t>
+            </a:r>
+          </a:p>
+          <a:p>
+            <a:pPr algn="l">
+              <a:spcBef>
+                <a:spcPts val="100"/>
+              </a:spcBef>
+              <a:buNone/>
+            </a:pPr>
+            <a:endParaRPr lang="en-US" sz="1100" dirty="0">
+              <a:solidFill>
+                <a:srgbClr val="EEEEEE"/>
+              </a:solidFill>
+              <a:latin typeface="Consolas"/>
+              <a:cs typeface="Consolas"/>
+            </a:endParaRPr>
+          </a:p>
+          <a:p>
+            <a:pPr algn="l">
+              <a:spcBef>
+                <a:spcPts val="100"/>
+              </a:spcBef>
+              <a:buNone/>
+            </a:pPr>
+            <a:r>
+              <a:rPr lang="en-US" sz="1100" dirty="0">
+                <a:solidFill>
+                  <a:srgbClr val="E89A8A"/>
+                </a:solidFill>
+                <a:latin typeface="Consolas"/>
+                <a:cs typeface="Consolas"/>
+              </a:rPr>
+              <a:t>// panic!() for recoverable errors</a:t>
+            </a:r>
+          </a:p>
+          <a:p>
+            <a:pPr algn="l">
+              <a:spcBef>
+                <a:spcPts val="100"/>
+              </a:spcBef>
+              <a:buNone/>
+            </a:pPr>
+            <a:r>
+              <a:rPr lang="en-US" sz="1100" dirty="0">
+                <a:solidFill>
+                  <a:srgbClr val="EEEEEE"/>
+                </a:solidFill>
+                <a:latin typeface="Consolas"/>
+                <a:cs typeface="Consolas"/>
+              </a:rPr>
+              <a:t>if !valid(input) { panic!("bad input"); }</a:t>
+            </a:r>
+          </a:p>
+          <a:p>
+            <a:pPr algn="l">
+              <a:spcBef>
+                <a:spcPts val="100"/>
+              </a:spcBef>
+              <a:buNone/>
+            </a:pPr>
+            <a:r>
+              <a:rPr lang="en-US" sz="1100" dirty="0">
+                <a:solidFill>
+                  <a:srgbClr val="888888"/>
+                </a:solidFill>
+                <a:latin typeface="Consolas"/>
+                <a:cs typeface="Consolas"/>
+              </a:rPr>
+              <a:t>// caller can't handle it — process dies</a:t>
+            </a:r>
+          </a:p>
+          <a:p>
+            <a:pPr algn="l">
+              <a:spcBef>
+                <a:spcPts val="100"/>
+              </a:spcBef>
+              <a:buNone/>
+            </a:pPr>
+            <a:endParaRPr lang="en-US" sz="1100" dirty="0">
+              <a:solidFill>
+                <a:srgbClr val="EEEEEE"/>
+              </a:solidFill>
+              <a:latin typeface="Consolas"/>
+              <a:cs typeface="Consolas"/>
+            </a:endParaRPr>
+          </a:p>
+          <a:p>
+            <a:pPr algn="l">
+              <a:spcBef>
+                <a:spcPts val="100"/>
+              </a:spcBef>
+              <a:buNone/>
+            </a:pPr>
+            <a:r>
+              <a:rPr lang="en-US" sz="1100" dirty="0">
+                <a:solidFill>
+                  <a:srgbClr val="E89A8A"/>
+                </a:solidFill>
+                <a:latin typeface="Consolas"/>
+                <a:cs typeface="Consolas"/>
+              </a:rPr>
+              <a:t>// Swallowing the error</a:t>
+            </a:r>
+          </a:p>
+          <a:p>
+            <a:pPr algn="l">
+              <a:spcBef>
+                <a:spcPts val="100"/>
+              </a:spcBef>
+              <a:buNone/>
+            </a:pPr>
+            <a:r>
+              <a:rPr lang="en-US" sz="1100" dirty="0">
+                <a:solidFill>
+                  <a:srgbClr val="EEEEEE"/>
+                </a:solidFill>
+                <a:latin typeface="Consolas"/>
+                <a:cs typeface="Consolas"/>
+              </a:rPr>
+              <a:t>let _ = risky_call();</a:t>
+            </a:r>
+          </a:p>
+          <a:p>
+            <a:pPr algn="l">
+              <a:spcBef>
+                <a:spcPts val="100"/>
+              </a:spcBef>
+              <a:buNone/>
+            </a:pPr>
+            <a:r>
+              <a:rPr lang="en-US" sz="1100" dirty="0">
+                <a:solidFill>
+                  <a:srgbClr val="888888"/>
+                </a:solidFill>
+                <a:latin typeface="Consolas"/>
+                <a:cs typeface="Consolas"/>
+              </a:rPr>
+              <a:t>// silent failure — debugging nightmare</a:t>
+            </a:r>
+          </a:p>
+          <a:p>
+            <a:pPr algn="l">
+              <a:spcBef>
+                <a:spcPts val="100"/>
+              </a:spcBef>
+              <a:buNone/>
+            </a:pPr>
+            <a:endParaRPr lang="en-US" sz="1100" dirty="0">
+              <a:solidFill>
+                <a:srgbClr val="EEEEEE"/>
+              </a:solidFill>
+              <a:latin typeface="Consolas"/>
+              <a:cs typeface="Consolas"/>
+            </a:endParaRPr>
+          </a:p>
+          <a:p>
+            <a:pPr algn="l">
+              <a:spcBef>
+                <a:spcPts val="100"/>
+              </a:spcBef>
+              <a:buNone/>
+            </a:pPr>
+            <a:r>
+              <a:rPr lang="en-US" sz="1100" dirty="0">
+                <a:solidFill>
+                  <a:srgbClr val="E89A8A"/>
+                </a:solidFill>
+                <a:latin typeface="Consolas"/>
+                <a:cs typeface="Consolas"/>
+              </a:rPr>
+              <a:t>// Stringly-typed errors everywhere</a:t>
+            </a:r>
+          </a:p>
+          <a:p>
+            <a:pPr algn="l">
+              <a:spcBef>
+                <a:spcPts val="100"/>
+              </a:spcBef>
+              <a:buNone/>
+            </a:pPr>
+            <a:r>
+              <a:rPr lang="en-US" sz="1100" dirty="0">
+                <a:solidFill>
+                  <a:srgbClr val="EEEEEE"/>
+                </a:solidFill>
+                <a:latin typeface="Consolas"/>
+                <a:cs typeface="Consolas"/>
+              </a:rPr>
+              <a:t>fn run() -&gt; Result&lt;(), String&gt; { ... }</a:t>
+            </a:r>
+          </a:p>
+          <a:p>
+            <a:pPr algn="l">
+              <a:spcBef>
+                <a:spcPts val="100"/>
+              </a:spcBef>
+              <a:buNone/>
+            </a:pPr>
+            <a:r>
+              <a:rPr lang="en-US" sz="1100" dirty="0">
+                <a:solidFill>
+                  <a:srgbClr val="888888"/>
+                </a:solidFill>
+                <a:latin typeface="Consolas"/>
+                <a:cs typeface="Consolas"/>
+              </a:rPr>
+              <a:t>// no source chain, no downcasting</a:t>
+            </a:r>
+          </a:p>
+          <a:p>
+            <a:pPr algn="l">
+              <a:spcBef>
+                <a:spcPts val="100"/>
+              </a:spcBef>
+              <a:buNone/>
+            </a:pPr>
+            <a:endParaRPr lang="en-US" sz="1100" dirty="0">
+              <a:solidFill>
+                <a:srgbClr val="EEEEEE"/>
+              </a:solidFill>
+              <a:latin typeface="Consolas"/>
+              <a:cs typeface="Consolas"/>
+            </a:endParaRPr>
+          </a:p>
+          <a:p>
+            <a:pPr algn="l">
+              <a:spcBef>
+                <a:spcPts val="100"/>
+              </a:spcBef>
+              <a:buNone/>
+            </a:pPr>
+            <a:r>
+              <a:rPr lang="en-US" sz="1100" dirty="0">
+                <a:solidFill>
+                  <a:srgbClr val="E89A8A"/>
+                </a:solidFill>
+                <a:latin typeface="Consolas"/>
+                <a:cs typeface="Consolas"/>
+              </a:rPr>
+              <a:t>// .expect("this can't fail")</a:t>
+            </a:r>
+          </a:p>
+          <a:p>
+            <a:pPr algn="l">
+              <a:spcBef>
+                <a:spcPts val="100"/>
+              </a:spcBef>
+              <a:buNone/>
+            </a:pPr>
+            <a:r>
+              <a:rPr lang="en-US" sz="1100" dirty="0">
+                <a:solidFill>
+                  <a:srgbClr val="EEEEEE"/>
+                </a:solidFill>
+                <a:latin typeface="Consolas"/>
+                <a:cs typeface="Consolas"/>
+              </a:rPr>
+              <a:t>x.parse::&lt;u32&gt;().expect("trust me");</a:t>
+            </a:r>
+          </a:p>
+        </p:txBody>
+      </p:sp>
+      <p:sp>
+        <p:nvSpPr>
+          <p:cNvPr id="13" name="Rectangle 12">
+            <a:extLst>
+              <a:ext uri="{FF2B5EF4-FFF2-40B4-BE49-F238E27FC236}">
+                <a16:creationId xmlns:a16="http://schemas.microsoft.com/office/drawing/2014/main" id="{217DE853-E7EC-2F4B-BD7E-F44E47DDB61D}"/>
+              </a:ext>
+            </a:extLst>
+          </p:cNvPr>
+          <p:cNvSpPr/>
+          <p:nvPr/>
+        </p:nvSpPr>
+        <p:spPr>
+          <a:xfrm>
+            <a:off x="342900" y="5905500"/>
+            <a:ext cx="11557000" cy="635000"/>
+          </a:xfrm>
+          <a:prstGeom prst="rect">
+            <a:avLst/>
+          </a:prstGeom>
+          <a:solidFill>
+            <a:srgbClr val="F5F0EB"/>
+          </a:solidFill>
+          <a:ln w="19050" cap="flat" cmpd="sng" algn="ctr">
+            <a:noFill/>
+            <a:prstDash val="solid"/>
+            <a:miter lim="800000"/>
+          </a:ln>
+        </p:spPr>
+        <p:style>
+          <a:lnRef idx="2">
+            <a:schemeClr val="accent1">
+              <a:shade val="15000"/>
+            </a:schemeClr>
+          </a:lnRef>
+          <a:fillRef idx="1">
+            <a:schemeClr val="accent1"/>
+          </a:fillRef>
+          <a:effectRef idx="0">
+            <a:schemeClr val="accent1"/>
+          </a:effectRef>
+          <a:fontRef idx="minor">
+            <a:schemeClr val="lt1"/>
+          </a:fontRef>
+        </p:style>
+        <p:txBody>
+          <a:bodyPr vertOverflow="clip" horzOverflow="clip" rtlCol="0" anchor="t"/>
+          <a:lstStyle/>
+          <a:p>
+            <a:pPr algn="l"/>
+            <a:endParaRPr lang="en-US"/>
+          </a:p>
+        </p:txBody>
+      </p:sp>
+      <p:sp>
+        <p:nvSpPr>
+          <p:cNvPr id="14" name="TextBox 13">
+            <a:extLst>
+              <a:ext uri="{FF2B5EF4-FFF2-40B4-BE49-F238E27FC236}">
+                <a16:creationId xmlns:a16="http://schemas.microsoft.com/office/drawing/2014/main" id="{F7AC976A-B4D2-8A44-9606-99D9FDD70130}"/>
+              </a:ext>
+            </a:extLst>
+          </p:cNvPr>
+          <p:cNvSpPr txBox="1"/>
+          <p:nvPr/>
+        </p:nvSpPr>
+        <p:spPr>
+          <a:xfrm>
+            <a:off x="469900" y="5981700"/>
+            <a:ext cx="11303000" cy="482600"/>
+          </a:xfrm>
+          <a:prstGeom prst="rect">
+            <a:avLst/>
+          </a:prstGeom>
+          <a:noFill/>
+        </p:spPr>
+        <p:txBody>
+          <a:bodyPr vertOverflow="overflow" vert="horz" wrap="square" rtlCol="0" anchor="t">
+            <a:noAutofit/>
+          </a:bodyPr>
+          <a:lstStyle/>
+          <a:p>
+            <a:pPr algn="l"/>
+            <a:r>
+              <a:rPr lang="en-US" sz="1300" b="1">
+                <a:solidFill>
+                  <a:srgbClr val="1E1E1E"/>
+                </a:solidFill>
+              </a:rPr>
+              <a:t>Takeaway: </a:t>
+            </a:r>
+            <a:r>
+              <a:rPr lang="en-US" sz="1300">
+                <a:solidFill>
+                  <a:srgbClr val="333333"/>
+                </a:solidFill>
+              </a:rPr>
+              <a:t>return Result, propagate with ?, recover with combinators. Reserve panic for true bugs.</a:t>
+            </a:r>
+          </a:p>
+        </p:txBody>
+      </p:sp>
+    </p:spTree>
+    <p:extLst>
+      <p:ext uri="{BB962C8B-B14F-4D97-AF65-F5344CB8AC3E}">
+        <p14:creationId xmlns:p14="http://schemas.microsoft.com/office/powerpoint/2010/main" val="2905838251"/>
+      </p:ext>
+    </p:extLst>
+  </p:cSld>
+  <p:clrMapOvr>
+    <a:masterClrMapping/>
+  </p:clrMapOvr>
+</p:sld>
+</file>
+
+<file path=ppt/slides/slide32.xml><?xml version="1.0" encoding="utf-8"?>
+<p:sld xmlns:a="http://schemas.openxmlformats.org/drawingml/2006/main" xmlns:r="http://schemas.openxmlformats.org/officeDocument/2006/relationships" xmlns:p="http://schemas.openxmlformats.org/presentationml/2006/main">
+  <p:cSld>
+    <p:spTree>
+      <p:nvGrpSpPr>
+        <p:cNvPr id="1" name=""/>
+        <p:cNvGrpSpPr/>
+        <p:nvPr/>
+      </p:nvGrpSpPr>
+      <p:grpSpPr>
+        <a:xfrm>
+          <a:off x="0" y="0"/>
+          <a:ext cx="0" cy="0"/>
+          <a:chOff x="0" y="0"/>
+          <a:chExt cx="0" cy="0"/>
+        </a:xfrm>
+      </p:grpSpPr>
+      <p:sp>
+        <p:nvSpPr>
+          <p:cNvPr id="2" name="TextBox 1">
+            <a:extLst>
+              <a:ext uri="{FF2B5EF4-FFF2-40B4-BE49-F238E27FC236}">
+                <a16:creationId xmlns:a16="http://schemas.microsoft.com/office/drawing/2014/main" id="{A65A17A4-BC03-1840-AC50-EEDE5599E691}"/>
+              </a:ext>
+            </a:extLst>
+          </p:cNvPr>
+          <p:cNvSpPr txBox="1"/>
+          <p:nvPr/>
+        </p:nvSpPr>
+        <p:spPr>
+          <a:xfrm>
+            <a:off x="838200" y="317500"/>
+            <a:ext cx="10515600" cy="558800"/>
+          </a:xfrm>
+          <a:prstGeom prst="rect">
+            <a:avLst/>
+          </a:prstGeom>
+          <a:noFill/>
+        </p:spPr>
+        <p:txBody>
+          <a:bodyPr vertOverflow="overflow" vert="horz" wrap="square" rtlCol="0" anchor="t">
+            <a:noAutofit/>
+          </a:bodyPr>
+          <a:lstStyle/>
+          <a:p>
+            <a:pPr algn="l"/>
+            <a:r>
+              <a:rPr lang="en-US" sz="3000" b="1">
+                <a:solidFill>
+                  <a:srgbClr val="1E1E1E"/>
+                </a:solidFill>
+              </a:rPr>
+              <a:t>Concurrency &amp; async</a:t>
+            </a:r>
+          </a:p>
+        </p:txBody>
+      </p:sp>
+      <p:sp>
+        <p:nvSpPr>
+          <p:cNvPr id="3" name="Rectangle 2">
+            <a:extLst>
+              <a:ext uri="{FF2B5EF4-FFF2-40B4-BE49-F238E27FC236}">
+                <a16:creationId xmlns:a16="http://schemas.microsoft.com/office/drawing/2014/main" id="{C18E13C4-ED63-A840-8417-30F1BF5A3379}"/>
+              </a:ext>
+            </a:extLst>
+          </p:cNvPr>
+          <p:cNvSpPr/>
+          <p:nvPr/>
+        </p:nvSpPr>
+        <p:spPr>
+          <a:xfrm>
+            <a:off x="838200" y="914400"/>
+            <a:ext cx="762000" cy="50800"/>
+          </a:xfrm>
+          <a:prstGeom prst="rect">
+            <a:avLst/>
+          </a:prstGeom>
+          <a:solidFill>
+            <a:srgbClr val="CE422B"/>
+          </a:solidFill>
+          <a:ln w="19050" cap="flat" cmpd="sng" algn="ctr">
+            <a:noFill/>
+            <a:prstDash val="solid"/>
+            <a:miter lim="800000"/>
+          </a:ln>
+        </p:spPr>
+        <p:style>
+          <a:lnRef idx="2">
+            <a:schemeClr val="accent1">
+              <a:shade val="15000"/>
+            </a:schemeClr>
+          </a:lnRef>
+          <a:fillRef idx="1">
+            <a:schemeClr val="accent1"/>
+          </a:fillRef>
+          <a:effectRef idx="0">
+            <a:schemeClr val="accent1"/>
+          </a:effectRef>
+          <a:fontRef idx="minor">
+            <a:schemeClr val="lt1"/>
+          </a:fontRef>
+        </p:style>
+        <p:txBody>
+          <a:bodyPr vertOverflow="clip" horzOverflow="clip" rtlCol="0" anchor="t"/>
+          <a:lstStyle/>
+          <a:p>
+            <a:pPr algn="l"/>
+            <a:endParaRPr lang="en-US"/>
+          </a:p>
+        </p:txBody>
+      </p:sp>
+      <p:sp>
+        <p:nvSpPr>
+          <p:cNvPr id="4" name="TextBox 3">
+            <a:extLst>
+              <a:ext uri="{FF2B5EF4-FFF2-40B4-BE49-F238E27FC236}">
+                <a16:creationId xmlns:a16="http://schemas.microsoft.com/office/drawing/2014/main" id="{76ECD5CE-6968-C54A-AA3E-A2F8231E5897}"/>
+              </a:ext>
+            </a:extLst>
+          </p:cNvPr>
+          <p:cNvSpPr txBox="1"/>
+          <p:nvPr/>
+        </p:nvSpPr>
+        <p:spPr>
+          <a:xfrm>
+            <a:off x="838200" y="1066800"/>
+            <a:ext cx="10515600" cy="304800"/>
+          </a:xfrm>
+          <a:prstGeom prst="rect">
+            <a:avLst/>
+          </a:prstGeom>
+          <a:noFill/>
+        </p:spPr>
+        <p:txBody>
+          <a:bodyPr vertOverflow="overflow" vert="horz" wrap="square" rtlCol="0" anchor="t">
+            <a:noAutofit/>
+          </a:bodyPr>
+          <a:lstStyle/>
+          <a:p>
+            <a:pPr algn="l"/>
+            <a:r>
+              <a:rPr lang="en-US" sz="1400">
+                <a:solidFill>
+                  <a:srgbClr val="555555"/>
+                </a:solidFill>
+              </a:rPr>
+              <a:t>Threads for CPU work, async/.await for I/O — both are fearless thanks to the borrow checker</a:t>
+            </a:r>
+          </a:p>
+        </p:txBody>
+      </p:sp>
+      <p:sp>
+        <p:nvSpPr>
+          <p:cNvPr id="5" name="Rectangle 4">
+            <a:extLst>
+              <a:ext uri="{FF2B5EF4-FFF2-40B4-BE49-F238E27FC236}">
+                <a16:creationId xmlns:a16="http://schemas.microsoft.com/office/drawing/2014/main" id="{1A8C37A1-DEA9-4342-9C55-867F96E503E1}"/>
+              </a:ext>
+            </a:extLst>
+          </p:cNvPr>
+          <p:cNvSpPr/>
+          <p:nvPr/>
+        </p:nvSpPr>
+        <p:spPr>
+          <a:xfrm>
+            <a:off x="342900" y="1485900"/>
+            <a:ext cx="5676900" cy="330200"/>
+          </a:xfrm>
+          <a:prstGeom prst="rect">
+            <a:avLst/>
+          </a:prstGeom>
+          <a:solidFill>
+            <a:srgbClr val="1E1E1E"/>
+          </a:solidFill>
+          <a:ln w="19050" cap="flat" cmpd="sng" algn="ctr">
+            <a:noFill/>
+            <a:prstDash val="solid"/>
+            <a:miter lim="800000"/>
+          </a:ln>
+        </p:spPr>
+        <p:style>
+          <a:lnRef idx="2">
+            <a:schemeClr val="accent1">
+              <a:shade val="15000"/>
+            </a:schemeClr>
+          </a:lnRef>
+          <a:fillRef idx="1">
+            <a:schemeClr val="accent1"/>
+          </a:fillRef>
+          <a:effectRef idx="0">
+            <a:schemeClr val="accent1"/>
+          </a:effectRef>
+          <a:fontRef idx="minor">
+            <a:schemeClr val="lt1"/>
+          </a:fontRef>
+        </p:style>
+        <p:txBody>
+          <a:bodyPr vertOverflow="clip" horzOverflow="clip" rtlCol="0" anchor="t"/>
+          <a:lstStyle/>
+          <a:p>
+            <a:pPr algn="l"/>
+            <a:endParaRPr lang="en-US"/>
+          </a:p>
+        </p:txBody>
+      </p:sp>
+      <p:sp>
+        <p:nvSpPr>
+          <p:cNvPr id="6" name="TextBox 5">
+            <a:extLst>
+              <a:ext uri="{FF2B5EF4-FFF2-40B4-BE49-F238E27FC236}">
+                <a16:creationId xmlns:a16="http://schemas.microsoft.com/office/drawing/2014/main" id="{098C1237-D8D4-5C46-B2A8-5AA9AD8F7C46}"/>
+              </a:ext>
+            </a:extLst>
+          </p:cNvPr>
+          <p:cNvSpPr txBox="1"/>
+          <p:nvPr/>
+        </p:nvSpPr>
+        <p:spPr>
+          <a:xfrm>
+            <a:off x="469900" y="1536700"/>
+            <a:ext cx="5422900" cy="292100"/>
+          </a:xfrm>
+          <a:prstGeom prst="rect">
+            <a:avLst/>
+          </a:prstGeom>
+          <a:noFill/>
+        </p:spPr>
+        <p:txBody>
+          <a:bodyPr vertOverflow="overflow" vert="horz" wrap="square" rtlCol="0" anchor="t">
+            <a:noAutofit/>
+          </a:bodyPr>
+          <a:lstStyle/>
+          <a:p>
+            <a:pPr algn="l"/>
+            <a:r>
+              <a:rPr lang="en-US" sz="1300" b="1">
+                <a:solidFill>
+                  <a:srgbClr val="FFFFFF"/>
+                </a:solidFill>
+              </a:rPr>
+              <a:t>The model</a:t>
+            </a:r>
+          </a:p>
+        </p:txBody>
+      </p:sp>
+      <p:sp>
+        <p:nvSpPr>
+          <p:cNvPr id="7" name="Rectangle 6">
+            <a:extLst>
+              <a:ext uri="{FF2B5EF4-FFF2-40B4-BE49-F238E27FC236}">
+                <a16:creationId xmlns:a16="http://schemas.microsoft.com/office/drawing/2014/main" id="{40E6E200-4A4B-0247-86C8-94BE29AE1D85}"/>
+              </a:ext>
+            </a:extLst>
+          </p:cNvPr>
+          <p:cNvSpPr/>
+          <p:nvPr/>
+        </p:nvSpPr>
+        <p:spPr>
+          <a:xfrm>
+            <a:off x="342900" y="1816100"/>
+            <a:ext cx="5676900" cy="3987800"/>
+          </a:xfrm>
+          <a:prstGeom prst="rect">
+            <a:avLst/>
+          </a:prstGeom>
+          <a:solidFill>
+            <a:srgbClr val="F5F0EB"/>
+          </a:solidFill>
+          <a:ln w="19050" cap="flat" cmpd="sng" algn="ctr">
+            <a:noFill/>
+            <a:prstDash val="solid"/>
+            <a:miter lim="800000"/>
+          </a:ln>
+        </p:spPr>
+        <p:style>
+          <a:lnRef idx="2">
+            <a:schemeClr val="accent1">
+              <a:shade val="15000"/>
+            </a:schemeClr>
+          </a:lnRef>
+          <a:fillRef idx="1">
+            <a:schemeClr val="accent1"/>
+          </a:fillRef>
+          <a:effectRef idx="0">
+            <a:schemeClr val="accent1"/>
+          </a:effectRef>
+          <a:fontRef idx="minor">
+            <a:schemeClr val="lt1"/>
+          </a:fontRef>
+        </p:style>
+        <p:txBody>
+          <a:bodyPr vertOverflow="clip" horzOverflow="clip" rtlCol="0" anchor="t"/>
+          <a:lstStyle/>
+          <a:p>
+            <a:pPr algn="l"/>
+            <a:endParaRPr lang="en-US"/>
+          </a:p>
+        </p:txBody>
+      </p:sp>
+      <p:sp>
+        <p:nvSpPr>
+          <p:cNvPr id="8" name="TextBox 7">
+            <a:extLst>
+              <a:ext uri="{FF2B5EF4-FFF2-40B4-BE49-F238E27FC236}">
+                <a16:creationId xmlns:a16="http://schemas.microsoft.com/office/drawing/2014/main" id="{671DF8B5-4D33-F147-A200-740D0DB764C4}"/>
+              </a:ext>
+            </a:extLst>
+          </p:cNvPr>
+          <p:cNvSpPr txBox="1"/>
+          <p:nvPr/>
+        </p:nvSpPr>
+        <p:spPr>
+          <a:xfrm>
+            <a:off x="596900" y="1943100"/>
+            <a:ext cx="5168900" cy="3733800"/>
+          </a:xfrm>
+          <a:prstGeom prst="rect">
+            <a:avLst/>
+          </a:prstGeom>
+          <a:noFill/>
+        </p:spPr>
+        <p:txBody>
+          <a:bodyPr vertOverflow="overflow" vert="horz" wrap="square" rtlCol="0" anchor="t">
+            <a:noAutofit/>
+          </a:bodyPr>
+          <a:lstStyle/>
+          <a:p>
+            <a:pPr algn="l">
+              <a:spcBef>
+                <a:spcPts val="0"/>
+              </a:spcBef>
+              <a:buNone/>
+            </a:pPr>
+            <a:r>
+              <a:rPr lang="en-US" sz="1400" b="1" dirty="0">
+                <a:solidFill>
+                  <a:srgbClr val="CE422B"/>
+                </a:solidFill>
+              </a:rPr>
+              <a:t>Threads — std::thread</a:t>
+            </a:r>
+          </a:p>
+          <a:p>
+            <a:pPr algn="l">
+              <a:spcBef>
+                <a:spcPts val="300"/>
+              </a:spcBef>
+              <a:buNone/>
+            </a:pPr>
+            <a:r>
+              <a:rPr lang="en-US" sz="1300" dirty="0">
+                <a:solidFill>
+                  <a:srgbClr val="1E1E1E"/>
+                </a:solidFill>
+              </a:rPr>
+              <a:t>OS threads for CPU-bound work. Send + Sync bounds prove data-race freedom at compile time.</a:t>
+            </a:r>
+          </a:p>
+          <a:p>
+            <a:pPr algn="l">
+              <a:spcBef>
+                <a:spcPts val="600"/>
+              </a:spcBef>
+              <a:buNone/>
+            </a:pPr>
+            <a:r>
+              <a:rPr lang="en-US" sz="1400" b="1" dirty="0">
+                <a:solidFill>
+                  <a:srgbClr val="CE422B"/>
+                </a:solidFill>
+              </a:rPr>
+              <a:t>async / .await</a:t>
+            </a:r>
+          </a:p>
+          <a:p>
+            <a:pPr algn="l">
+              <a:spcBef>
+                <a:spcPts val="300"/>
+              </a:spcBef>
+              <a:buNone/>
+            </a:pPr>
+            <a:r>
+              <a:rPr lang="en-US" sz="1300" b="1" dirty="0">
+                <a:latin typeface="Consolas"/>
+                <a:cs typeface="Consolas"/>
+              </a:rPr>
+              <a:t>async fn</a:t>
+            </a:r>
+            <a:r>
+              <a:rPr lang="en-US" sz="1300" dirty="0">
+                <a:solidFill>
+                  <a:srgbClr val="1E1E1E"/>
+                </a:solidFill>
+              </a:rPr>
+              <a:t> returns a </a:t>
+            </a:r>
+            <a:r>
+              <a:rPr lang="en-US" sz="1300" b="1" dirty="0">
+                <a:latin typeface="Consolas"/>
+                <a:cs typeface="Consolas"/>
+              </a:rPr>
+              <a:t>Future</a:t>
+            </a:r>
+            <a:r>
+              <a:rPr lang="en-US" sz="1300" dirty="0">
+                <a:solidFill>
+                  <a:srgbClr val="1E1E1E"/>
+                </a:solidFill>
+              </a:rPr>
+              <a:t> — lazy, runs only when polled by a runtime (tokio, async-std).</a:t>
+            </a:r>
+          </a:p>
+          <a:p>
+            <a:pPr algn="l">
+              <a:spcBef>
+                <a:spcPts val="300"/>
+              </a:spcBef>
+              <a:buNone/>
+            </a:pPr>
+            <a:r>
+              <a:rPr lang="en-US" sz="1300" b="1" dirty="0">
+                <a:latin typeface="Consolas"/>
+                <a:cs typeface="Consolas"/>
+              </a:rPr>
+              <a:t>.await</a:t>
+            </a:r>
+            <a:r>
+              <a:rPr lang="en-US" sz="1300" dirty="0">
+                <a:solidFill>
+                  <a:srgbClr val="1E1E1E"/>
+                </a:solidFill>
+              </a:rPr>
+              <a:t> yields to the runtime until the future is ready — no thread is blocked.</a:t>
+            </a:r>
+          </a:p>
+          <a:p>
+            <a:pPr algn="l">
+              <a:spcBef>
+                <a:spcPts val="600"/>
+              </a:spcBef>
+              <a:buNone/>
+            </a:pPr>
+            <a:r>
+              <a:rPr lang="en-US" sz="1400" b="1" dirty="0">
+                <a:solidFill>
+                  <a:srgbClr val="CE422B"/>
+                </a:solidFill>
+              </a:rPr>
+              <a:t>Combine futures</a:t>
+            </a:r>
+          </a:p>
+          <a:p>
+            <a:pPr algn="l">
+              <a:spcBef>
+                <a:spcPts val="300"/>
+              </a:spcBef>
+              <a:buNone/>
+            </a:pPr>
+            <a:r>
+              <a:rPr lang="en-US" sz="1300" b="1" dirty="0">
+                <a:latin typeface="Consolas"/>
+                <a:cs typeface="Consolas"/>
+              </a:rPr>
+              <a:t>join!</a:t>
+            </a:r>
+            <a:r>
+              <a:rPr lang="en-US" sz="1300" dirty="0">
+                <a:solidFill>
+                  <a:srgbClr val="1E1E1E"/>
+                </a:solidFill>
+              </a:rPr>
+              <a:t> runs futures concurrently on one task; </a:t>
+            </a:r>
+            <a:r>
+              <a:rPr lang="en-US" sz="1300" b="1" dirty="0">
+                <a:latin typeface="Consolas"/>
+                <a:cs typeface="Consolas"/>
+              </a:rPr>
+              <a:t>spawn</a:t>
+            </a:r>
+            <a:r>
+              <a:rPr lang="en-US" sz="1300" dirty="0">
+                <a:solidFill>
+                  <a:srgbClr val="1E1E1E"/>
+                </a:solidFill>
+              </a:rPr>
+              <a:t> moves a task onto the runtime; </a:t>
+            </a:r>
+            <a:r>
+              <a:rPr lang="en-US" sz="1300" b="1" dirty="0">
+                <a:latin typeface="Consolas"/>
+                <a:cs typeface="Consolas"/>
+              </a:rPr>
+              <a:t>select!</a:t>
+            </a:r>
+            <a:r>
+              <a:rPr lang="en-US" sz="1300" dirty="0">
+                <a:solidFill>
+                  <a:srgbClr val="1E1E1E"/>
+                </a:solidFill>
+              </a:rPr>
+              <a:t> races them.</a:t>
+            </a:r>
+          </a:p>
+        </p:txBody>
+      </p:sp>
+      <p:sp>
+        <p:nvSpPr>
+          <p:cNvPr id="9" name="Rectangle 8">
+            <a:extLst>
+              <a:ext uri="{FF2B5EF4-FFF2-40B4-BE49-F238E27FC236}">
+                <a16:creationId xmlns:a16="http://schemas.microsoft.com/office/drawing/2014/main" id="{F3C84258-B53F-664B-A23F-236166ACCD14}"/>
+              </a:ext>
+            </a:extLst>
+          </p:cNvPr>
+          <p:cNvSpPr/>
+          <p:nvPr/>
+        </p:nvSpPr>
+        <p:spPr>
+          <a:xfrm>
+            <a:off x="6223000" y="1485900"/>
+            <a:ext cx="5676900" cy="330200"/>
+          </a:xfrm>
+          <a:prstGeom prst="rect">
+            <a:avLst/>
+          </a:prstGeom>
+          <a:solidFill>
+            <a:srgbClr val="1E1E1E"/>
+          </a:solidFill>
+          <a:ln w="19050" cap="flat" cmpd="sng" algn="ctr">
+            <a:noFill/>
+            <a:prstDash val="solid"/>
+            <a:miter lim="800000"/>
+          </a:ln>
+        </p:spPr>
+        <p:style>
+          <a:lnRef idx="2">
+            <a:schemeClr val="accent1">
+              <a:shade val="15000"/>
+            </a:schemeClr>
+          </a:lnRef>
+          <a:fillRef idx="1">
+            <a:schemeClr val="accent1"/>
+          </a:fillRef>
+          <a:effectRef idx="0">
+            <a:schemeClr val="accent1"/>
+          </a:effectRef>
+          <a:fontRef idx="minor">
+            <a:schemeClr val="lt1"/>
+          </a:fontRef>
+        </p:style>
+        <p:txBody>
+          <a:bodyPr vertOverflow="clip" horzOverflow="clip" rtlCol="0" anchor="t"/>
+          <a:lstStyle/>
+          <a:p>
+            <a:pPr algn="l"/>
+            <a:endParaRPr lang="en-US"/>
+          </a:p>
+        </p:txBody>
+      </p:sp>
+      <p:sp>
+        <p:nvSpPr>
+          <p:cNvPr id="10" name="TextBox 9">
+            <a:extLst>
+              <a:ext uri="{FF2B5EF4-FFF2-40B4-BE49-F238E27FC236}">
+                <a16:creationId xmlns:a16="http://schemas.microsoft.com/office/drawing/2014/main" id="{850EC10E-3DE8-5D4A-A52A-92BF48452DA8}"/>
+              </a:ext>
+            </a:extLst>
+          </p:cNvPr>
+          <p:cNvSpPr txBox="1"/>
+          <p:nvPr/>
+        </p:nvSpPr>
+        <p:spPr>
+          <a:xfrm>
+            <a:off x="6350000" y="1536700"/>
+            <a:ext cx="5422900" cy="292100"/>
+          </a:xfrm>
+          <a:prstGeom prst="rect">
+            <a:avLst/>
+          </a:prstGeom>
+          <a:noFill/>
+        </p:spPr>
+        <p:txBody>
+          <a:bodyPr vertOverflow="overflow" vert="horz" wrap="square" rtlCol="0" anchor="t">
+            <a:noAutofit/>
+          </a:bodyPr>
+          <a:lstStyle/>
+          <a:p>
+            <a:pPr algn="l"/>
+            <a:r>
+              <a:rPr lang="en-US" sz="1300" b="1">
+                <a:solidFill>
+                  <a:srgbClr val="FFFFFF"/>
+                </a:solidFill>
+              </a:rPr>
+              <a:t>Two URLs in parallel — tokio</a:t>
+            </a:r>
+          </a:p>
+        </p:txBody>
+      </p:sp>
+      <p:sp>
+        <p:nvSpPr>
+          <p:cNvPr id="11" name="Rectangle 10">
+            <a:extLst>
+              <a:ext uri="{FF2B5EF4-FFF2-40B4-BE49-F238E27FC236}">
+                <a16:creationId xmlns:a16="http://schemas.microsoft.com/office/drawing/2014/main" id="{866AC6FA-4073-E449-80E5-B51EC9EE3ECD}"/>
+              </a:ext>
+            </a:extLst>
+          </p:cNvPr>
+          <p:cNvSpPr/>
+          <p:nvPr/>
+        </p:nvSpPr>
+        <p:spPr>
+          <a:xfrm>
+            <a:off x="6223000" y="1816100"/>
+            <a:ext cx="5676900" cy="3987800"/>
+          </a:xfrm>
+          <a:prstGeom prst="rect">
+            <a:avLst/>
+          </a:prstGeom>
+          <a:solidFill>
+            <a:srgbClr val="1E1E1E"/>
+          </a:solidFill>
+          <a:ln w="19050" cap="flat" cmpd="sng" algn="ctr">
+            <a:noFill/>
+            <a:prstDash val="solid"/>
+            <a:miter lim="800000"/>
+          </a:ln>
+        </p:spPr>
+        <p:style>
+          <a:lnRef idx="2">
+            <a:schemeClr val="accent1">
+              <a:shade val="15000"/>
+            </a:schemeClr>
+          </a:lnRef>
+          <a:fillRef idx="1">
+            <a:schemeClr val="accent1"/>
+          </a:fillRef>
+          <a:effectRef idx="0">
+            <a:schemeClr val="accent1"/>
+          </a:effectRef>
+          <a:fontRef idx="minor">
+            <a:schemeClr val="lt1"/>
+          </a:fontRef>
+        </p:style>
+        <p:txBody>
+          <a:bodyPr vertOverflow="clip" horzOverflow="clip" rtlCol="0" anchor="t"/>
+          <a:lstStyle/>
+          <a:p>
+            <a:pPr algn="l"/>
+            <a:endParaRPr lang="en-US"/>
+          </a:p>
+        </p:txBody>
+      </p:sp>
+      <p:sp>
+        <p:nvSpPr>
+          <p:cNvPr id="12" name="TextBox 11">
+            <a:extLst>
+              <a:ext uri="{FF2B5EF4-FFF2-40B4-BE49-F238E27FC236}">
+                <a16:creationId xmlns:a16="http://schemas.microsoft.com/office/drawing/2014/main" id="{6F0D29D4-DE08-6D42-BD77-828A03F7E57F}"/>
+              </a:ext>
+            </a:extLst>
+          </p:cNvPr>
+          <p:cNvSpPr txBox="1"/>
+          <p:nvPr/>
+        </p:nvSpPr>
+        <p:spPr>
+          <a:xfrm>
+            <a:off x="6350000" y="1892300"/>
+            <a:ext cx="5422900" cy="3848100"/>
+          </a:xfrm>
+          <a:prstGeom prst="rect">
+            <a:avLst/>
+          </a:prstGeom>
+          <a:noFill/>
+        </p:spPr>
+        <p:txBody>
+          <a:bodyPr vertOverflow="overflow" vert="horz" wrap="square" rtlCol="0" anchor="t">
+            <a:noAutofit/>
+          </a:bodyPr>
+          <a:lstStyle/>
+          <a:p>
+            <a:pPr algn="l">
+              <a:spcBef>
+                <a:spcPts val="0"/>
+              </a:spcBef>
+              <a:buNone/>
+            </a:pPr>
+            <a:r>
+              <a:rPr lang="en-US" sz="1100" dirty="0">
+                <a:solidFill>
+                  <a:srgbClr val="EEEEEE"/>
+                </a:solidFill>
+                <a:latin typeface="Consolas"/>
+                <a:cs typeface="Consolas"/>
+              </a:rPr>
+              <a:t>use reqwest;</a:t>
+            </a:r>
+          </a:p>
+          <a:p>
+            <a:pPr algn="l">
+              <a:spcBef>
+                <a:spcPts val="0"/>
+              </a:spcBef>
+              <a:buNone/>
+            </a:pPr>
+            <a:endParaRPr lang="en-US" sz="800" dirty="0">
+              <a:solidFill>
+                <a:srgbClr val="EEEEEE"/>
+              </a:solidFill>
+              <a:latin typeface="Consolas"/>
+              <a:cs typeface="Consolas"/>
+            </a:endParaRPr>
+          </a:p>
+          <a:p>
+            <a:pPr algn="l">
+              <a:spcBef>
+                <a:spcPts val="0"/>
+              </a:spcBef>
+              <a:buNone/>
+            </a:pPr>
+            <a:r>
+              <a:rPr lang="en-US" sz="1100" dirty="0">
+                <a:solidFill>
+                  <a:srgbClr val="EEEEEE"/>
+                </a:solidFill>
+                <a:latin typeface="Consolas"/>
+                <a:cs typeface="Consolas"/>
+              </a:rPr>
+              <a:t>async fn fetch(url: &amp;str) -&gt; reqwest::Result&lt;usize&gt; {</a:t>
+            </a:r>
+          </a:p>
+          <a:p>
+            <a:pPr algn="l">
+              <a:spcBef>
+                <a:spcPts val="0"/>
+              </a:spcBef>
+              <a:buNone/>
+            </a:pPr>
+            <a:r>
+              <a:rPr lang="en-US" sz="1100" dirty="0">
+                <a:solidFill>
+                  <a:srgbClr val="EEEEEE"/>
+                </a:solidFill>
+                <a:latin typeface="Consolas"/>
+                <a:cs typeface="Consolas"/>
+              </a:rPr>
+              <a:t>    let body = reqwest::get(url).await?</a:t>
+            </a:r>
+          </a:p>
+          <a:p>
+            <a:pPr algn="l">
+              <a:spcBef>
+                <a:spcPts val="0"/>
+              </a:spcBef>
+              <a:buNone/>
+            </a:pPr>
+            <a:r>
+              <a:rPr lang="en-US" sz="1100" dirty="0">
+                <a:solidFill>
+                  <a:srgbClr val="EEEEEE"/>
+                </a:solidFill>
+                <a:latin typeface="Consolas"/>
+                <a:cs typeface="Consolas"/>
+              </a:rPr>
+              <a:t>        .text().await?;</a:t>
+            </a:r>
+          </a:p>
+          <a:p>
+            <a:pPr algn="l">
+              <a:spcBef>
+                <a:spcPts val="0"/>
+              </a:spcBef>
+              <a:buNone/>
+            </a:pPr>
+            <a:r>
+              <a:rPr lang="en-US" sz="1100" dirty="0">
+                <a:solidFill>
+                  <a:srgbClr val="EEEEEE"/>
+                </a:solidFill>
+                <a:latin typeface="Consolas"/>
+                <a:cs typeface="Consolas"/>
+              </a:rPr>
+              <a:t>    Ok(body.len())</a:t>
+            </a:r>
+          </a:p>
+          <a:p>
+            <a:pPr algn="l">
+              <a:spcBef>
+                <a:spcPts val="0"/>
+              </a:spcBef>
+              <a:buNone/>
+            </a:pPr>
+            <a:r>
+              <a:rPr lang="en-US" sz="1100" dirty="0">
+                <a:solidFill>
+                  <a:srgbClr val="EEEEEE"/>
+                </a:solidFill>
+                <a:latin typeface="Consolas"/>
+                <a:cs typeface="Consolas"/>
+              </a:rPr>
+              <a:t>}</a:t>
+            </a:r>
+          </a:p>
+          <a:p>
+            <a:pPr algn="l">
+              <a:spcBef>
+                <a:spcPts val="0"/>
+              </a:spcBef>
+              <a:buNone/>
+            </a:pPr>
+            <a:endParaRPr lang="en-US" sz="800" dirty="0">
+              <a:solidFill>
+                <a:srgbClr val="EEEEEE"/>
+              </a:solidFill>
+              <a:latin typeface="Consolas"/>
+              <a:cs typeface="Consolas"/>
+            </a:endParaRPr>
+          </a:p>
+          <a:p>
+            <a:pPr algn="l">
+              <a:spcBef>
+                <a:spcPts val="0"/>
+              </a:spcBef>
+              <a:buNone/>
+            </a:pPr>
+            <a:r>
+              <a:rPr lang="en-US" sz="1100" dirty="0">
+                <a:solidFill>
+                  <a:srgbClr val="FFB454"/>
+                </a:solidFill>
+                <a:latin typeface="Consolas"/>
+                <a:cs typeface="Consolas"/>
+              </a:rPr>
+              <a:t>#[tokio::main]</a:t>
+            </a:r>
+          </a:p>
+          <a:p>
+            <a:pPr algn="l">
+              <a:spcBef>
+                <a:spcPts val="0"/>
+              </a:spcBef>
+              <a:buNone/>
+            </a:pPr>
+            <a:r>
+              <a:rPr lang="en-US" sz="1100" dirty="0">
+                <a:solidFill>
+                  <a:srgbClr val="EEEEEE"/>
+                </a:solidFill>
+                <a:latin typeface="Consolas"/>
+                <a:cs typeface="Consolas"/>
+              </a:rPr>
+              <a:t>async fn main() -&gt; reqwest::Result&lt;()&gt; {</a:t>
+            </a:r>
+          </a:p>
+          <a:p>
+            <a:pPr algn="l">
+              <a:spcBef>
+                <a:spcPts val="0"/>
+              </a:spcBef>
+              <a:buNone/>
+            </a:pPr>
+            <a:r>
+              <a:rPr lang="en-US" sz="1100" dirty="0">
+                <a:solidFill>
+                  <a:srgbClr val="8FBF8F"/>
+                </a:solidFill>
+                <a:latin typeface="Consolas"/>
+                <a:cs typeface="Consolas"/>
+              </a:rPr>
+              <a:t>    // Run two requests concurrently</a:t>
+            </a:r>
+          </a:p>
+          <a:p>
+            <a:pPr algn="l">
+              <a:spcBef>
+                <a:spcPts val="0"/>
+              </a:spcBef>
+              <a:buNone/>
+            </a:pPr>
+            <a:r>
+              <a:rPr lang="en-US" sz="1100" dirty="0">
+                <a:solidFill>
+                  <a:srgbClr val="EEEEEE"/>
+                </a:solidFill>
+                <a:latin typeface="Consolas"/>
+                <a:cs typeface="Consolas"/>
+              </a:rPr>
+              <a:t>    let (a, b) = tokio::join!(</a:t>
+            </a:r>
+          </a:p>
+          <a:p>
+            <a:pPr algn="l">
+              <a:spcBef>
+                <a:spcPts val="0"/>
+              </a:spcBef>
+              <a:buNone/>
+            </a:pPr>
+            <a:r>
+              <a:rPr lang="en-US" sz="1100" dirty="0">
+                <a:solidFill>
+                  <a:srgbClr val="EEEEEE"/>
+                </a:solidFill>
+                <a:latin typeface="Consolas"/>
+                <a:cs typeface="Consolas"/>
+              </a:rPr>
+              <a:t>        fetch("https://example.com"),</a:t>
+            </a:r>
+          </a:p>
+          <a:p>
+            <a:pPr algn="l">
+              <a:spcBef>
+                <a:spcPts val="0"/>
+              </a:spcBef>
+              <a:buNone/>
+            </a:pPr>
+            <a:r>
+              <a:rPr lang="en-US" sz="1100" dirty="0">
+                <a:solidFill>
+                  <a:srgbClr val="EEEEEE"/>
+                </a:solidFill>
+                <a:latin typeface="Consolas"/>
+                <a:cs typeface="Consolas"/>
+              </a:rPr>
+              <a:t>        fetch("https://rust-lang.org"),</a:t>
+            </a:r>
+          </a:p>
+          <a:p>
+            <a:pPr algn="l">
+              <a:spcBef>
+                <a:spcPts val="0"/>
+              </a:spcBef>
+              <a:buNone/>
+            </a:pPr>
+            <a:r>
+              <a:rPr lang="en-US" sz="1100" dirty="0">
+                <a:solidFill>
+                  <a:srgbClr val="EEEEEE"/>
+                </a:solidFill>
+                <a:latin typeface="Consolas"/>
+                <a:cs typeface="Consolas"/>
+              </a:rPr>
+              <a:t>    );</a:t>
+            </a:r>
+          </a:p>
+          <a:p>
+            <a:pPr algn="l">
+              <a:spcBef>
+                <a:spcPts val="0"/>
+              </a:spcBef>
+              <a:buNone/>
+            </a:pPr>
+            <a:r>
+              <a:rPr lang="en-US" sz="1100" dirty="0">
+                <a:solidFill>
+                  <a:srgbClr val="EEEEEE"/>
+                </a:solidFill>
+                <a:latin typeface="Consolas"/>
+                <a:cs typeface="Consolas"/>
+              </a:rPr>
+              <a:t>    println!("sizes: {} {}", a?, b?);</a:t>
+            </a:r>
+          </a:p>
+          <a:p>
+            <a:pPr algn="l">
+              <a:spcBef>
+                <a:spcPts val="0"/>
+              </a:spcBef>
+              <a:buNone/>
+            </a:pPr>
+            <a:r>
+              <a:rPr lang="en-US" sz="1100" dirty="0">
+                <a:solidFill>
+                  <a:srgbClr val="8FBF8F"/>
+                </a:solidFill>
+                <a:latin typeface="Consolas"/>
+                <a:cs typeface="Consolas"/>
+              </a:rPr>
+              <a:t>    // Detach a task onto the runtime</a:t>
+            </a:r>
+          </a:p>
+          <a:p>
+            <a:pPr algn="l">
+              <a:spcBef>
+                <a:spcPts val="0"/>
+              </a:spcBef>
+              <a:buNone/>
+            </a:pPr>
+            <a:r>
+              <a:rPr lang="en-US" sz="1100" dirty="0">
+                <a:solidFill>
+                  <a:srgbClr val="EEEEEE"/>
+                </a:solidFill>
+                <a:latin typeface="Consolas"/>
+                <a:cs typeface="Consolas"/>
+              </a:rPr>
+              <a:t>    let h = tokio::spawn(fetch("…"));</a:t>
+            </a:r>
+          </a:p>
+          <a:p>
+            <a:pPr algn="l">
+              <a:spcBef>
+                <a:spcPts val="0"/>
+              </a:spcBef>
+              <a:buNone/>
+            </a:pPr>
+            <a:r>
+              <a:rPr lang="en-US" sz="1100" dirty="0">
+                <a:solidFill>
+                  <a:srgbClr val="EEEEEE"/>
+                </a:solidFill>
+                <a:latin typeface="Consolas"/>
+                <a:cs typeface="Consolas"/>
+              </a:rPr>
+              <a:t>    let n = h.await.unwrap()?;</a:t>
+            </a:r>
+          </a:p>
+          <a:p>
+            <a:pPr algn="l">
+              <a:spcBef>
+                <a:spcPts val="0"/>
+              </a:spcBef>
+              <a:buNone/>
+            </a:pPr>
+            <a:r>
+              <a:rPr lang="en-US" sz="1100" dirty="0">
+                <a:solidFill>
+                  <a:srgbClr val="EEEEEE"/>
+                </a:solidFill>
+                <a:latin typeface="Consolas"/>
+                <a:cs typeface="Consolas"/>
+              </a:rPr>
+              <a:t>    Ok(())</a:t>
+            </a:r>
+          </a:p>
+          <a:p>
+            <a:pPr algn="l">
+              <a:spcBef>
+                <a:spcPts val="0"/>
+              </a:spcBef>
+              <a:buNone/>
+            </a:pPr>
+            <a:r>
+              <a:rPr lang="en-US" sz="1100" dirty="0">
+                <a:solidFill>
+                  <a:srgbClr val="EEEEEE"/>
+                </a:solidFill>
+                <a:latin typeface="Consolas"/>
+                <a:cs typeface="Consolas"/>
+              </a:rPr>
+              <a:t>}</a:t>
+            </a:r>
+          </a:p>
+        </p:txBody>
+      </p:sp>
+      <p:sp>
+        <p:nvSpPr>
+          <p:cNvPr id="13" name="Rectangle 12">
+            <a:extLst>
+              <a:ext uri="{FF2B5EF4-FFF2-40B4-BE49-F238E27FC236}">
+                <a16:creationId xmlns:a16="http://schemas.microsoft.com/office/drawing/2014/main" id="{F6C9DDE2-331A-D04A-9EF1-E16755C3423D}"/>
+              </a:ext>
+            </a:extLst>
+          </p:cNvPr>
+          <p:cNvSpPr/>
+          <p:nvPr/>
+        </p:nvSpPr>
+        <p:spPr>
+          <a:xfrm>
+            <a:off x="342900" y="5905500"/>
+            <a:ext cx="11557000" cy="635000"/>
+          </a:xfrm>
+          <a:prstGeom prst="rect">
+            <a:avLst/>
+          </a:prstGeom>
+          <a:solidFill>
+            <a:srgbClr val="F5F0EB"/>
+          </a:solidFill>
+          <a:ln w="19050" cap="flat" cmpd="sng" algn="ctr">
+            <a:noFill/>
+            <a:prstDash val="solid"/>
+            <a:miter lim="800000"/>
+          </a:ln>
+        </p:spPr>
+        <p:style>
+          <a:lnRef idx="2">
+            <a:schemeClr val="accent1">
+              <a:shade val="15000"/>
+            </a:schemeClr>
+          </a:lnRef>
+          <a:fillRef idx="1">
+            <a:schemeClr val="accent1"/>
+          </a:fillRef>
+          <a:effectRef idx="0">
+            <a:schemeClr val="accent1"/>
+          </a:effectRef>
+          <a:fontRef idx="minor">
+            <a:schemeClr val="lt1"/>
+          </a:fontRef>
+        </p:style>
+        <p:txBody>
+          <a:bodyPr vertOverflow="clip" horzOverflow="clip" rtlCol="0" anchor="t"/>
+          <a:lstStyle/>
+          <a:p>
+            <a:pPr algn="l"/>
+            <a:endParaRPr lang="en-US"/>
+          </a:p>
+        </p:txBody>
+      </p:sp>
+      <p:sp>
+        <p:nvSpPr>
+          <p:cNvPr id="14" name="TextBox 13">
+            <a:extLst>
+              <a:ext uri="{FF2B5EF4-FFF2-40B4-BE49-F238E27FC236}">
+                <a16:creationId xmlns:a16="http://schemas.microsoft.com/office/drawing/2014/main" id="{B8E86267-6C43-174C-A1D1-94826132EB45}"/>
+              </a:ext>
+            </a:extLst>
+          </p:cNvPr>
+          <p:cNvSpPr txBox="1"/>
+          <p:nvPr/>
+        </p:nvSpPr>
+        <p:spPr>
+          <a:xfrm>
+            <a:off x="469900" y="5981700"/>
+            <a:ext cx="11303000" cy="482600"/>
+          </a:xfrm>
+          <a:prstGeom prst="rect">
+            <a:avLst/>
+          </a:prstGeom>
+          <a:noFill/>
+        </p:spPr>
+        <p:txBody>
+          <a:bodyPr vertOverflow="overflow" vert="horz" wrap="square" rtlCol="0" anchor="t">
+            <a:noAutofit/>
+          </a:bodyPr>
+          <a:lstStyle/>
+          <a:p>
+            <a:pPr algn="l"/>
+            <a:r>
+              <a:rPr lang="en-US" sz="1300" b="1">
+                <a:solidFill>
+                  <a:srgbClr val="1E1E1E"/>
+                </a:solidFill>
+              </a:rPr>
+              <a:t>Takeaway: </a:t>
+            </a:r>
+            <a:r>
+              <a:rPr lang="en-US" sz="1300">
+                <a:solidFill>
+                  <a:srgbClr val="333333"/>
+                </a:solidFill>
+              </a:rPr>
+              <a:t>futures are lazy values; a runtime drives them. The compiler rules out data races — concurrency is just composition.</a:t>
+            </a:r>
+          </a:p>
+        </p:txBody>
+      </p:sp>
+    </p:spTree>
+    <p:extLst>
+      <p:ext uri="{BB962C8B-B14F-4D97-AF65-F5344CB8AC3E}">
+        <p14:creationId xmlns:p14="http://schemas.microsoft.com/office/powerpoint/2010/main" val="1309911826"/>
+      </p:ext>
+    </p:extLst>
+  </p:cSld>
+  <p:clrMapOvr>
+    <a:masterClrMapping/>
+  </p:clrMapOvr>
+</p:sld>
+</file>
+
+<file path=ppt/slides/slide33.xml><?xml version="1.0" encoding="utf-8"?>
+<p:sld xmlns:a="http://schemas.openxmlformats.org/drawingml/2006/main" xmlns:r="http://schemas.openxmlformats.org/officeDocument/2006/relationships" xmlns:p="http://schemas.openxmlformats.org/presentationml/2006/main">
+  <p:cSld>
+    <p:spTree>
+      <p:nvGrpSpPr>
+        <p:cNvPr id="1" name=""/>
+        <p:cNvGrpSpPr/>
+        <p:nvPr/>
+      </p:nvGrpSpPr>
+      <p:grpSpPr>
+        <a:xfrm>
+          <a:off x="0" y="0"/>
+          <a:ext cx="0" cy="0"/>
+          <a:chOff x="0" y="0"/>
+          <a:chExt cx="0" cy="0"/>
+        </a:xfrm>
+      </p:grpSpPr>
+      <p:sp>
+        <p:nvSpPr>
+          <p:cNvPr id="2" name="TextBox 1">
+            <a:extLst>
+              <a:ext uri="{FF2B5EF4-FFF2-40B4-BE49-F238E27FC236}">
+                <a16:creationId xmlns:a16="http://schemas.microsoft.com/office/drawing/2014/main" id="{10742C50-7434-0848-8B72-75A927DA8817}"/>
+              </a:ext>
+            </a:extLst>
+          </p:cNvPr>
+          <p:cNvSpPr txBox="1"/>
+          <p:nvPr/>
+        </p:nvSpPr>
+        <p:spPr>
+          <a:xfrm>
+            <a:off x="838200" y="317500"/>
+            <a:ext cx="10515600" cy="558800"/>
+          </a:xfrm>
+          <a:prstGeom prst="rect">
+            <a:avLst/>
+          </a:prstGeom>
+          <a:noFill/>
+        </p:spPr>
+        <p:txBody>
+          <a:bodyPr vertOverflow="overflow" vert="horz" wrap="square" rtlCol="0" anchor="t">
+            <a:noAutofit/>
+          </a:bodyPr>
+          <a:lstStyle/>
+          <a:p>
+            <a:pPr algn="l"/>
+            <a:r>
+              <a:rPr lang="en-US" sz="3000" b="1">
+                <a:solidFill>
+                  <a:srgbClr val="1E1E1E"/>
+                </a:solidFill>
+              </a:rPr>
+              <a:t>Sharing state between threads</a:t>
+            </a:r>
+          </a:p>
+        </p:txBody>
+      </p:sp>
+      <p:sp>
+        <p:nvSpPr>
+          <p:cNvPr id="3" name="Rectangle 2">
+            <a:extLst>
+              <a:ext uri="{FF2B5EF4-FFF2-40B4-BE49-F238E27FC236}">
+                <a16:creationId xmlns:a16="http://schemas.microsoft.com/office/drawing/2014/main" id="{C9F63E60-EAC5-2E4D-BBEF-B2A18BA5AF9D}"/>
+              </a:ext>
+            </a:extLst>
+          </p:cNvPr>
+          <p:cNvSpPr/>
+          <p:nvPr/>
+        </p:nvSpPr>
+        <p:spPr>
+          <a:xfrm>
+            <a:off x="838200" y="914400"/>
+            <a:ext cx="762000" cy="50800"/>
+          </a:xfrm>
+          <a:prstGeom prst="rect">
+            <a:avLst/>
+          </a:prstGeom>
+          <a:solidFill>
+            <a:srgbClr val="CE422B"/>
+          </a:solidFill>
+          <a:ln w="19050" cap="flat" cmpd="sng" algn="ctr">
+            <a:noFill/>
+            <a:prstDash val="solid"/>
+            <a:miter lim="800000"/>
+          </a:ln>
+        </p:spPr>
+        <p:style>
+          <a:lnRef idx="2">
+            <a:schemeClr val="accent1">
+              <a:shade val="15000"/>
+            </a:schemeClr>
+          </a:lnRef>
+          <a:fillRef idx="1">
+            <a:schemeClr val="accent1"/>
+          </a:fillRef>
+          <a:effectRef idx="0">
+            <a:schemeClr val="accent1"/>
+          </a:effectRef>
+          <a:fontRef idx="minor">
+            <a:schemeClr val="lt1"/>
+          </a:fontRef>
+        </p:style>
+        <p:txBody>
+          <a:bodyPr vertOverflow="clip" horzOverflow="clip" rtlCol="0" anchor="t"/>
+          <a:lstStyle/>
+          <a:p>
+            <a:pPr algn="l"/>
+            <a:endParaRPr lang="en-US"/>
+          </a:p>
+        </p:txBody>
+      </p:sp>
+      <p:sp>
+        <p:nvSpPr>
+          <p:cNvPr id="4" name="TextBox 3">
+            <a:extLst>
+              <a:ext uri="{FF2B5EF4-FFF2-40B4-BE49-F238E27FC236}">
+                <a16:creationId xmlns:a16="http://schemas.microsoft.com/office/drawing/2014/main" id="{D60CC007-7ECF-6844-8827-8F803CED7961}"/>
+              </a:ext>
+            </a:extLst>
+          </p:cNvPr>
+          <p:cNvSpPr txBox="1"/>
+          <p:nvPr/>
+        </p:nvSpPr>
+        <p:spPr>
+          <a:xfrm>
+            <a:off x="838200" y="1066800"/>
+            <a:ext cx="10515600" cy="304800"/>
+          </a:xfrm>
+          <a:prstGeom prst="rect">
+            <a:avLst/>
+          </a:prstGeom>
+          <a:noFill/>
+        </p:spPr>
+        <p:txBody>
+          <a:bodyPr vertOverflow="overflow" vert="horz" wrap="square" rtlCol="0" anchor="t">
+            <a:noAutofit/>
+          </a:bodyPr>
+          <a:lstStyle/>
+          <a:p>
+            <a:pPr algn="l"/>
+            <a:r>
+              <a:rPr lang="en-US" sz="1400">
+                <a:solidFill>
+                  <a:srgbClr val="555555"/>
+                </a:solidFill>
+              </a:rPr>
+              <a:t>Wrap data in Arc to share ownership; wrap in Mutex / RwLock / Atomic to share mutation</a:t>
+            </a:r>
+          </a:p>
+        </p:txBody>
+      </p:sp>
+      <p:sp>
+        <p:nvSpPr>
+          <p:cNvPr id="5" name="Rectangle 4">
+            <a:extLst>
+              <a:ext uri="{FF2B5EF4-FFF2-40B4-BE49-F238E27FC236}">
+                <a16:creationId xmlns:a16="http://schemas.microsoft.com/office/drawing/2014/main" id="{32980E01-2222-8B40-8215-52C4B68D431D}"/>
+              </a:ext>
+            </a:extLst>
+          </p:cNvPr>
+          <p:cNvSpPr/>
+          <p:nvPr/>
+        </p:nvSpPr>
+        <p:spPr>
+          <a:xfrm>
+            <a:off x="342900" y="1485900"/>
+            <a:ext cx="5676900" cy="330200"/>
+          </a:xfrm>
+          <a:prstGeom prst="rect">
+            <a:avLst/>
+          </a:prstGeom>
+          <a:solidFill>
+            <a:srgbClr val="1E1E1E"/>
+          </a:solidFill>
+          <a:ln w="19050" cap="flat" cmpd="sng" algn="ctr">
+            <a:noFill/>
+            <a:prstDash val="solid"/>
+            <a:miter lim="800000"/>
+          </a:ln>
+        </p:spPr>
+        <p:style>
+          <a:lnRef idx="2">
+            <a:schemeClr val="accent1">
+              <a:shade val="15000"/>
+            </a:schemeClr>
+          </a:lnRef>
+          <a:fillRef idx="1">
+            <a:schemeClr val="accent1"/>
+          </a:fillRef>
+          <a:effectRef idx="0">
+            <a:schemeClr val="accent1"/>
+          </a:effectRef>
+          <a:fontRef idx="minor">
+            <a:schemeClr val="lt1"/>
+          </a:fontRef>
+        </p:style>
+        <p:txBody>
+          <a:bodyPr vertOverflow="clip" horzOverflow="clip" rtlCol="0" anchor="t"/>
+          <a:lstStyle/>
+          <a:p>
+            <a:pPr algn="l"/>
+            <a:endParaRPr lang="en-US"/>
+          </a:p>
+        </p:txBody>
+      </p:sp>
+      <p:sp>
+        <p:nvSpPr>
+          <p:cNvPr id="6" name="TextBox 5">
+            <a:extLst>
+              <a:ext uri="{FF2B5EF4-FFF2-40B4-BE49-F238E27FC236}">
+                <a16:creationId xmlns:a16="http://schemas.microsoft.com/office/drawing/2014/main" id="{3C732075-9502-7046-8044-BDE522C005AA}"/>
+              </a:ext>
+            </a:extLst>
+          </p:cNvPr>
+          <p:cNvSpPr txBox="1"/>
+          <p:nvPr/>
+        </p:nvSpPr>
+        <p:spPr>
+          <a:xfrm>
+            <a:off x="469900" y="1536700"/>
+            <a:ext cx="5422900" cy="292100"/>
+          </a:xfrm>
+          <a:prstGeom prst="rect">
+            <a:avLst/>
+          </a:prstGeom>
+          <a:noFill/>
+        </p:spPr>
+        <p:txBody>
+          <a:bodyPr vertOverflow="overflow" vert="horz" wrap="square" rtlCol="0" anchor="t">
+            <a:noAutofit/>
+          </a:bodyPr>
+          <a:lstStyle/>
+          <a:p>
+            <a:pPr algn="l"/>
+            <a:r>
+              <a:rPr lang="en-US" sz="1300" b="1">
+                <a:solidFill>
+                  <a:srgbClr val="FFFFFF"/>
+                </a:solidFill>
+              </a:rPr>
+              <a:t>Mechanisms</a:t>
+            </a:r>
+          </a:p>
+        </p:txBody>
+      </p:sp>
+      <p:sp>
+        <p:nvSpPr>
+          <p:cNvPr id="7" name="Rectangle 6">
+            <a:extLst>
+              <a:ext uri="{FF2B5EF4-FFF2-40B4-BE49-F238E27FC236}">
+                <a16:creationId xmlns:a16="http://schemas.microsoft.com/office/drawing/2014/main" id="{09814BB3-B1D8-454C-9E9D-CF89E4352138}"/>
+              </a:ext>
+            </a:extLst>
+          </p:cNvPr>
+          <p:cNvSpPr/>
+          <p:nvPr/>
+        </p:nvSpPr>
+        <p:spPr>
+          <a:xfrm>
+            <a:off x="342900" y="1816100"/>
+            <a:ext cx="5676900" cy="3987800"/>
+          </a:xfrm>
+          <a:prstGeom prst="rect">
+            <a:avLst/>
+          </a:prstGeom>
+          <a:solidFill>
+            <a:srgbClr val="F5F0EB"/>
+          </a:solidFill>
+          <a:ln w="19050" cap="flat" cmpd="sng" algn="ctr">
+            <a:noFill/>
+            <a:prstDash val="solid"/>
+            <a:miter lim="800000"/>
+          </a:ln>
+        </p:spPr>
+        <p:style>
+          <a:lnRef idx="2">
+            <a:schemeClr val="accent1">
+              <a:shade val="15000"/>
+            </a:schemeClr>
+          </a:lnRef>
+          <a:fillRef idx="1">
+            <a:schemeClr val="accent1"/>
+          </a:fillRef>
+          <a:effectRef idx="0">
+            <a:schemeClr val="accent1"/>
+          </a:effectRef>
+          <a:fontRef idx="minor">
+            <a:schemeClr val="lt1"/>
+          </a:fontRef>
+        </p:style>
+        <p:txBody>
+          <a:bodyPr vertOverflow="clip" horzOverflow="clip" rtlCol="0" anchor="t"/>
+          <a:lstStyle/>
+          <a:p>
+            <a:pPr algn="l"/>
+            <a:endParaRPr lang="en-US"/>
+          </a:p>
+        </p:txBody>
+      </p:sp>
+      <p:sp>
+        <p:nvSpPr>
+          <p:cNvPr id="8" name="TextBox 7">
+            <a:extLst>
+              <a:ext uri="{FF2B5EF4-FFF2-40B4-BE49-F238E27FC236}">
+                <a16:creationId xmlns:a16="http://schemas.microsoft.com/office/drawing/2014/main" id="{A6C2E883-570E-EE4C-9ADD-343C576217E5}"/>
+              </a:ext>
+            </a:extLst>
+          </p:cNvPr>
+          <p:cNvSpPr txBox="1"/>
+          <p:nvPr/>
+        </p:nvSpPr>
+        <p:spPr>
+          <a:xfrm>
+            <a:off x="596900" y="1943100"/>
+            <a:ext cx="5168900" cy="3733800"/>
+          </a:xfrm>
+          <a:prstGeom prst="rect">
+            <a:avLst/>
+          </a:prstGeom>
+          <a:noFill/>
+        </p:spPr>
+        <p:txBody>
+          <a:bodyPr vertOverflow="overflow" vert="horz" wrap="square" rtlCol="0" anchor="t">
+            <a:noAutofit/>
+          </a:bodyPr>
+          <a:lstStyle/>
+          <a:p>
+            <a:pPr algn="l">
+              <a:spcBef>
+                <a:spcPts val="0"/>
+              </a:spcBef>
+              <a:buNone/>
+            </a:pPr>
+            <a:r>
+              <a:rPr lang="en-US" sz="1400" b="1" dirty="0">
+                <a:solidFill>
+                  <a:srgbClr val="CE422B"/>
+                </a:solidFill>
+              </a:rPr>
+              <a:t>Arc&lt;T&gt; — shared ownership</a:t>
+            </a:r>
+          </a:p>
+          <a:p>
+            <a:pPr algn="l">
+              <a:spcBef>
+                <a:spcPts val="300"/>
+              </a:spcBef>
+              <a:buNone/>
+            </a:pPr>
+            <a:r>
+              <a:rPr lang="en-US" sz="1300" dirty="0">
+                <a:solidFill>
+                  <a:srgbClr val="1E1E1E"/>
+                </a:solidFill>
+              </a:rPr>
+              <a:t>Atomic reference count. Clone gives each thread its own handle to the same heap value. Read-only on its own.</a:t>
+            </a:r>
+          </a:p>
+          <a:p>
+            <a:pPr algn="l">
+              <a:spcBef>
+                <a:spcPts val="500"/>
+              </a:spcBef>
+              <a:buNone/>
+            </a:pPr>
+            <a:r>
+              <a:rPr lang="en-US" sz="1400" b="1" dirty="0">
+                <a:solidFill>
+                  <a:srgbClr val="CE422B"/>
+                </a:solidFill>
+              </a:rPr>
+              <a:t>Mutex / RwLock — shared mutation</a:t>
+            </a:r>
+          </a:p>
+          <a:p>
+            <a:pPr algn="l">
+              <a:spcBef>
+                <a:spcPts val="300"/>
+              </a:spcBef>
+              <a:buNone/>
+            </a:pPr>
+            <a:r>
+              <a:rPr lang="en-US" sz="1300" b="1" dirty="0">
+                <a:latin typeface="Consolas"/>
+                <a:cs typeface="Consolas"/>
+              </a:rPr>
+              <a:t>.lock()</a:t>
+            </a:r>
+            <a:r>
+              <a:rPr lang="en-US" sz="1300" dirty="0">
+                <a:solidFill>
+                  <a:srgbClr val="1E1E1E"/>
+                </a:solidFill>
+              </a:rPr>
+              <a:t> returns a guard with exclusive (Mutex) or reader-or-writer (RwLock) access. Lock is released when the guard drops.</a:t>
+            </a:r>
+          </a:p>
+          <a:p>
+            <a:pPr algn="l">
+              <a:spcBef>
+                <a:spcPts val="500"/>
+              </a:spcBef>
+              <a:buNone/>
+            </a:pPr>
+            <a:r>
+              <a:rPr lang="en-US" sz="1400" b="1" dirty="0">
+                <a:solidFill>
+                  <a:srgbClr val="CE422B"/>
+                </a:solidFill>
+              </a:rPr>
+              <a:t>Atomics — lock-free primitives</a:t>
+            </a:r>
+          </a:p>
+          <a:p>
+            <a:pPr algn="l">
+              <a:spcBef>
+                <a:spcPts val="300"/>
+              </a:spcBef>
+              <a:buNone/>
+            </a:pPr>
+            <a:r>
+              <a:rPr lang="en-US" sz="1300" b="1" dirty="0">
+                <a:latin typeface="Consolas"/>
+                <a:cs typeface="Consolas"/>
+              </a:rPr>
+              <a:t>AtomicUsize, AtomicBool, …</a:t>
+            </a:r>
+            <a:r>
+              <a:rPr lang="en-US" sz="1300" dirty="0">
+                <a:solidFill>
+                  <a:srgbClr val="1E1E1E"/>
+                </a:solidFill>
+              </a:rPr>
+              <a:t> for simple counters and flags. Faster than a Mutex when you only need one integer.</a:t>
+            </a:r>
+          </a:p>
+          <a:p>
+            <a:pPr algn="l">
+              <a:spcBef>
+                <a:spcPts val="500"/>
+              </a:spcBef>
+              <a:buNone/>
+            </a:pPr>
+            <a:r>
+              <a:rPr lang="en-US" sz="1400" b="1" dirty="0">
+                <a:solidFill>
+                  <a:srgbClr val="CE422B"/>
+                </a:solidFill>
+              </a:rPr>
+              <a:t>Channels — share by passing messages</a:t>
+            </a:r>
+          </a:p>
+          <a:p>
+            <a:pPr algn="l">
+              <a:spcBef>
+                <a:spcPts val="300"/>
+              </a:spcBef>
+              <a:buNone/>
+            </a:pPr>
+            <a:r>
+              <a:rPr lang="en-US" sz="1300" b="1" dirty="0">
+                <a:latin typeface="Consolas"/>
+                <a:cs typeface="Consolas"/>
+              </a:rPr>
+              <a:t>mpsc::channel()</a:t>
+            </a:r>
+            <a:r>
+              <a:rPr lang="en-US" sz="1300" dirty="0">
+                <a:solidFill>
+                  <a:srgbClr val="1E1E1E"/>
+                </a:solidFill>
+              </a:rPr>
+              <a:t> moves values between threads. No shared memory, no locks.</a:t>
+            </a:r>
+          </a:p>
+        </p:txBody>
+      </p:sp>
+      <p:sp>
+        <p:nvSpPr>
+          <p:cNvPr id="9" name="Rectangle 8">
+            <a:extLst>
+              <a:ext uri="{FF2B5EF4-FFF2-40B4-BE49-F238E27FC236}">
+                <a16:creationId xmlns:a16="http://schemas.microsoft.com/office/drawing/2014/main" id="{9642AEB9-6120-A04A-BBCC-B83DA2DDC8E2}"/>
+              </a:ext>
+            </a:extLst>
+          </p:cNvPr>
+          <p:cNvSpPr/>
+          <p:nvPr/>
+        </p:nvSpPr>
+        <p:spPr>
+          <a:xfrm>
+            <a:off x="6223000" y="1485900"/>
+            <a:ext cx="5676900" cy="330200"/>
+          </a:xfrm>
+          <a:prstGeom prst="rect">
+            <a:avLst/>
+          </a:prstGeom>
+          <a:solidFill>
+            <a:srgbClr val="1E1E1E"/>
+          </a:solidFill>
+          <a:ln w="19050" cap="flat" cmpd="sng" algn="ctr">
+            <a:noFill/>
+            <a:prstDash val="solid"/>
+            <a:miter lim="800000"/>
+          </a:ln>
+        </p:spPr>
+        <p:style>
+          <a:lnRef idx="2">
+            <a:schemeClr val="accent1">
+              <a:shade val="15000"/>
+            </a:schemeClr>
+          </a:lnRef>
+          <a:fillRef idx="1">
+            <a:schemeClr val="accent1"/>
+          </a:fillRef>
+          <a:effectRef idx="0">
+            <a:schemeClr val="accent1"/>
+          </a:effectRef>
+          <a:fontRef idx="minor">
+            <a:schemeClr val="lt1"/>
+          </a:fontRef>
+        </p:style>
+        <p:txBody>
+          <a:bodyPr vertOverflow="clip" horzOverflow="clip" rtlCol="0" anchor="t"/>
+          <a:lstStyle/>
+          <a:p>
+            <a:pPr algn="l"/>
+            <a:endParaRPr lang="en-US"/>
+          </a:p>
+        </p:txBody>
+      </p:sp>
+      <p:sp>
+        <p:nvSpPr>
+          <p:cNvPr id="10" name="TextBox 9">
+            <a:extLst>
+              <a:ext uri="{FF2B5EF4-FFF2-40B4-BE49-F238E27FC236}">
+                <a16:creationId xmlns:a16="http://schemas.microsoft.com/office/drawing/2014/main" id="{148AF083-E252-754B-A408-D8E403ECC07C}"/>
+              </a:ext>
+            </a:extLst>
+          </p:cNvPr>
+          <p:cNvSpPr txBox="1"/>
+          <p:nvPr/>
+        </p:nvSpPr>
+        <p:spPr>
+          <a:xfrm>
+            <a:off x="6350000" y="1536700"/>
+            <a:ext cx="5422900" cy="292100"/>
+          </a:xfrm>
+          <a:prstGeom prst="rect">
+            <a:avLst/>
+          </a:prstGeom>
+          <a:noFill/>
+        </p:spPr>
+        <p:txBody>
+          <a:bodyPr vertOverflow="overflow" vert="horz" wrap="square" rtlCol="0" anchor="t">
+            <a:noAutofit/>
+          </a:bodyPr>
+          <a:lstStyle/>
+          <a:p>
+            <a:pPr algn="l"/>
+            <a:r>
+              <a:rPr lang="en-US" sz="1300" b="1">
+                <a:solidFill>
+                  <a:srgbClr val="FFFFFF"/>
+                </a:solidFill>
+              </a:rPr>
+              <a:t>Shared counter — Arc&lt;Mutex&lt;T&gt;&gt;</a:t>
+            </a:r>
+          </a:p>
+        </p:txBody>
+      </p:sp>
+      <p:sp>
+        <p:nvSpPr>
+          <p:cNvPr id="11" name="Rectangle 10">
+            <a:extLst>
+              <a:ext uri="{FF2B5EF4-FFF2-40B4-BE49-F238E27FC236}">
+                <a16:creationId xmlns:a16="http://schemas.microsoft.com/office/drawing/2014/main" id="{485219DF-7250-A54B-9449-AE8DA8B324A1}"/>
+              </a:ext>
+            </a:extLst>
+          </p:cNvPr>
+          <p:cNvSpPr/>
+          <p:nvPr/>
+        </p:nvSpPr>
+        <p:spPr>
+          <a:xfrm>
+            <a:off x="6223000" y="1816100"/>
+            <a:ext cx="5676900" cy="3987800"/>
+          </a:xfrm>
+          <a:prstGeom prst="rect">
+            <a:avLst/>
+          </a:prstGeom>
+          <a:solidFill>
+            <a:srgbClr val="1E1E1E"/>
+          </a:solidFill>
+          <a:ln w="19050" cap="flat" cmpd="sng" algn="ctr">
+            <a:noFill/>
+            <a:prstDash val="solid"/>
+            <a:miter lim="800000"/>
+          </a:ln>
+        </p:spPr>
+        <p:style>
+          <a:lnRef idx="2">
+            <a:schemeClr val="accent1">
+              <a:shade val="15000"/>
+            </a:schemeClr>
+          </a:lnRef>
+          <a:fillRef idx="1">
+            <a:schemeClr val="accent1"/>
+          </a:fillRef>
+          <a:effectRef idx="0">
+            <a:schemeClr val="accent1"/>
+          </a:effectRef>
+          <a:fontRef idx="minor">
+            <a:schemeClr val="lt1"/>
+          </a:fontRef>
+        </p:style>
+        <p:txBody>
+          <a:bodyPr vertOverflow="clip" horzOverflow="clip" rtlCol="0" anchor="t"/>
+          <a:lstStyle/>
+          <a:p>
+            <a:pPr algn="l"/>
+            <a:endParaRPr lang="en-US"/>
+          </a:p>
+        </p:txBody>
+      </p:sp>
+      <p:sp>
+        <p:nvSpPr>
+          <p:cNvPr id="12" name="TextBox 11">
+            <a:extLst>
+              <a:ext uri="{FF2B5EF4-FFF2-40B4-BE49-F238E27FC236}">
+                <a16:creationId xmlns:a16="http://schemas.microsoft.com/office/drawing/2014/main" id="{268E7A4F-B12F-2842-B330-4B491466E0CF}"/>
+              </a:ext>
+            </a:extLst>
+          </p:cNvPr>
+          <p:cNvSpPr txBox="1"/>
+          <p:nvPr/>
+        </p:nvSpPr>
+        <p:spPr>
+          <a:xfrm>
+            <a:off x="6350000" y="1892300"/>
+            <a:ext cx="5422900" cy="3848100"/>
+          </a:xfrm>
+          <a:prstGeom prst="rect">
+            <a:avLst/>
+          </a:prstGeom>
+          <a:noFill/>
+        </p:spPr>
+        <p:txBody>
+          <a:bodyPr vertOverflow="overflow" vert="horz" wrap="square" rtlCol="0" anchor="t">
+            <a:noAutofit/>
+          </a:bodyPr>
+          <a:lstStyle/>
+          <a:p>
+            <a:pPr algn="l">
+              <a:spcBef>
+                <a:spcPts val="0"/>
+              </a:spcBef>
+              <a:buNone/>
+            </a:pPr>
+            <a:r>
+              <a:rPr lang="en-US" sz="1100" dirty="0">
+                <a:solidFill>
+                  <a:srgbClr val="EEEEEE"/>
+                </a:solidFill>
+                <a:latin typeface="Consolas"/>
+                <a:cs typeface="Consolas"/>
+              </a:rPr>
+              <a:t>use std::sync::{Arc, Mutex};</a:t>
+            </a:r>
+          </a:p>
+          <a:p>
+            <a:pPr algn="l">
+              <a:spcBef>
+                <a:spcPts val="0"/>
+              </a:spcBef>
+              <a:buNone/>
+            </a:pPr>
+            <a:r>
+              <a:rPr lang="en-US" sz="1100" dirty="0">
+                <a:solidFill>
+                  <a:srgbClr val="EEEEEE"/>
+                </a:solidFill>
+                <a:latin typeface="Consolas"/>
+                <a:cs typeface="Consolas"/>
+              </a:rPr>
+              <a:t>use std::thread;</a:t>
+            </a:r>
+          </a:p>
+          <a:p>
+            <a:pPr algn="l">
+              <a:spcBef>
+                <a:spcPts val="0"/>
+              </a:spcBef>
+              <a:buNone/>
+            </a:pPr>
+            <a:endParaRPr lang="en-US" sz="800" dirty="0">
+              <a:solidFill>
+                <a:srgbClr val="EEEEEE"/>
+              </a:solidFill>
+              <a:latin typeface="Consolas"/>
+              <a:cs typeface="Consolas"/>
+            </a:endParaRPr>
+          </a:p>
+          <a:p>
+            <a:pPr algn="l">
+              <a:spcBef>
+                <a:spcPts val="0"/>
+              </a:spcBef>
+              <a:buNone/>
+            </a:pPr>
+            <a:r>
+              <a:rPr lang="en-US" sz="1100" dirty="0">
+                <a:solidFill>
+                  <a:srgbClr val="EEEEEE"/>
+                </a:solidFill>
+                <a:latin typeface="Consolas"/>
+                <a:cs typeface="Consolas"/>
+              </a:rPr>
+              <a:t>fn main() {</a:t>
+            </a:r>
+          </a:p>
+          <a:p>
+            <a:pPr algn="l">
+              <a:spcBef>
+                <a:spcPts val="0"/>
+              </a:spcBef>
+              <a:buNone/>
+            </a:pPr>
+            <a:r>
+              <a:rPr lang="en-US" sz="1100" dirty="0">
+                <a:solidFill>
+                  <a:srgbClr val="8FBF8F"/>
+                </a:solidFill>
+                <a:latin typeface="Consolas"/>
+                <a:cs typeface="Consolas"/>
+              </a:rPr>
+              <a:t>    // Arc = shared ownership across threads</a:t>
+            </a:r>
+          </a:p>
+          <a:p>
+            <a:pPr algn="l">
+              <a:spcBef>
+                <a:spcPts val="0"/>
+              </a:spcBef>
+              <a:buNone/>
+            </a:pPr>
+            <a:r>
+              <a:rPr lang="en-US" sz="1100" dirty="0">
+                <a:solidFill>
+                  <a:srgbClr val="8FBF8F"/>
+                </a:solidFill>
+                <a:latin typeface="Consolas"/>
+                <a:cs typeface="Consolas"/>
+              </a:rPr>
+              <a:t>    // Mutex = exclusive access at a time</a:t>
+            </a:r>
+          </a:p>
+          <a:p>
+            <a:pPr algn="l">
+              <a:spcBef>
+                <a:spcPts val="0"/>
+              </a:spcBef>
+              <a:buNone/>
+            </a:pPr>
+            <a:r>
+              <a:rPr lang="en-US" sz="1100" dirty="0">
+                <a:solidFill>
+                  <a:srgbClr val="EEEEEE"/>
+                </a:solidFill>
+                <a:latin typeface="Consolas"/>
+                <a:cs typeface="Consolas"/>
+              </a:rPr>
+              <a:t>    let counter = Arc::new(Mutex::new(0u32));</a:t>
+            </a:r>
+          </a:p>
+          <a:p>
+            <a:pPr algn="l">
+              <a:spcBef>
+                <a:spcPts val="0"/>
+              </a:spcBef>
+              <a:buNone/>
+            </a:pPr>
+            <a:r>
+              <a:rPr lang="en-US" sz="1100" dirty="0">
+                <a:solidFill>
+                  <a:srgbClr val="EEEEEE"/>
+                </a:solidFill>
+                <a:latin typeface="Consolas"/>
+                <a:cs typeface="Consolas"/>
+              </a:rPr>
+              <a:t>    let mut handles = vec![];</a:t>
+            </a:r>
+          </a:p>
+          <a:p>
+            <a:pPr algn="l">
+              <a:spcBef>
+                <a:spcPts val="0"/>
+              </a:spcBef>
+              <a:buNone/>
+            </a:pPr>
+            <a:endParaRPr lang="en-US" sz="800" dirty="0">
+              <a:solidFill>
+                <a:srgbClr val="EEEEEE"/>
+              </a:solidFill>
+              <a:latin typeface="Consolas"/>
+              <a:cs typeface="Consolas"/>
+            </a:endParaRPr>
+          </a:p>
+          <a:p>
+            <a:pPr algn="l">
+              <a:spcBef>
+                <a:spcPts val="0"/>
+              </a:spcBef>
+              <a:buNone/>
+            </a:pPr>
+            <a:r>
+              <a:rPr lang="en-US" sz="1100" dirty="0">
+                <a:solidFill>
+                  <a:srgbClr val="EEEEEE"/>
+                </a:solidFill>
+                <a:latin typeface="Consolas"/>
+                <a:cs typeface="Consolas"/>
+              </a:rPr>
+              <a:t>    for _ in 0..10 {</a:t>
+            </a:r>
+          </a:p>
+          <a:p>
+            <a:pPr algn="l">
+              <a:spcBef>
+                <a:spcPts val="0"/>
+              </a:spcBef>
+              <a:buNone/>
+            </a:pPr>
+            <a:r>
+              <a:rPr lang="en-US" sz="1100" dirty="0">
+                <a:solidFill>
+                  <a:srgbClr val="EEEEEE"/>
+                </a:solidFill>
+                <a:latin typeface="Consolas"/>
+                <a:cs typeface="Consolas"/>
+              </a:rPr>
+              <a:t>        let c = Arc::clone(&amp;counter);</a:t>
+            </a:r>
+          </a:p>
+          <a:p>
+            <a:pPr algn="l">
+              <a:spcBef>
+                <a:spcPts val="0"/>
+              </a:spcBef>
+              <a:buNone/>
+            </a:pPr>
+            <a:r>
+              <a:rPr lang="en-US" sz="1100" dirty="0">
+                <a:solidFill>
+                  <a:srgbClr val="EEEEEE"/>
+                </a:solidFill>
+                <a:latin typeface="Consolas"/>
+                <a:cs typeface="Consolas"/>
+              </a:rPr>
+              <a:t>        handles.push(thread::spawn(move || {</a:t>
+            </a:r>
+          </a:p>
+          <a:p>
+            <a:pPr algn="l">
+              <a:spcBef>
+                <a:spcPts val="0"/>
+              </a:spcBef>
+              <a:buNone/>
+            </a:pPr>
+            <a:r>
+              <a:rPr lang="en-US" sz="1100" dirty="0">
+                <a:solidFill>
+                  <a:srgbClr val="8FBF8F"/>
+                </a:solidFill>
+                <a:latin typeface="Consolas"/>
+                <a:cs typeface="Consolas"/>
+              </a:rPr>
+              <a:t>            // lock() blocks until we hold it</a:t>
+            </a:r>
+          </a:p>
+          <a:p>
+            <a:pPr algn="l">
+              <a:spcBef>
+                <a:spcPts val="0"/>
+              </a:spcBef>
+              <a:buNone/>
+            </a:pPr>
+            <a:r>
+              <a:rPr lang="en-US" sz="1100" dirty="0">
+                <a:solidFill>
+                  <a:srgbClr val="EEEEEE"/>
+                </a:solidFill>
+                <a:latin typeface="Consolas"/>
+                <a:cs typeface="Consolas"/>
+              </a:rPr>
+              <a:t>            let mut n = c.lock().unwrap();</a:t>
+            </a:r>
+          </a:p>
+          <a:p>
+            <a:pPr algn="l">
+              <a:spcBef>
+                <a:spcPts val="0"/>
+              </a:spcBef>
+              <a:buNone/>
+            </a:pPr>
+            <a:r>
+              <a:rPr lang="en-US" sz="1100" dirty="0">
+                <a:solidFill>
+                  <a:srgbClr val="EEEEEE"/>
+                </a:solidFill>
+                <a:latin typeface="Consolas"/>
+                <a:cs typeface="Consolas"/>
+              </a:rPr>
+              <a:t>            *n += 1;</a:t>
+            </a:r>
+          </a:p>
+          <a:p>
+            <a:pPr algn="l">
+              <a:spcBef>
+                <a:spcPts val="0"/>
+              </a:spcBef>
+              <a:buNone/>
+            </a:pPr>
+            <a:r>
+              <a:rPr lang="en-US" sz="1100" dirty="0">
+                <a:solidFill>
+                  <a:srgbClr val="8FBF8F"/>
+                </a:solidFill>
+                <a:latin typeface="Consolas"/>
+                <a:cs typeface="Consolas"/>
+              </a:rPr>
+              <a:t>            // guard drops here → lock released</a:t>
+            </a:r>
+          </a:p>
+          <a:p>
+            <a:pPr algn="l">
+              <a:spcBef>
+                <a:spcPts val="0"/>
+              </a:spcBef>
+              <a:buNone/>
+            </a:pPr>
+            <a:r>
+              <a:rPr lang="en-US" sz="1100" dirty="0">
+                <a:solidFill>
+                  <a:srgbClr val="EEEEEE"/>
+                </a:solidFill>
+                <a:latin typeface="Consolas"/>
+                <a:cs typeface="Consolas"/>
+              </a:rPr>
+              <a:t>        }));</a:t>
+            </a:r>
+          </a:p>
+          <a:p>
+            <a:pPr algn="l">
+              <a:spcBef>
+                <a:spcPts val="0"/>
+              </a:spcBef>
+              <a:buNone/>
+            </a:pPr>
+            <a:r>
+              <a:rPr lang="en-US" sz="1100" dirty="0">
+                <a:solidFill>
+                  <a:srgbClr val="EEEEEE"/>
+                </a:solidFill>
+                <a:latin typeface="Consolas"/>
+                <a:cs typeface="Consolas"/>
+              </a:rPr>
+              <a:t>    }</a:t>
+            </a:r>
+          </a:p>
+          <a:p>
+            <a:pPr algn="l">
+              <a:spcBef>
+                <a:spcPts val="0"/>
+              </a:spcBef>
+              <a:buNone/>
+            </a:pPr>
+            <a:r>
+              <a:rPr lang="en-US" sz="1100" dirty="0">
+                <a:solidFill>
+                  <a:srgbClr val="EEEEEE"/>
+                </a:solidFill>
+                <a:latin typeface="Consolas"/>
+                <a:cs typeface="Consolas"/>
+              </a:rPr>
+              <a:t>    for h in handles { h.join().unwrap(); }</a:t>
+            </a:r>
+          </a:p>
+          <a:p>
+            <a:pPr algn="l">
+              <a:spcBef>
+                <a:spcPts val="0"/>
+              </a:spcBef>
+              <a:buNone/>
+            </a:pPr>
+            <a:endParaRPr lang="en-US" sz="800" dirty="0">
+              <a:solidFill>
+                <a:srgbClr val="EEEEEE"/>
+              </a:solidFill>
+              <a:latin typeface="Consolas"/>
+              <a:cs typeface="Consolas"/>
+            </a:endParaRPr>
+          </a:p>
+          <a:p>
+            <a:pPr algn="l">
+              <a:spcBef>
+                <a:spcPts val="0"/>
+              </a:spcBef>
+              <a:buNone/>
+            </a:pPr>
+            <a:r>
+              <a:rPr lang="en-US" sz="1100" dirty="0">
+                <a:solidFill>
+                  <a:srgbClr val="EEEEEE"/>
+                </a:solidFill>
+                <a:latin typeface="Consolas"/>
+                <a:cs typeface="Consolas"/>
+              </a:rPr>
+              <a:t>    println!("{}", *counter.lock().unwrap());</a:t>
+            </a:r>
+          </a:p>
+          <a:p>
+            <a:pPr algn="l">
+              <a:spcBef>
+                <a:spcPts val="0"/>
+              </a:spcBef>
+              <a:buNone/>
+            </a:pPr>
+            <a:r>
+              <a:rPr lang="en-US" sz="1100" dirty="0">
+                <a:solidFill>
+                  <a:srgbClr val="8FBF8F"/>
+                </a:solidFill>
+                <a:latin typeface="Consolas"/>
+                <a:cs typeface="Consolas"/>
+              </a:rPr>
+              <a:t>    // prints: 10</a:t>
+            </a:r>
+          </a:p>
+          <a:p>
+            <a:pPr algn="l">
+              <a:spcBef>
+                <a:spcPts val="0"/>
+              </a:spcBef>
+              <a:buNone/>
+            </a:pPr>
+            <a:r>
+              <a:rPr lang="en-US" sz="1100" dirty="0">
+                <a:solidFill>
+                  <a:srgbClr val="EEEEEE"/>
+                </a:solidFill>
+                <a:latin typeface="Consolas"/>
+                <a:cs typeface="Consolas"/>
+              </a:rPr>
+              <a:t>}</a:t>
+            </a:r>
+          </a:p>
+        </p:txBody>
+      </p:sp>
+      <p:sp>
+        <p:nvSpPr>
+          <p:cNvPr id="13" name="Rectangle 12">
+            <a:extLst>
+              <a:ext uri="{FF2B5EF4-FFF2-40B4-BE49-F238E27FC236}">
+                <a16:creationId xmlns:a16="http://schemas.microsoft.com/office/drawing/2014/main" id="{3C5C6201-75B2-8145-9D2E-9B3918169263}"/>
+              </a:ext>
+            </a:extLst>
+          </p:cNvPr>
+          <p:cNvSpPr/>
+          <p:nvPr/>
+        </p:nvSpPr>
+        <p:spPr>
+          <a:xfrm>
+            <a:off x="342900" y="5905500"/>
+            <a:ext cx="11557000" cy="635000"/>
+          </a:xfrm>
+          <a:prstGeom prst="rect">
+            <a:avLst/>
+          </a:prstGeom>
+          <a:solidFill>
+            <a:srgbClr val="F5F0EB"/>
+          </a:solidFill>
+          <a:ln w="19050" cap="flat" cmpd="sng" algn="ctr">
+            <a:noFill/>
+            <a:prstDash val="solid"/>
+            <a:miter lim="800000"/>
+          </a:ln>
+        </p:spPr>
+        <p:style>
+          <a:lnRef idx="2">
+            <a:schemeClr val="accent1">
+              <a:shade val="15000"/>
+            </a:schemeClr>
+          </a:lnRef>
+          <a:fillRef idx="1">
+            <a:schemeClr val="accent1"/>
+          </a:fillRef>
+          <a:effectRef idx="0">
+            <a:schemeClr val="accent1"/>
+          </a:effectRef>
+          <a:fontRef idx="minor">
+            <a:schemeClr val="lt1"/>
+          </a:fontRef>
+        </p:style>
+        <p:txBody>
+          <a:bodyPr vertOverflow="clip" horzOverflow="clip" rtlCol="0" anchor="t"/>
+          <a:lstStyle/>
+          <a:p>
+            <a:pPr algn="l"/>
+            <a:endParaRPr lang="en-US"/>
+          </a:p>
+        </p:txBody>
+      </p:sp>
+      <p:sp>
+        <p:nvSpPr>
+          <p:cNvPr id="14" name="TextBox 13">
+            <a:extLst>
+              <a:ext uri="{FF2B5EF4-FFF2-40B4-BE49-F238E27FC236}">
+                <a16:creationId xmlns:a16="http://schemas.microsoft.com/office/drawing/2014/main" id="{B27F9004-8683-0E42-A9BA-631B7E798AD9}"/>
+              </a:ext>
+            </a:extLst>
+          </p:cNvPr>
+          <p:cNvSpPr txBox="1"/>
+          <p:nvPr/>
+        </p:nvSpPr>
+        <p:spPr>
+          <a:xfrm>
+            <a:off x="469900" y="5981700"/>
+            <a:ext cx="11303000" cy="482600"/>
+          </a:xfrm>
+          <a:prstGeom prst="rect">
+            <a:avLst/>
+          </a:prstGeom>
+          <a:noFill/>
+        </p:spPr>
+        <p:txBody>
+          <a:bodyPr vertOverflow="overflow" vert="horz" wrap="square" rtlCol="0" anchor="t">
+            <a:noAutofit/>
+          </a:bodyPr>
+          <a:lstStyle/>
+          <a:p>
+            <a:pPr algn="l"/>
+            <a:r>
+              <a:rPr lang="en-US" sz="1300" b="1">
+                <a:solidFill>
+                  <a:srgbClr val="1E1E1E"/>
+                </a:solidFill>
+              </a:rPr>
+              <a:t>Takeaway: </a:t>
+            </a:r>
+            <a:r>
+              <a:rPr lang="en-US" sz="1300">
+                <a:solidFill>
+                  <a:srgbClr val="333333"/>
+                </a:solidFill>
+              </a:rPr>
+              <a:t>Arc shares the pointer; Mutex / RwLock / Atomic make the data safely mutable. The compiler refuses to compile anything less.</a:t>
+            </a:r>
+          </a:p>
+        </p:txBody>
+      </p:sp>
+    </p:spTree>
+    <p:extLst>
+      <p:ext uri="{BB962C8B-B14F-4D97-AF65-F5344CB8AC3E}">
+        <p14:creationId xmlns:p14="http://schemas.microsoft.com/office/powerpoint/2010/main" val="3919839731"/>
+      </p:ext>
+    </p:extLst>
+  </p:cSld>
+  <p:clrMapOvr>
+    <a:masterClrMapping/>
+  </p:clrMapOvr>
+</p:sld>
+</file>
+
+<file path=ppt/slides/slide34.xml><?xml version="1.0" encoding="utf-8"?>
+<p:sld xmlns:a="http://schemas.openxmlformats.org/drawingml/2006/main" xmlns:r="http://schemas.openxmlformats.org/officeDocument/2006/relationships" xmlns:p="http://schemas.openxmlformats.org/presentationml/2006/main">
+  <p:cSld>
+    <p:spTree>
+      <p:nvGrpSpPr>
+        <p:cNvPr id="1" name=""/>
+        <p:cNvGrpSpPr/>
+        <p:nvPr/>
+      </p:nvGrpSpPr>
+      <p:grpSpPr>
+        <a:xfrm>
+          <a:off x="0" y="0"/>
+          <a:ext cx="0" cy="0"/>
+          <a:chOff x="0" y="0"/>
+          <a:chExt cx="0" cy="0"/>
+        </a:xfrm>
+      </p:grpSpPr>
+      <p:sp>
+        <p:nvSpPr>
+          <p:cNvPr id="2" name="TextBox 1">
+            <a:extLst>
+              <a:ext uri="{FF2B5EF4-FFF2-40B4-BE49-F238E27FC236}">
+                <a16:creationId xmlns:a16="http://schemas.microsoft.com/office/drawing/2014/main" id="{AA430619-E1BA-3E46-A1E8-47C119D7ADCB}"/>
+              </a:ext>
+            </a:extLst>
+          </p:cNvPr>
+          <p:cNvSpPr txBox="1"/>
+          <p:nvPr/>
+        </p:nvSpPr>
+        <p:spPr>
+          <a:xfrm>
+            <a:off x="838200" y="317500"/>
+            <a:ext cx="10515600" cy="558800"/>
+          </a:xfrm>
+          <a:prstGeom prst="rect">
+            <a:avLst/>
+          </a:prstGeom>
+          <a:noFill/>
+        </p:spPr>
+        <p:txBody>
+          <a:bodyPr vertOverflow="overflow" vert="horz" wrap="square" rtlCol="0" anchor="t">
+            <a:noAutofit/>
+          </a:bodyPr>
+          <a:lstStyle/>
+          <a:p>
+            <a:pPr algn="l"/>
+            <a:r>
+              <a:rPr lang="en-US" sz="3000" b="1">
+                <a:solidFill>
+                  <a:srgbClr val="1E1E1E"/>
+                </a:solidFill>
+              </a:rPr>
+              <a:t>Crates &amp; modules</a:t>
+            </a:r>
+          </a:p>
+        </p:txBody>
+      </p:sp>
+      <p:sp>
+        <p:nvSpPr>
+          <p:cNvPr id="3" name="Rectangle 2">
+            <a:extLst>
+              <a:ext uri="{FF2B5EF4-FFF2-40B4-BE49-F238E27FC236}">
+                <a16:creationId xmlns:a16="http://schemas.microsoft.com/office/drawing/2014/main" id="{AC210E13-8B26-A847-8F47-74EDEB22FD5B}"/>
+              </a:ext>
+            </a:extLst>
+          </p:cNvPr>
+          <p:cNvSpPr/>
+          <p:nvPr/>
+        </p:nvSpPr>
+        <p:spPr>
+          <a:xfrm>
+            <a:off x="838200" y="914400"/>
+            <a:ext cx="762000" cy="50800"/>
+          </a:xfrm>
+          <a:prstGeom prst="rect">
+            <a:avLst/>
+          </a:prstGeom>
+          <a:solidFill>
+            <a:srgbClr val="CE422B"/>
+          </a:solidFill>
+          <a:ln w="19050" cap="flat" cmpd="sng" algn="ctr">
+            <a:noFill/>
+            <a:prstDash val="solid"/>
+            <a:miter lim="800000"/>
+          </a:ln>
+        </p:spPr>
+        <p:style>
+          <a:lnRef idx="2">
+            <a:schemeClr val="accent1">
+              <a:shade val="15000"/>
+            </a:schemeClr>
+          </a:lnRef>
+          <a:fillRef idx="1">
+            <a:schemeClr val="accent1"/>
+          </a:fillRef>
+          <a:effectRef idx="0">
+            <a:schemeClr val="accent1"/>
+          </a:effectRef>
+          <a:fontRef idx="minor">
+            <a:schemeClr val="lt1"/>
+          </a:fontRef>
+        </p:style>
+        <p:txBody>
+          <a:bodyPr vertOverflow="clip" horzOverflow="clip" rtlCol="0" anchor="t"/>
+          <a:lstStyle/>
+          <a:p>
+            <a:pPr algn="l"/>
+            <a:endParaRPr lang="en-US"/>
+          </a:p>
+        </p:txBody>
+      </p:sp>
+      <p:sp>
+        <p:nvSpPr>
+          <p:cNvPr id="4" name="TextBox 3">
+            <a:extLst>
+              <a:ext uri="{FF2B5EF4-FFF2-40B4-BE49-F238E27FC236}">
+                <a16:creationId xmlns:a16="http://schemas.microsoft.com/office/drawing/2014/main" id="{DC87A372-C9A9-D84F-8ADD-F19D2E3DC9B0}"/>
+              </a:ext>
+            </a:extLst>
+          </p:cNvPr>
+          <p:cNvSpPr txBox="1"/>
+          <p:nvPr/>
+        </p:nvSpPr>
+        <p:spPr>
+          <a:xfrm>
+            <a:off x="838200" y="1066800"/>
+            <a:ext cx="10515600" cy="304800"/>
+          </a:xfrm>
+          <a:prstGeom prst="rect">
+            <a:avLst/>
+          </a:prstGeom>
+          <a:noFill/>
+        </p:spPr>
+        <p:txBody>
+          <a:bodyPr vertOverflow="overflow" vert="horz" wrap="square" rtlCol="0" anchor="t">
+            <a:noAutofit/>
+          </a:bodyPr>
+          <a:lstStyle/>
+          <a:p>
+            <a:pPr algn="l"/>
+            <a:r>
+              <a:rPr lang="en-US" sz="1400">
+                <a:solidFill>
+                  <a:srgbClr val="555555"/>
+                </a:solidFill>
+              </a:rPr>
+              <a:t>A crate is the unit of compilation and distribution; modules organise its namespace</a:t>
+            </a:r>
+          </a:p>
+        </p:txBody>
+      </p:sp>
+      <p:sp>
+        <p:nvSpPr>
+          <p:cNvPr id="5" name="Rectangle 4">
+            <a:extLst>
+              <a:ext uri="{FF2B5EF4-FFF2-40B4-BE49-F238E27FC236}">
+                <a16:creationId xmlns:a16="http://schemas.microsoft.com/office/drawing/2014/main" id="{D3BC21DF-E6CE-AE4D-9381-D572F0E54A69}"/>
+              </a:ext>
+            </a:extLst>
+          </p:cNvPr>
+          <p:cNvSpPr/>
+          <p:nvPr/>
+        </p:nvSpPr>
+        <p:spPr>
+          <a:xfrm>
+            <a:off x="342900" y="1485900"/>
+            <a:ext cx="5676900" cy="330200"/>
+          </a:xfrm>
+          <a:prstGeom prst="rect">
+            <a:avLst/>
+          </a:prstGeom>
+          <a:solidFill>
+            <a:srgbClr val="1E1E1E"/>
+          </a:solidFill>
+          <a:ln w="19050" cap="flat" cmpd="sng" algn="ctr">
+            <a:noFill/>
+            <a:prstDash val="solid"/>
+            <a:miter lim="800000"/>
+          </a:ln>
+        </p:spPr>
+        <p:style>
+          <a:lnRef idx="2">
+            <a:schemeClr val="accent1">
+              <a:shade val="15000"/>
+            </a:schemeClr>
+          </a:lnRef>
+          <a:fillRef idx="1">
+            <a:schemeClr val="accent1"/>
+          </a:fillRef>
+          <a:effectRef idx="0">
+            <a:schemeClr val="accent1"/>
+          </a:effectRef>
+          <a:fontRef idx="minor">
+            <a:schemeClr val="lt1"/>
+          </a:fontRef>
+        </p:style>
+        <p:txBody>
+          <a:bodyPr vertOverflow="clip" horzOverflow="clip" rtlCol="0" anchor="t"/>
+          <a:lstStyle/>
+          <a:p>
+            <a:pPr algn="l"/>
+            <a:endParaRPr lang="en-US"/>
+          </a:p>
+        </p:txBody>
+      </p:sp>
+      <p:sp>
+        <p:nvSpPr>
+          <p:cNvPr id="6" name="TextBox 5">
+            <a:extLst>
+              <a:ext uri="{FF2B5EF4-FFF2-40B4-BE49-F238E27FC236}">
+                <a16:creationId xmlns:a16="http://schemas.microsoft.com/office/drawing/2014/main" id="{75432499-960D-A842-B351-5E626574AF52}"/>
+              </a:ext>
+            </a:extLst>
+          </p:cNvPr>
+          <p:cNvSpPr txBox="1"/>
+          <p:nvPr/>
+        </p:nvSpPr>
+        <p:spPr>
+          <a:xfrm>
+            <a:off x="469900" y="1536700"/>
+            <a:ext cx="5422900" cy="292100"/>
+          </a:xfrm>
+          <a:prstGeom prst="rect">
+            <a:avLst/>
+          </a:prstGeom>
+          <a:noFill/>
+        </p:spPr>
+        <p:txBody>
+          <a:bodyPr vertOverflow="overflow" vert="horz" wrap="square" rtlCol="0" anchor="t">
+            <a:noAutofit/>
+          </a:bodyPr>
+          <a:lstStyle/>
+          <a:p>
+            <a:pPr algn="l"/>
+            <a:r>
+              <a:rPr lang="en-US" sz="1300" b="1">
+                <a:solidFill>
+                  <a:srgbClr val="FFFFFF"/>
+                </a:solidFill>
+              </a:rPr>
+              <a:t>Concepts</a:t>
+            </a:r>
+          </a:p>
+        </p:txBody>
+      </p:sp>
+      <p:sp>
+        <p:nvSpPr>
+          <p:cNvPr id="7" name="Rectangle 6">
+            <a:extLst>
+              <a:ext uri="{FF2B5EF4-FFF2-40B4-BE49-F238E27FC236}">
+                <a16:creationId xmlns:a16="http://schemas.microsoft.com/office/drawing/2014/main" id="{6EFBCDAF-A586-DF4E-A6BB-13864EBC7738}"/>
+              </a:ext>
+            </a:extLst>
+          </p:cNvPr>
+          <p:cNvSpPr/>
+          <p:nvPr/>
+        </p:nvSpPr>
+        <p:spPr>
+          <a:xfrm>
+            <a:off x="342900" y="1816100"/>
+            <a:ext cx="5676900" cy="3987800"/>
+          </a:xfrm>
+          <a:prstGeom prst="rect">
+            <a:avLst/>
+          </a:prstGeom>
+          <a:solidFill>
+            <a:srgbClr val="F5F0EB"/>
+          </a:solidFill>
+          <a:ln w="19050" cap="flat" cmpd="sng" algn="ctr">
+            <a:noFill/>
+            <a:prstDash val="solid"/>
+            <a:miter lim="800000"/>
+          </a:ln>
+        </p:spPr>
+        <p:style>
+          <a:lnRef idx="2">
+            <a:schemeClr val="accent1">
+              <a:shade val="15000"/>
+            </a:schemeClr>
+          </a:lnRef>
+          <a:fillRef idx="1">
+            <a:schemeClr val="accent1"/>
+          </a:fillRef>
+          <a:effectRef idx="0">
+            <a:schemeClr val="accent1"/>
+          </a:effectRef>
+          <a:fontRef idx="minor">
+            <a:schemeClr val="lt1"/>
+          </a:fontRef>
+        </p:style>
+        <p:txBody>
+          <a:bodyPr vertOverflow="clip" horzOverflow="clip" rtlCol="0" anchor="t"/>
+          <a:lstStyle/>
+          <a:p>
+            <a:pPr algn="l"/>
+            <a:endParaRPr lang="en-US"/>
+          </a:p>
+        </p:txBody>
+      </p:sp>
+      <p:sp>
+        <p:nvSpPr>
+          <p:cNvPr id="8" name="TextBox 7">
+            <a:extLst>
+              <a:ext uri="{FF2B5EF4-FFF2-40B4-BE49-F238E27FC236}">
+                <a16:creationId xmlns:a16="http://schemas.microsoft.com/office/drawing/2014/main" id="{A031951B-BF89-914B-95FF-20547CD5071D}"/>
+              </a:ext>
+            </a:extLst>
+          </p:cNvPr>
+          <p:cNvSpPr txBox="1"/>
+          <p:nvPr/>
+        </p:nvSpPr>
+        <p:spPr>
+          <a:xfrm>
+            <a:off x="596900" y="1943100"/>
+            <a:ext cx="5168900" cy="3733800"/>
+          </a:xfrm>
+          <a:prstGeom prst="rect">
+            <a:avLst/>
+          </a:prstGeom>
+          <a:noFill/>
+        </p:spPr>
+        <p:txBody>
+          <a:bodyPr vertOverflow="overflow" vert="horz" wrap="square" rtlCol="0" anchor="t">
+            <a:noAutofit/>
+          </a:bodyPr>
+          <a:lstStyle/>
+          <a:p>
+            <a:pPr algn="l">
+              <a:spcBef>
+                <a:spcPts val="0"/>
+              </a:spcBef>
+              <a:buNone/>
+            </a:pPr>
+            <a:r>
+              <a:rPr lang="en-US" sz="1400" b="1" dirty="0">
+                <a:solidFill>
+                  <a:srgbClr val="CE422B"/>
+                </a:solidFill>
+              </a:rPr>
+              <a:t>Crate — unit of compilation</a:t>
+            </a:r>
+          </a:p>
+          <a:p>
+            <a:pPr algn="l">
+              <a:spcBef>
+                <a:spcPts val="300"/>
+              </a:spcBef>
+              <a:buNone/>
+            </a:pPr>
+            <a:r>
+              <a:rPr lang="en-US" sz="1300" dirty="0">
+                <a:latin typeface="Consolas"/>
+                <a:cs typeface="Consolas"/>
+              </a:rPr>
+              <a:t>Binary (main.rs</a:t>
+            </a:r>
+            <a:r>
+              <a:rPr lang="en-US" sz="1300" dirty="0">
+                <a:solidFill>
+                  <a:srgbClr val="1E1E1E"/>
+                </a:solidFill>
+              </a:rPr>
+              <a:t>) produces an executable; </a:t>
+            </a:r>
+            <a:r>
+              <a:rPr lang="en-US" sz="1300" dirty="0">
+                <a:latin typeface="Consolas"/>
+                <a:cs typeface="Consolas"/>
+              </a:rPr>
+              <a:t>library (lib.rs</a:t>
+            </a:r>
+            <a:r>
+              <a:rPr lang="en-US" sz="1300" dirty="0">
+                <a:solidFill>
+                  <a:srgbClr val="1E1E1E"/>
+                </a:solidFill>
+              </a:rPr>
+              <a:t>) produces a reusable .rlib.</a:t>
+            </a:r>
+          </a:p>
+          <a:p>
+            <a:pPr algn="l">
+              <a:spcBef>
+                <a:spcPts val="500"/>
+              </a:spcBef>
+              <a:buNone/>
+            </a:pPr>
+            <a:r>
+              <a:rPr lang="en-US" sz="1400" b="1" dirty="0">
+                <a:solidFill>
+                  <a:srgbClr val="CE422B"/>
+                </a:solidFill>
+              </a:rPr>
+              <a:t>Module — namespace inside a crate</a:t>
+            </a:r>
+          </a:p>
+          <a:p>
+            <a:pPr algn="l">
+              <a:spcBef>
+                <a:spcPts val="300"/>
+              </a:spcBef>
+              <a:buNone/>
+            </a:pPr>
+            <a:r>
+              <a:rPr lang="en-US" sz="1300" b="1" dirty="0">
+                <a:latin typeface="Consolas"/>
+                <a:cs typeface="Consolas"/>
+              </a:rPr>
+              <a:t>mod foo;</a:t>
+            </a:r>
+            <a:r>
+              <a:rPr lang="en-US" sz="1300" dirty="0">
+                <a:solidFill>
+                  <a:srgbClr val="1E1E1E"/>
+                </a:solidFill>
+              </a:rPr>
+              <a:t> loads </a:t>
+            </a:r>
+            <a:r>
+              <a:rPr lang="en-US" sz="1300" dirty="0">
+                <a:latin typeface="Consolas"/>
+                <a:cs typeface="Consolas"/>
+              </a:rPr>
+              <a:t>foo.rs</a:t>
+            </a:r>
+            <a:r>
+              <a:rPr lang="en-US" sz="1300" dirty="0">
+                <a:solidFill>
+                  <a:srgbClr val="1E1E1E"/>
+                </a:solidFill>
+              </a:rPr>
+              <a:t> or </a:t>
+            </a:r>
+            <a:r>
+              <a:rPr lang="en-US" sz="1300" dirty="0">
+                <a:latin typeface="Consolas"/>
+                <a:cs typeface="Consolas"/>
+              </a:rPr>
+              <a:t>foo/mod.rs</a:t>
+            </a:r>
+            <a:r>
+              <a:rPr lang="en-US" sz="1300" dirty="0">
+                <a:solidFill>
+                  <a:srgbClr val="1E1E1E"/>
+                </a:solidFill>
+              </a:rPr>
+              <a:t>. Items are private by default — mark with </a:t>
+            </a:r>
+            <a:r>
+              <a:rPr lang="en-US" sz="1300" b="1" dirty="0">
+                <a:latin typeface="Consolas"/>
+                <a:cs typeface="Consolas"/>
+              </a:rPr>
+              <a:t>pub</a:t>
+            </a:r>
+            <a:r>
+              <a:rPr lang="en-US" sz="1300" dirty="0">
+                <a:solidFill>
+                  <a:srgbClr val="1E1E1E"/>
+                </a:solidFill>
+              </a:rPr>
+              <a:t> to export.</a:t>
+            </a:r>
+          </a:p>
+          <a:p>
+            <a:pPr algn="l">
+              <a:spcBef>
+                <a:spcPts val="500"/>
+              </a:spcBef>
+              <a:buNone/>
+            </a:pPr>
+            <a:r>
+              <a:rPr lang="en-US" sz="1400" b="1" dirty="0">
+                <a:solidFill>
+                  <a:srgbClr val="CE422B"/>
+                </a:solidFill>
+              </a:rPr>
+              <a:t>Cargo — package &amp; dependency manager</a:t>
+            </a:r>
+          </a:p>
+          <a:p>
+            <a:pPr algn="l">
+              <a:spcBef>
+                <a:spcPts val="300"/>
+              </a:spcBef>
+              <a:buNone/>
+            </a:pPr>
+            <a:r>
+              <a:rPr lang="en-US" sz="1300" b="1" dirty="0">
+                <a:latin typeface="Consolas"/>
+                <a:cs typeface="Consolas"/>
+              </a:rPr>
+              <a:t>cargo new</a:t>
+            </a:r>
+            <a:r>
+              <a:rPr lang="en-US" sz="1300" dirty="0">
+                <a:solidFill>
+                  <a:srgbClr val="1E1E1E"/>
+                </a:solidFill>
+              </a:rPr>
+              <a:t> scaffolds a crate. </a:t>
+            </a:r>
+            <a:r>
+              <a:rPr lang="en-US" sz="1300" b="1" dirty="0">
+                <a:latin typeface="Consolas"/>
+                <a:cs typeface="Consolas"/>
+              </a:rPr>
+              <a:t>Cargo.toml</a:t>
+            </a:r>
+            <a:r>
+              <a:rPr lang="en-US" sz="1300" dirty="0">
+                <a:solidFill>
+                  <a:srgbClr val="1E1E1E"/>
+                </a:solidFill>
+              </a:rPr>
+              <a:t> declares dependencies from crates.io.</a:t>
+            </a:r>
+          </a:p>
+          <a:p>
+            <a:pPr algn="l">
+              <a:spcBef>
+                <a:spcPts val="500"/>
+              </a:spcBef>
+              <a:buNone/>
+            </a:pPr>
+            <a:r>
+              <a:rPr lang="en-US" sz="1400" b="1" dirty="0">
+                <a:solidFill>
+                  <a:srgbClr val="CE422B"/>
+                </a:solidFill>
+              </a:rPr>
+              <a:t>Paths</a:t>
+            </a:r>
+          </a:p>
+          <a:p>
+            <a:pPr algn="l">
+              <a:spcBef>
+                <a:spcPts val="300"/>
+              </a:spcBef>
+              <a:buNone/>
+            </a:pPr>
+            <a:r>
+              <a:rPr lang="en-US" sz="1300" b="1" dirty="0">
+                <a:latin typeface="Consolas"/>
+                <a:cs typeface="Consolas"/>
+              </a:rPr>
+              <a:t>crate::</a:t>
+            </a:r>
+            <a:r>
+              <a:rPr lang="en-US" sz="1300" dirty="0">
+                <a:solidFill>
+                  <a:srgbClr val="1E1E1E"/>
+                </a:solidFill>
+              </a:rPr>
+              <a:t> (root), </a:t>
+            </a:r>
+            <a:r>
+              <a:rPr lang="en-US" sz="1300" b="1" dirty="0">
+                <a:latin typeface="Consolas"/>
+                <a:cs typeface="Consolas"/>
+              </a:rPr>
+              <a:t>super::</a:t>
+            </a:r>
+            <a:r>
+              <a:rPr lang="en-US" sz="1300" dirty="0">
+                <a:solidFill>
+                  <a:srgbClr val="1E1E1E"/>
+                </a:solidFill>
+              </a:rPr>
+              <a:t> (parent), </a:t>
+            </a:r>
+            <a:r>
+              <a:rPr lang="en-US" sz="1300" b="1" dirty="0">
+                <a:latin typeface="Consolas"/>
+                <a:cs typeface="Consolas"/>
+              </a:rPr>
+              <a:t>self::</a:t>
+            </a:r>
+            <a:r>
+              <a:rPr lang="en-US" sz="1300" dirty="0">
+                <a:solidFill>
+                  <a:srgbClr val="1E1E1E"/>
+                </a:solidFill>
+              </a:rPr>
+              <a:t> (current). </a:t>
+            </a:r>
+            <a:r>
+              <a:rPr lang="en-US" sz="1300" b="1" dirty="0">
+                <a:latin typeface="Consolas"/>
+                <a:cs typeface="Consolas"/>
+              </a:rPr>
+              <a:t>use</a:t>
+            </a:r>
+            <a:r>
+              <a:rPr lang="en-US" sz="1300" dirty="0">
+                <a:solidFill>
+                  <a:srgbClr val="1E1E1E"/>
+                </a:solidFill>
+              </a:rPr>
+              <a:t> brings paths into scope.</a:t>
+            </a:r>
+          </a:p>
+        </p:txBody>
+      </p:sp>
+      <p:sp>
+        <p:nvSpPr>
+          <p:cNvPr id="9" name="Rectangle 8">
+            <a:extLst>
+              <a:ext uri="{FF2B5EF4-FFF2-40B4-BE49-F238E27FC236}">
+                <a16:creationId xmlns:a16="http://schemas.microsoft.com/office/drawing/2014/main" id="{EED3A0D1-A6A0-F84E-A3E8-59390F18BA71}"/>
+              </a:ext>
+            </a:extLst>
+          </p:cNvPr>
+          <p:cNvSpPr/>
+          <p:nvPr/>
+        </p:nvSpPr>
+        <p:spPr>
+          <a:xfrm>
+            <a:off x="6223000" y="1485900"/>
+            <a:ext cx="5676900" cy="330200"/>
+          </a:xfrm>
+          <a:prstGeom prst="rect">
+            <a:avLst/>
+          </a:prstGeom>
+          <a:solidFill>
+            <a:srgbClr val="1E1E1E"/>
+          </a:solidFill>
+          <a:ln w="19050" cap="flat" cmpd="sng" algn="ctr">
+            <a:noFill/>
+            <a:prstDash val="solid"/>
+            <a:miter lim="800000"/>
+          </a:ln>
+        </p:spPr>
+        <p:style>
+          <a:lnRef idx="2">
+            <a:schemeClr val="accent1">
+              <a:shade val="15000"/>
+            </a:schemeClr>
+          </a:lnRef>
+          <a:fillRef idx="1">
+            <a:schemeClr val="accent1"/>
+          </a:fillRef>
+          <a:effectRef idx="0">
+            <a:schemeClr val="accent1"/>
+          </a:effectRef>
+          <a:fontRef idx="minor">
+            <a:schemeClr val="lt1"/>
+          </a:fontRef>
+        </p:style>
+        <p:txBody>
+          <a:bodyPr vertOverflow="clip" horzOverflow="clip" rtlCol="0" anchor="t"/>
+          <a:lstStyle/>
+          <a:p>
+            <a:pPr algn="l"/>
+            <a:endParaRPr lang="en-US"/>
+          </a:p>
+        </p:txBody>
+      </p:sp>
+      <p:sp>
+        <p:nvSpPr>
+          <p:cNvPr id="10" name="TextBox 9">
+            <a:extLst>
+              <a:ext uri="{FF2B5EF4-FFF2-40B4-BE49-F238E27FC236}">
+                <a16:creationId xmlns:a16="http://schemas.microsoft.com/office/drawing/2014/main" id="{391523BD-5A6F-D940-8DC0-CF47F0D2A080}"/>
+              </a:ext>
+            </a:extLst>
+          </p:cNvPr>
+          <p:cNvSpPr txBox="1"/>
+          <p:nvPr/>
+        </p:nvSpPr>
+        <p:spPr>
+          <a:xfrm>
+            <a:off x="6350000" y="1536700"/>
+            <a:ext cx="5422900" cy="292100"/>
+          </a:xfrm>
+          <a:prstGeom prst="rect">
+            <a:avLst/>
+          </a:prstGeom>
+          <a:noFill/>
+        </p:spPr>
+        <p:txBody>
+          <a:bodyPr vertOverflow="overflow" vert="horz" wrap="square" rtlCol="0" anchor="t">
+            <a:noAutofit/>
+          </a:bodyPr>
+          <a:lstStyle/>
+          <a:p>
+            <a:pPr algn="l"/>
+            <a:r>
+              <a:rPr lang="en-US" sz="1300" b="1">
+                <a:solidFill>
+                  <a:srgbClr val="FFFFFF"/>
+                </a:solidFill>
+              </a:rPr>
+              <a:t>Layout — a library crate "geom"</a:t>
+            </a:r>
+          </a:p>
+        </p:txBody>
+      </p:sp>
+      <p:sp>
+        <p:nvSpPr>
+          <p:cNvPr id="11" name="Rectangle 10">
+            <a:extLst>
+              <a:ext uri="{FF2B5EF4-FFF2-40B4-BE49-F238E27FC236}">
+                <a16:creationId xmlns:a16="http://schemas.microsoft.com/office/drawing/2014/main" id="{7DE6FDA4-F75B-A947-9209-F3BC4AFEDCF9}"/>
+              </a:ext>
+            </a:extLst>
+          </p:cNvPr>
+          <p:cNvSpPr/>
+          <p:nvPr/>
+        </p:nvSpPr>
+        <p:spPr>
+          <a:xfrm>
+            <a:off x="6223000" y="1816100"/>
+            <a:ext cx="5676900" cy="3987800"/>
+          </a:xfrm>
+          <a:prstGeom prst="rect">
+            <a:avLst/>
+          </a:prstGeom>
+          <a:solidFill>
+            <a:srgbClr val="1E1E1E"/>
+          </a:solidFill>
+          <a:ln w="19050" cap="flat" cmpd="sng" algn="ctr">
+            <a:noFill/>
+            <a:prstDash val="solid"/>
+            <a:miter lim="800000"/>
+          </a:ln>
+        </p:spPr>
+        <p:style>
+          <a:lnRef idx="2">
+            <a:schemeClr val="accent1">
+              <a:shade val="15000"/>
+            </a:schemeClr>
+          </a:lnRef>
+          <a:fillRef idx="1">
+            <a:schemeClr val="accent1"/>
+          </a:fillRef>
+          <a:effectRef idx="0">
+            <a:schemeClr val="accent1"/>
+          </a:effectRef>
+          <a:fontRef idx="minor">
+            <a:schemeClr val="lt1"/>
+          </a:fontRef>
+        </p:style>
+        <p:txBody>
+          <a:bodyPr vertOverflow="clip" horzOverflow="clip" rtlCol="0" anchor="t"/>
+          <a:lstStyle/>
+          <a:p>
+            <a:pPr algn="l"/>
+            <a:endParaRPr lang="en-US"/>
+          </a:p>
+        </p:txBody>
+      </p:sp>
+      <p:sp>
+        <p:nvSpPr>
+          <p:cNvPr id="12" name="TextBox 11">
+            <a:extLst>
+              <a:ext uri="{FF2B5EF4-FFF2-40B4-BE49-F238E27FC236}">
+                <a16:creationId xmlns:a16="http://schemas.microsoft.com/office/drawing/2014/main" id="{8E37AF9F-903B-1A40-B1CC-BB1398758A10}"/>
+              </a:ext>
+            </a:extLst>
+          </p:cNvPr>
+          <p:cNvSpPr txBox="1"/>
+          <p:nvPr/>
+        </p:nvSpPr>
+        <p:spPr>
+          <a:xfrm>
+            <a:off x="6350000" y="1892300"/>
+            <a:ext cx="5422900" cy="3848100"/>
+          </a:xfrm>
+          <a:prstGeom prst="rect">
+            <a:avLst/>
+          </a:prstGeom>
+          <a:noFill/>
+        </p:spPr>
+        <p:txBody>
+          <a:bodyPr vertOverflow="overflow" vert="horz" wrap="square" rtlCol="0" anchor="t">
+            <a:noAutofit/>
+          </a:bodyPr>
+          <a:lstStyle/>
+          <a:p>
+            <a:pPr algn="l">
+              <a:spcBef>
+                <a:spcPts val="0"/>
+              </a:spcBef>
+              <a:buNone/>
+            </a:pPr>
+            <a:r>
+              <a:rPr lang="en-US" sz="1100" dirty="0">
+                <a:solidFill>
+                  <a:srgbClr val="FFB454"/>
+                </a:solidFill>
+                <a:latin typeface="Consolas"/>
+                <a:cs typeface="Consolas"/>
+              </a:rPr>
+              <a:t>$ cargo new --lib geom</a:t>
+            </a:r>
+          </a:p>
+          <a:p>
+            <a:pPr algn="l">
+              <a:spcBef>
+                <a:spcPts val="0"/>
+              </a:spcBef>
+              <a:buNone/>
+            </a:pPr>
+            <a:r>
+              <a:rPr lang="en-US" sz="1100" dirty="0">
+                <a:solidFill>
+                  <a:srgbClr val="EEEEEE"/>
+                </a:solidFill>
+                <a:latin typeface="Consolas"/>
+                <a:cs typeface="Consolas"/>
+              </a:rPr>
+              <a:t>geom/</a:t>
+            </a:r>
+          </a:p>
+          <a:p>
+            <a:pPr algn="l">
+              <a:spcBef>
+                <a:spcPts val="0"/>
+              </a:spcBef>
+              <a:buNone/>
+            </a:pPr>
+            <a:r>
+              <a:rPr lang="en-US" sz="1100" dirty="0">
+                <a:solidFill>
+                  <a:srgbClr val="EEEEEE"/>
+                </a:solidFill>
+                <a:latin typeface="Consolas"/>
+                <a:cs typeface="Consolas"/>
+              </a:rPr>
+              <a:t>├── Cargo.toml</a:t>
+            </a:r>
+          </a:p>
+          <a:p>
+            <a:pPr algn="l">
+              <a:spcBef>
+                <a:spcPts val="0"/>
+              </a:spcBef>
+              <a:buNone/>
+            </a:pPr>
+            <a:r>
+              <a:rPr lang="en-US" sz="1100" dirty="0">
+                <a:solidFill>
+                  <a:srgbClr val="EEEEEE"/>
+                </a:solidFill>
+                <a:latin typeface="Consolas"/>
+                <a:cs typeface="Consolas"/>
+              </a:rPr>
+              <a:t>└── src/</a:t>
+            </a:r>
+          </a:p>
+          <a:p>
+            <a:pPr algn="l">
+              <a:spcBef>
+                <a:spcPts val="0"/>
+              </a:spcBef>
+              <a:buNone/>
+            </a:pPr>
+            <a:r>
+              <a:rPr lang="en-US" sz="1100" dirty="0">
+                <a:solidFill>
+                  <a:srgbClr val="8FBF8F"/>
+                </a:solidFill>
+                <a:latin typeface="Consolas"/>
+                <a:cs typeface="Consolas"/>
+              </a:rPr>
+              <a:t>    ├── lib.rs        // crate root</a:t>
+            </a:r>
+          </a:p>
+          <a:p>
+            <a:pPr algn="l">
+              <a:spcBef>
+                <a:spcPts val="0"/>
+              </a:spcBef>
+              <a:buNone/>
+            </a:pPr>
+            <a:r>
+              <a:rPr lang="en-US" sz="1100" dirty="0">
+                <a:solidFill>
+                  <a:srgbClr val="8FBF8F"/>
+                </a:solidFill>
+                <a:latin typeface="Consolas"/>
+                <a:cs typeface="Consolas"/>
+              </a:rPr>
+              <a:t>    └── shapes.rs     // module</a:t>
+            </a:r>
+          </a:p>
+          <a:p>
+            <a:pPr algn="l">
+              <a:spcBef>
+                <a:spcPts val="0"/>
+              </a:spcBef>
+              <a:buNone/>
+            </a:pPr>
+            <a:endParaRPr lang="en-US" sz="800" dirty="0">
+              <a:solidFill>
+                <a:srgbClr val="EEEEEE"/>
+              </a:solidFill>
+              <a:latin typeface="Consolas"/>
+              <a:cs typeface="Consolas"/>
+            </a:endParaRPr>
+          </a:p>
+          <a:p>
+            <a:pPr algn="l">
+              <a:spcBef>
+                <a:spcPts val="0"/>
+              </a:spcBef>
+              <a:buNone/>
+            </a:pPr>
+            <a:r>
+              <a:rPr lang="en-US" sz="1100" dirty="0">
+                <a:solidFill>
+                  <a:srgbClr val="8FBF8F"/>
+                </a:solidFill>
+                <a:latin typeface="Consolas"/>
+                <a:cs typeface="Consolas"/>
+              </a:rPr>
+              <a:t>// src/lib.rs</a:t>
+            </a:r>
+          </a:p>
+          <a:p>
+            <a:pPr algn="l">
+              <a:spcBef>
+                <a:spcPts val="0"/>
+              </a:spcBef>
+              <a:buNone/>
+            </a:pPr>
+            <a:r>
+              <a:rPr lang="en-US" sz="1100" dirty="0">
+                <a:solidFill>
+                  <a:srgbClr val="EEEEEE"/>
+                </a:solidFill>
+                <a:latin typeface="Consolas"/>
+                <a:cs typeface="Consolas"/>
+              </a:rPr>
+              <a:t>pub mod shapes;          // declare module</a:t>
+            </a:r>
+          </a:p>
+          <a:p>
+            <a:pPr algn="l">
+              <a:spcBef>
+                <a:spcPts val="0"/>
+              </a:spcBef>
+              <a:buNone/>
+            </a:pPr>
+            <a:r>
+              <a:rPr lang="en-US" sz="1100" dirty="0">
+                <a:solidFill>
+                  <a:srgbClr val="EEEEEE"/>
+                </a:solidFill>
+                <a:latin typeface="Consolas"/>
+                <a:cs typeface="Consolas"/>
+              </a:rPr>
+              <a:t>pub use shapes::Circle;  // re-export</a:t>
+            </a:r>
+          </a:p>
+          <a:p>
+            <a:pPr algn="l">
+              <a:spcBef>
+                <a:spcPts val="0"/>
+              </a:spcBef>
+              <a:buNone/>
+            </a:pPr>
+            <a:endParaRPr lang="en-US" sz="800" dirty="0">
+              <a:solidFill>
+                <a:srgbClr val="EEEEEE"/>
+              </a:solidFill>
+              <a:latin typeface="Consolas"/>
+              <a:cs typeface="Consolas"/>
+            </a:endParaRPr>
+          </a:p>
+          <a:p>
+            <a:pPr algn="l">
+              <a:spcBef>
+                <a:spcPts val="0"/>
+              </a:spcBef>
+              <a:buNone/>
+            </a:pPr>
+            <a:r>
+              <a:rPr lang="en-US" sz="1100" dirty="0">
+                <a:solidFill>
+                  <a:srgbClr val="8FBF8F"/>
+                </a:solidFill>
+                <a:latin typeface="Consolas"/>
+                <a:cs typeface="Consolas"/>
+              </a:rPr>
+              <a:t>// src/shapes.rs</a:t>
+            </a:r>
+          </a:p>
+          <a:p>
+            <a:pPr algn="l">
+              <a:spcBef>
+                <a:spcPts val="0"/>
+              </a:spcBef>
+              <a:buNone/>
+            </a:pPr>
+            <a:r>
+              <a:rPr lang="en-US" sz="1100" dirty="0">
+                <a:solidFill>
+                  <a:srgbClr val="EEEEEE"/>
+                </a:solidFill>
+                <a:latin typeface="Consolas"/>
+                <a:cs typeface="Consolas"/>
+              </a:rPr>
+              <a:t>pub struct Circle { pub r: f64 }</a:t>
+            </a:r>
+          </a:p>
+          <a:p>
+            <a:pPr algn="l">
+              <a:spcBef>
+                <a:spcPts val="0"/>
+              </a:spcBef>
+              <a:buNone/>
+            </a:pPr>
+            <a:r>
+              <a:rPr lang="en-US" sz="1100" dirty="0">
+                <a:solidFill>
+                  <a:srgbClr val="EEEEEE"/>
+                </a:solidFill>
+                <a:latin typeface="Consolas"/>
+                <a:cs typeface="Consolas"/>
+              </a:rPr>
+              <a:t>impl Circle {</a:t>
+            </a:r>
+          </a:p>
+          <a:p>
+            <a:pPr algn="l">
+              <a:spcBef>
+                <a:spcPts val="0"/>
+              </a:spcBef>
+              <a:buNone/>
+            </a:pPr>
+            <a:r>
+              <a:rPr lang="en-US" sz="1100" dirty="0">
+                <a:solidFill>
+                  <a:srgbClr val="EEEEEE"/>
+                </a:solidFill>
+                <a:latin typeface="Consolas"/>
+                <a:cs typeface="Consolas"/>
+              </a:rPr>
+              <a:t>    pub fn area(&amp;self) -&gt; f64 {</a:t>
+            </a:r>
+          </a:p>
+          <a:p>
+            <a:pPr algn="l">
+              <a:spcBef>
+                <a:spcPts val="0"/>
+              </a:spcBef>
+              <a:buNone/>
+            </a:pPr>
+            <a:r>
+              <a:rPr lang="en-US" sz="1100" dirty="0">
+                <a:solidFill>
+                  <a:srgbClr val="EEEEEE"/>
+                </a:solidFill>
+                <a:latin typeface="Consolas"/>
+                <a:cs typeface="Consolas"/>
+              </a:rPr>
+              <a:t>        std::f64::consts::PI * self.r * self.r</a:t>
+            </a:r>
+          </a:p>
+          <a:p>
+            <a:pPr algn="l">
+              <a:spcBef>
+                <a:spcPts val="0"/>
+              </a:spcBef>
+              <a:buNone/>
+            </a:pPr>
+            <a:r>
+              <a:rPr lang="en-US" sz="1100" dirty="0">
+                <a:solidFill>
+                  <a:srgbClr val="EEEEEE"/>
+                </a:solidFill>
+                <a:latin typeface="Consolas"/>
+                <a:cs typeface="Consolas"/>
+              </a:rPr>
+              <a:t>    }</a:t>
+            </a:r>
+          </a:p>
+          <a:p>
+            <a:pPr algn="l">
+              <a:spcBef>
+                <a:spcPts val="0"/>
+              </a:spcBef>
+              <a:buNone/>
+            </a:pPr>
+            <a:r>
+              <a:rPr lang="en-US" sz="1100" dirty="0">
+                <a:solidFill>
+                  <a:srgbClr val="EEEEEE"/>
+                </a:solidFill>
+                <a:latin typeface="Consolas"/>
+                <a:cs typeface="Consolas"/>
+              </a:rPr>
+              <a:t>}</a:t>
+            </a:r>
+          </a:p>
+          <a:p>
+            <a:pPr algn="l">
+              <a:spcBef>
+                <a:spcPts val="0"/>
+              </a:spcBef>
+              <a:buNone/>
+            </a:pPr>
+            <a:endParaRPr lang="en-US" sz="800" dirty="0">
+              <a:solidFill>
+                <a:srgbClr val="EEEEEE"/>
+              </a:solidFill>
+              <a:latin typeface="Consolas"/>
+              <a:cs typeface="Consolas"/>
+            </a:endParaRPr>
+          </a:p>
+          <a:p>
+            <a:pPr algn="l">
+              <a:spcBef>
+                <a:spcPts val="0"/>
+              </a:spcBef>
+              <a:buNone/>
+            </a:pPr>
+            <a:r>
+              <a:rPr lang="en-US" sz="1100" dirty="0">
+                <a:solidFill>
+                  <a:srgbClr val="8FBF8F"/>
+                </a:solidFill>
+                <a:latin typeface="Consolas"/>
+                <a:cs typeface="Consolas"/>
+              </a:rPr>
+              <a:t>// Cargo.toml of a consumer crate:</a:t>
+            </a:r>
+          </a:p>
+          <a:p>
+            <a:pPr algn="l">
+              <a:spcBef>
+                <a:spcPts val="0"/>
+              </a:spcBef>
+              <a:buNone/>
+            </a:pPr>
+            <a:r>
+              <a:rPr lang="en-US" sz="1100" dirty="0">
+                <a:solidFill>
+                  <a:srgbClr val="8FBF8F"/>
+                </a:solidFill>
+                <a:latin typeface="Consolas"/>
+                <a:cs typeface="Consolas"/>
+              </a:rPr>
+              <a:t>// geom = { path = "../geom" }</a:t>
+            </a:r>
+          </a:p>
+          <a:p>
+            <a:pPr algn="l">
+              <a:spcBef>
+                <a:spcPts val="0"/>
+              </a:spcBef>
+              <a:buNone/>
+            </a:pPr>
+            <a:r>
+              <a:rPr lang="en-US" sz="1100" dirty="0">
+                <a:solidFill>
+                  <a:srgbClr val="EEEEEE"/>
+                </a:solidFill>
+                <a:latin typeface="Consolas"/>
+                <a:cs typeface="Consolas"/>
+              </a:rPr>
+              <a:t>use geom::Circle;</a:t>
+            </a:r>
+          </a:p>
+        </p:txBody>
+      </p:sp>
+      <p:sp>
+        <p:nvSpPr>
+          <p:cNvPr id="13" name="Rectangle 12">
+            <a:extLst>
+              <a:ext uri="{FF2B5EF4-FFF2-40B4-BE49-F238E27FC236}">
+                <a16:creationId xmlns:a16="http://schemas.microsoft.com/office/drawing/2014/main" id="{C55437AB-4228-F04F-BE61-54F20E9E6CDA}"/>
+              </a:ext>
+            </a:extLst>
+          </p:cNvPr>
+          <p:cNvSpPr/>
+          <p:nvPr/>
+        </p:nvSpPr>
+        <p:spPr>
+          <a:xfrm>
+            <a:off x="342900" y="5905500"/>
+            <a:ext cx="11557000" cy="635000"/>
+          </a:xfrm>
+          <a:prstGeom prst="rect">
+            <a:avLst/>
+          </a:prstGeom>
+          <a:solidFill>
+            <a:srgbClr val="F5F0EB"/>
+          </a:solidFill>
+          <a:ln w="19050" cap="flat" cmpd="sng" algn="ctr">
+            <a:noFill/>
+            <a:prstDash val="solid"/>
+            <a:miter lim="800000"/>
+          </a:ln>
+        </p:spPr>
+        <p:style>
+          <a:lnRef idx="2">
+            <a:schemeClr val="accent1">
+              <a:shade val="15000"/>
+            </a:schemeClr>
+          </a:lnRef>
+          <a:fillRef idx="1">
+            <a:schemeClr val="accent1"/>
+          </a:fillRef>
+          <a:effectRef idx="0">
+            <a:schemeClr val="accent1"/>
+          </a:effectRef>
+          <a:fontRef idx="minor">
+            <a:schemeClr val="lt1"/>
+          </a:fontRef>
+        </p:style>
+        <p:txBody>
+          <a:bodyPr vertOverflow="clip" horzOverflow="clip" rtlCol="0" anchor="t"/>
+          <a:lstStyle/>
+          <a:p>
+            <a:pPr algn="l"/>
+            <a:endParaRPr lang="en-US"/>
+          </a:p>
+        </p:txBody>
+      </p:sp>
+      <p:sp>
+        <p:nvSpPr>
+          <p:cNvPr id="14" name="TextBox 13">
+            <a:extLst>
+              <a:ext uri="{FF2B5EF4-FFF2-40B4-BE49-F238E27FC236}">
+                <a16:creationId xmlns:a16="http://schemas.microsoft.com/office/drawing/2014/main" id="{0CDD1949-7C13-CD4B-A8A6-DD12C691014B}"/>
+              </a:ext>
+            </a:extLst>
+          </p:cNvPr>
+          <p:cNvSpPr txBox="1"/>
+          <p:nvPr/>
+        </p:nvSpPr>
+        <p:spPr>
+          <a:xfrm>
+            <a:off x="469900" y="5981700"/>
+            <a:ext cx="11303000" cy="482600"/>
+          </a:xfrm>
+          <a:prstGeom prst="rect">
+            <a:avLst/>
+          </a:prstGeom>
+          <a:noFill/>
+        </p:spPr>
+        <p:txBody>
+          <a:bodyPr vertOverflow="overflow" vert="horz" wrap="square" rtlCol="0" anchor="t">
+            <a:noAutofit/>
+          </a:bodyPr>
+          <a:lstStyle/>
+          <a:p>
+            <a:pPr algn="l"/>
+            <a:r>
+              <a:rPr lang="en-US" sz="1300" b="1">
+                <a:solidFill>
+                  <a:srgbClr val="1E1E1E"/>
+                </a:solidFill>
+              </a:rPr>
+              <a:t>Takeaway: </a:t>
+            </a:r>
+            <a:r>
+              <a:rPr lang="en-US" sz="1300">
+                <a:solidFill>
+                  <a:srgbClr val="333333"/>
+                </a:solidFill>
+              </a:rPr>
+              <a:t>cargo new gives you a crate; mod and pub give you a public API; Cargo.toml links crates together.</a:t>
+            </a:r>
+          </a:p>
+        </p:txBody>
+      </p:sp>
+    </p:spTree>
+    <p:extLst>
+      <p:ext uri="{BB962C8B-B14F-4D97-AF65-F5344CB8AC3E}">
+        <p14:creationId xmlns:p14="http://schemas.microsoft.com/office/powerpoint/2010/main" val="3164694296"/>
+      </p:ext>
+    </p:extLst>
+  </p:cSld>
+  <p:clrMapOvr>
+    <a:masterClrMapping/>
+  </p:clrMapOvr>
+</p:sld>
+</file>
+
+<file path=ppt/slides/slide35.xml><?xml version="1.0" encoding="utf-8"?>
+<p:sld xmlns:a="http://schemas.openxmlformats.org/drawingml/2006/main" xmlns:r="http://schemas.openxmlformats.org/officeDocument/2006/relationships" xmlns:p="http://schemas.openxmlformats.org/presentationml/2006/main">
+  <p:cSld>
+    <p:spTree>
+      <p:nvGrpSpPr>
+        <p:cNvPr id="1" name=""/>
+        <p:cNvGrpSpPr/>
+        <p:nvPr/>
+      </p:nvGrpSpPr>
+      <p:grpSpPr>
+        <a:xfrm>
+          <a:off x="0" y="0"/>
+          <a:ext cx="0" cy="0"/>
+          <a:chOff x="0" y="0"/>
+          <a:chExt cx="0" cy="0"/>
+        </a:xfrm>
+      </p:grpSpPr>
+      <p:sp>
+        <p:nvSpPr>
+          <p:cNvPr id="2" name="TextBox 1">
+            <a:extLst>
+              <a:ext uri="{FF2B5EF4-FFF2-40B4-BE49-F238E27FC236}">
+                <a16:creationId xmlns:a16="http://schemas.microsoft.com/office/drawing/2014/main" id="{A6B38AF2-5D58-D34C-91F6-C21C6F87A37B}"/>
+              </a:ext>
+            </a:extLst>
+          </p:cNvPr>
+          <p:cNvSpPr txBox="1"/>
+          <p:nvPr/>
+        </p:nvSpPr>
+        <p:spPr>
+          <a:xfrm>
+            <a:off x="838200" y="317500"/>
+            <a:ext cx="10515600" cy="558800"/>
+          </a:xfrm>
+          <a:prstGeom prst="rect">
+            <a:avLst/>
+          </a:prstGeom>
+          <a:noFill/>
+        </p:spPr>
+        <p:txBody>
+          <a:bodyPr vertOverflow="overflow" vert="horz" wrap="square" rtlCol="0" anchor="t">
+            <a:noAutofit/>
+          </a:bodyPr>
+          <a:lstStyle/>
+          <a:p>
+            <a:pPr algn="l"/>
+            <a:r>
+              <a:rPr lang="en-US" sz="3000" b="1">
+                <a:solidFill>
+                  <a:srgbClr val="1E1E1E"/>
+                </a:solidFill>
+              </a:rPr>
+              <a:t>Macros</a:t>
+            </a:r>
+          </a:p>
+        </p:txBody>
+      </p:sp>
+      <p:sp>
+        <p:nvSpPr>
+          <p:cNvPr id="3" name="Rectangle 2">
+            <a:extLst>
+              <a:ext uri="{FF2B5EF4-FFF2-40B4-BE49-F238E27FC236}">
+                <a16:creationId xmlns:a16="http://schemas.microsoft.com/office/drawing/2014/main" id="{34AEF19E-6309-0144-814B-CA9E26941822}"/>
+              </a:ext>
+            </a:extLst>
+          </p:cNvPr>
+          <p:cNvSpPr/>
+          <p:nvPr/>
+        </p:nvSpPr>
+        <p:spPr>
+          <a:xfrm>
+            <a:off x="838200" y="914400"/>
+            <a:ext cx="762000" cy="50800"/>
+          </a:xfrm>
+          <a:prstGeom prst="rect">
+            <a:avLst/>
+          </a:prstGeom>
+          <a:solidFill>
+            <a:srgbClr val="CE422B"/>
+          </a:solidFill>
+          <a:ln w="19050" cap="flat" cmpd="sng" algn="ctr">
+            <a:noFill/>
+            <a:prstDash val="solid"/>
+            <a:miter lim="800000"/>
+          </a:ln>
+        </p:spPr>
+        <p:style>
+          <a:lnRef idx="2">
+            <a:schemeClr val="accent1">
+              <a:shade val="15000"/>
+            </a:schemeClr>
+          </a:lnRef>
+          <a:fillRef idx="1">
+            <a:schemeClr val="accent1"/>
+          </a:fillRef>
+          <a:effectRef idx="0">
+            <a:schemeClr val="accent1"/>
+          </a:effectRef>
+          <a:fontRef idx="minor">
+            <a:schemeClr val="lt1"/>
+          </a:fontRef>
+        </p:style>
+        <p:txBody>
+          <a:bodyPr vertOverflow="clip" horzOverflow="clip" rtlCol="0" anchor="t"/>
+          <a:lstStyle/>
+          <a:p>
+            <a:pPr algn="l"/>
+            <a:endParaRPr lang="en-US"/>
+          </a:p>
+        </p:txBody>
+      </p:sp>
+      <p:sp>
+        <p:nvSpPr>
+          <p:cNvPr id="4" name="TextBox 3">
+            <a:extLst>
+              <a:ext uri="{FF2B5EF4-FFF2-40B4-BE49-F238E27FC236}">
+                <a16:creationId xmlns:a16="http://schemas.microsoft.com/office/drawing/2014/main" id="{2962E08F-7591-4343-A7F5-60D1C5E62EE1}"/>
+              </a:ext>
+            </a:extLst>
+          </p:cNvPr>
+          <p:cNvSpPr txBox="1"/>
+          <p:nvPr/>
+        </p:nvSpPr>
+        <p:spPr>
+          <a:xfrm>
+            <a:off x="838200" y="1066800"/>
+            <a:ext cx="10515600" cy="304800"/>
+          </a:xfrm>
+          <a:prstGeom prst="rect">
+            <a:avLst/>
+          </a:prstGeom>
+          <a:noFill/>
+        </p:spPr>
+        <p:txBody>
+          <a:bodyPr vertOverflow="overflow" vert="horz" wrap="square" rtlCol="0" anchor="t">
+            <a:noAutofit/>
+          </a:bodyPr>
+          <a:lstStyle/>
+          <a:p>
+            <a:pPr algn="l"/>
+            <a:r>
+              <a:rPr lang="en-US" sz="1400">
+                <a:solidFill>
+                  <a:srgbClr val="555555"/>
+                </a:solidFill>
+              </a:rPr>
+              <a:t>Code that writes code — hygienic, typed, and operating on a parsed token stream (not raw text)</a:t>
+            </a:r>
+          </a:p>
+        </p:txBody>
+      </p:sp>
+      <p:sp>
+        <p:nvSpPr>
+          <p:cNvPr id="5" name="Rectangle 4">
+            <a:extLst>
+              <a:ext uri="{FF2B5EF4-FFF2-40B4-BE49-F238E27FC236}">
+                <a16:creationId xmlns:a16="http://schemas.microsoft.com/office/drawing/2014/main" id="{4C752E89-F8D6-B948-B527-D0AE836759DC}"/>
+              </a:ext>
+            </a:extLst>
+          </p:cNvPr>
+          <p:cNvSpPr/>
+          <p:nvPr/>
+        </p:nvSpPr>
+        <p:spPr>
+          <a:xfrm>
+            <a:off x="342900" y="1485900"/>
+            <a:ext cx="5676900" cy="330200"/>
+          </a:xfrm>
+          <a:prstGeom prst="rect">
+            <a:avLst/>
+          </a:prstGeom>
+          <a:solidFill>
+            <a:srgbClr val="1E1E1E"/>
+          </a:solidFill>
+          <a:ln w="19050" cap="flat" cmpd="sng" algn="ctr">
+            <a:noFill/>
+            <a:prstDash val="solid"/>
+            <a:miter lim="800000"/>
+          </a:ln>
+        </p:spPr>
+        <p:style>
+          <a:lnRef idx="2">
+            <a:schemeClr val="accent1">
+              <a:shade val="15000"/>
+            </a:schemeClr>
+          </a:lnRef>
+          <a:fillRef idx="1">
+            <a:schemeClr val="accent1"/>
+          </a:fillRef>
+          <a:effectRef idx="0">
+            <a:schemeClr val="accent1"/>
+          </a:effectRef>
+          <a:fontRef idx="minor">
+            <a:schemeClr val="lt1"/>
+          </a:fontRef>
+        </p:style>
+        <p:txBody>
+          <a:bodyPr vertOverflow="clip" horzOverflow="clip" rtlCol="0" anchor="t"/>
+          <a:lstStyle/>
+          <a:p>
+            <a:pPr algn="l"/>
+            <a:endParaRPr lang="en-US"/>
+          </a:p>
+        </p:txBody>
+      </p:sp>
+      <p:sp>
+        <p:nvSpPr>
+          <p:cNvPr id="6" name="TextBox 5">
+            <a:extLst>
+              <a:ext uri="{FF2B5EF4-FFF2-40B4-BE49-F238E27FC236}">
+                <a16:creationId xmlns:a16="http://schemas.microsoft.com/office/drawing/2014/main" id="{5D82D163-7CE2-A94D-8D6B-5C9EA7E7F36B}"/>
+              </a:ext>
+            </a:extLst>
+          </p:cNvPr>
+          <p:cNvSpPr txBox="1"/>
+          <p:nvPr/>
+        </p:nvSpPr>
+        <p:spPr>
+          <a:xfrm>
+            <a:off x="469900" y="1536700"/>
+            <a:ext cx="5422900" cy="292100"/>
+          </a:xfrm>
+          <a:prstGeom prst="rect">
+            <a:avLst/>
+          </a:prstGeom>
+          <a:noFill/>
+        </p:spPr>
+        <p:txBody>
+          <a:bodyPr vertOverflow="overflow" vert="horz" wrap="square" rtlCol="0" anchor="t">
+            <a:noAutofit/>
+          </a:bodyPr>
+          <a:lstStyle/>
+          <a:p>
+            <a:pPr algn="l"/>
+            <a:r>
+              <a:rPr lang="en-US" sz="1300" b="1">
+                <a:solidFill>
+                  <a:srgbClr val="FFFFFF"/>
+                </a:solidFill>
+              </a:rPr>
+              <a:t>Rust macros vs. C/C++ macros</a:t>
+            </a:r>
+          </a:p>
+        </p:txBody>
+      </p:sp>
+      <p:sp>
+        <p:nvSpPr>
+          <p:cNvPr id="7" name="Rectangle 6">
+            <a:extLst>
+              <a:ext uri="{FF2B5EF4-FFF2-40B4-BE49-F238E27FC236}">
+                <a16:creationId xmlns:a16="http://schemas.microsoft.com/office/drawing/2014/main" id="{E73E2DF2-4A4F-444D-8B6C-2AA42FC29DE1}"/>
+              </a:ext>
+            </a:extLst>
+          </p:cNvPr>
+          <p:cNvSpPr/>
+          <p:nvPr/>
+        </p:nvSpPr>
+        <p:spPr>
+          <a:xfrm>
+            <a:off x="342900" y="1816100"/>
+            <a:ext cx="5676900" cy="3987800"/>
+          </a:xfrm>
+          <a:prstGeom prst="rect">
+            <a:avLst/>
+          </a:prstGeom>
+          <a:solidFill>
+            <a:srgbClr val="F5F0EB"/>
+          </a:solidFill>
+          <a:ln w="19050" cap="flat" cmpd="sng" algn="ctr">
+            <a:noFill/>
+            <a:prstDash val="solid"/>
+            <a:miter lim="800000"/>
+          </a:ln>
+        </p:spPr>
+        <p:style>
+          <a:lnRef idx="2">
+            <a:schemeClr val="accent1">
+              <a:shade val="15000"/>
+            </a:schemeClr>
+          </a:lnRef>
+          <a:fillRef idx="1">
+            <a:schemeClr val="accent1"/>
+          </a:fillRef>
+          <a:effectRef idx="0">
+            <a:schemeClr val="accent1"/>
+          </a:effectRef>
+          <a:fontRef idx="minor">
+            <a:schemeClr val="lt1"/>
+          </a:fontRef>
+        </p:style>
+        <p:txBody>
+          <a:bodyPr vertOverflow="clip" horzOverflow="clip" rtlCol="0" anchor="t"/>
+          <a:lstStyle/>
+          <a:p>
+            <a:pPr algn="l"/>
+            <a:endParaRPr lang="en-US"/>
+          </a:p>
+        </p:txBody>
+      </p:sp>
+      <p:sp>
+        <p:nvSpPr>
+          <p:cNvPr id="8" name="TextBox 7">
+            <a:extLst>
+              <a:ext uri="{FF2B5EF4-FFF2-40B4-BE49-F238E27FC236}">
+                <a16:creationId xmlns:a16="http://schemas.microsoft.com/office/drawing/2014/main" id="{B2A69A98-F820-5346-98F3-A4FFADE41CE4}"/>
+              </a:ext>
+            </a:extLst>
+          </p:cNvPr>
+          <p:cNvSpPr txBox="1"/>
+          <p:nvPr/>
+        </p:nvSpPr>
+        <p:spPr>
+          <a:xfrm>
+            <a:off x="596900" y="1943100"/>
+            <a:ext cx="5168900" cy="3733800"/>
+          </a:xfrm>
+          <a:prstGeom prst="rect">
+            <a:avLst/>
+          </a:prstGeom>
+          <a:noFill/>
+        </p:spPr>
+        <p:txBody>
+          <a:bodyPr vertOverflow="overflow" vert="horz" wrap="square" rtlCol="0" anchor="t">
+            <a:noAutofit/>
+          </a:bodyPr>
+          <a:lstStyle/>
+          <a:p>
+            <a:pPr algn="l">
+              <a:spcBef>
+                <a:spcPts val="0"/>
+              </a:spcBef>
+              <a:buNone/>
+            </a:pPr>
+            <a:r>
+              <a:rPr lang="en-US" sz="1400" b="1" dirty="0">
+                <a:solidFill>
+                  <a:srgbClr val="CE422B"/>
+                </a:solidFill>
+              </a:rPr>
+              <a:t>Two flavours</a:t>
+            </a:r>
+          </a:p>
+          <a:p>
+            <a:pPr algn="l">
+              <a:spcBef>
+                <a:spcPts val="250"/>
+              </a:spcBef>
+              <a:buNone/>
+            </a:pPr>
+            <a:r>
+              <a:rPr lang="en-US" sz="1300" b="1" dirty="0">
+                <a:solidFill>
+                  <a:srgbClr val="1E1E1E"/>
+                </a:solidFill>
+              </a:rPr>
+              <a:t>Declarative — </a:t>
+            </a:r>
+            <a:r>
+              <a:rPr lang="en-US" sz="1300" b="1" dirty="0">
+                <a:latin typeface="Consolas"/>
+                <a:cs typeface="Consolas"/>
+              </a:rPr>
+              <a:t>macro_rules!</a:t>
+            </a:r>
+            <a:r>
+              <a:rPr lang="en-US" sz="1300" dirty="0">
+                <a:solidFill>
+                  <a:srgbClr val="1E1E1E"/>
+                </a:solidFill>
+              </a:rPr>
+              <a:t> pattern-matches tokens (e.g. </a:t>
+            </a:r>
+            <a:r>
+              <a:rPr lang="en-US" sz="1300" dirty="0">
+                <a:latin typeface="Consolas"/>
+                <a:cs typeface="Consolas"/>
+              </a:rPr>
+              <a:t>vec!</a:t>
+            </a:r>
+            <a:r>
+              <a:rPr lang="en-US" sz="1300" dirty="0">
+                <a:solidFill>
+                  <a:srgbClr val="1E1E1E"/>
+                </a:solidFill>
+              </a:rPr>
+              <a:t>, </a:t>
+            </a:r>
+            <a:r>
+              <a:rPr lang="en-US" sz="1300" dirty="0">
+                <a:latin typeface="Consolas"/>
+                <a:cs typeface="Consolas"/>
+              </a:rPr>
+              <a:t>println!</a:t>
+            </a:r>
+            <a:r>
+              <a:rPr lang="en-US" sz="1300" dirty="0">
+                <a:solidFill>
+                  <a:srgbClr val="1E1E1E"/>
+                </a:solidFill>
+              </a:rPr>
+              <a:t>).</a:t>
+            </a:r>
+          </a:p>
+          <a:p>
+            <a:pPr algn="l">
+              <a:spcBef>
+                <a:spcPts val="250"/>
+              </a:spcBef>
+              <a:buNone/>
+            </a:pPr>
+            <a:r>
+              <a:rPr lang="en-US" sz="1300" b="1" dirty="0">
+                <a:solidFill>
+                  <a:srgbClr val="1E1E1E"/>
+                </a:solidFill>
+              </a:rPr>
+              <a:t>Procedural — </a:t>
+            </a:r>
+            <a:r>
+              <a:rPr lang="en-US" sz="1300" dirty="0">
+                <a:solidFill>
+                  <a:srgbClr val="1E1E1E"/>
+                </a:solidFill>
+              </a:rPr>
+              <a:t>a Rust function that takes a TokenStream and returns one. Powers #[derive], custom attributes, and function-like macros.</a:t>
+            </a:r>
+          </a:p>
+          <a:p>
+            <a:pPr algn="l">
+              <a:spcBef>
+                <a:spcPts val="450"/>
+              </a:spcBef>
+              <a:buNone/>
+            </a:pPr>
+            <a:r>
+              <a:rPr lang="en-US" sz="1400" b="1" dirty="0">
+                <a:solidFill>
+                  <a:srgbClr val="CE422B"/>
+                </a:solidFill>
+              </a:rPr>
+              <a:t>vs. C/C++ #define</a:t>
+            </a:r>
+          </a:p>
+          <a:p>
+            <a:pPr algn="l">
+              <a:spcBef>
+                <a:spcPts val="250"/>
+              </a:spcBef>
+              <a:buNone/>
+            </a:pPr>
+            <a:r>
+              <a:rPr lang="en-US" sz="1300" b="1" dirty="0">
+                <a:solidFill>
+                  <a:srgbClr val="1E1E1E"/>
+                </a:solidFill>
+              </a:rPr>
+              <a:t>Token-based, not textual — </a:t>
+            </a:r>
+            <a:r>
+              <a:rPr lang="en-US" sz="1300" dirty="0">
+                <a:solidFill>
+                  <a:srgbClr val="1E1E1E"/>
+                </a:solidFill>
+              </a:rPr>
+              <a:t>operate on parsed tokens; no stringly bugs from missing parentheses.</a:t>
+            </a:r>
+          </a:p>
+          <a:p>
+            <a:pPr algn="l">
+              <a:spcBef>
+                <a:spcPts val="250"/>
+              </a:spcBef>
+              <a:buNone/>
+            </a:pPr>
+            <a:r>
+              <a:rPr lang="en-US" sz="1300" b="1" dirty="0">
+                <a:solidFill>
+                  <a:srgbClr val="1E1E1E"/>
+                </a:solidFill>
+              </a:rPr>
+              <a:t>Hygienic — </a:t>
+            </a:r>
+            <a:r>
+              <a:rPr lang="en-US" sz="1300" dirty="0">
+                <a:solidFill>
+                  <a:srgbClr val="1E1E1E"/>
+                </a:solidFill>
+              </a:rPr>
+              <a:t>identifiers introduced in the macro don't collide with names at the call site.</a:t>
+            </a:r>
+          </a:p>
+          <a:p>
+            <a:pPr algn="l">
+              <a:spcBef>
+                <a:spcPts val="250"/>
+              </a:spcBef>
+              <a:buNone/>
+            </a:pPr>
+            <a:r>
+              <a:rPr lang="en-US" sz="1300" b="1" dirty="0">
+                <a:solidFill>
+                  <a:srgbClr val="1E1E1E"/>
+                </a:solidFill>
+              </a:rPr>
+              <a:t>Typed fragments — </a:t>
+            </a:r>
+            <a:r>
+              <a:rPr lang="en-US" sz="1300" dirty="0">
+                <a:solidFill>
+                  <a:srgbClr val="1E1E1E"/>
+                </a:solidFill>
+              </a:rPr>
+              <a:t>match an expr, ident, ty, pat, … not arbitrary text. Errors point inside the macro.</a:t>
+            </a:r>
+          </a:p>
+          <a:p>
+            <a:pPr algn="l">
+              <a:spcBef>
+                <a:spcPts val="250"/>
+              </a:spcBef>
+              <a:buNone/>
+            </a:pPr>
+            <a:r>
+              <a:rPr lang="en-US" sz="1300" b="1" dirty="0">
+                <a:solidFill>
+                  <a:srgbClr val="1E1E1E"/>
+                </a:solidFill>
+              </a:rPr>
+              <a:t>Namespaced — </a:t>
+            </a:r>
+            <a:r>
+              <a:rPr lang="en-US" sz="1300" dirty="0">
+                <a:solidFill>
+                  <a:srgbClr val="1E1E1E"/>
+                </a:solidFill>
+              </a:rPr>
+              <a:t>scoped by module / imported with </a:t>
+            </a:r>
+            <a:r>
+              <a:rPr lang="en-US" sz="1300" b="1" dirty="0">
+                <a:latin typeface="Consolas"/>
+                <a:cs typeface="Consolas"/>
+              </a:rPr>
+              <a:t>use</a:t>
+            </a:r>
+            <a:r>
+              <a:rPr lang="en-US" sz="1300" dirty="0">
+                <a:solidFill>
+                  <a:srgbClr val="1E1E1E"/>
+                </a:solidFill>
+              </a:rPr>
+              <a:t>; no global preprocessor.</a:t>
+            </a:r>
+          </a:p>
+        </p:txBody>
+      </p:sp>
+      <p:sp>
+        <p:nvSpPr>
+          <p:cNvPr id="9" name="Rectangle 8">
+            <a:extLst>
+              <a:ext uri="{FF2B5EF4-FFF2-40B4-BE49-F238E27FC236}">
+                <a16:creationId xmlns:a16="http://schemas.microsoft.com/office/drawing/2014/main" id="{33332661-AC82-3740-8663-2CC6F8ED86EE}"/>
+              </a:ext>
+            </a:extLst>
+          </p:cNvPr>
+          <p:cNvSpPr/>
+          <p:nvPr/>
+        </p:nvSpPr>
+        <p:spPr>
+          <a:xfrm>
+            <a:off x="6223000" y="1485900"/>
+            <a:ext cx="5676900" cy="330200"/>
+          </a:xfrm>
+          <a:prstGeom prst="rect">
+            <a:avLst/>
+          </a:prstGeom>
+          <a:solidFill>
+            <a:srgbClr val="1E1E1E"/>
+          </a:solidFill>
+          <a:ln w="19050" cap="flat" cmpd="sng" algn="ctr">
+            <a:noFill/>
+            <a:prstDash val="solid"/>
+            <a:miter lim="800000"/>
+          </a:ln>
+        </p:spPr>
+        <p:style>
+          <a:lnRef idx="2">
+            <a:schemeClr val="accent1">
+              <a:shade val="15000"/>
+            </a:schemeClr>
+          </a:lnRef>
+          <a:fillRef idx="1">
+            <a:schemeClr val="accent1"/>
+          </a:fillRef>
+          <a:effectRef idx="0">
+            <a:schemeClr val="accent1"/>
+          </a:effectRef>
+          <a:fontRef idx="minor">
+            <a:schemeClr val="lt1"/>
+          </a:fontRef>
+        </p:style>
+        <p:txBody>
+          <a:bodyPr vertOverflow="clip" horzOverflow="clip" rtlCol="0" anchor="t"/>
+          <a:lstStyle/>
+          <a:p>
+            <a:pPr algn="l"/>
+            <a:endParaRPr lang="en-US"/>
+          </a:p>
+        </p:txBody>
+      </p:sp>
+      <p:sp>
+        <p:nvSpPr>
+          <p:cNvPr id="10" name="TextBox 9">
+            <a:extLst>
+              <a:ext uri="{FF2B5EF4-FFF2-40B4-BE49-F238E27FC236}">
+                <a16:creationId xmlns:a16="http://schemas.microsoft.com/office/drawing/2014/main" id="{4A40DAC6-B976-2B43-AD3E-CDFC8BD2ECA4}"/>
+              </a:ext>
+            </a:extLst>
+          </p:cNvPr>
+          <p:cNvSpPr txBox="1"/>
+          <p:nvPr/>
+        </p:nvSpPr>
+        <p:spPr>
+          <a:xfrm>
+            <a:off x="6350000" y="1536700"/>
+            <a:ext cx="5422900" cy="292100"/>
+          </a:xfrm>
+          <a:prstGeom prst="rect">
+            <a:avLst/>
+          </a:prstGeom>
+          <a:noFill/>
+        </p:spPr>
+        <p:txBody>
+          <a:bodyPr vertOverflow="overflow" vert="horz" wrap="square" rtlCol="0" anchor="t">
+            <a:noAutofit/>
+          </a:bodyPr>
+          <a:lstStyle/>
+          <a:p>
+            <a:pPr algn="l"/>
+            <a:r>
+              <a:rPr lang="en-US" sz="1300" b="1">
+                <a:solidFill>
+                  <a:srgbClr val="FFFFFF"/>
+                </a:solidFill>
+              </a:rPr>
+              <a:t>macro_rules! — a typed min!</a:t>
+            </a:r>
+          </a:p>
+        </p:txBody>
+      </p:sp>
+      <p:sp>
+        <p:nvSpPr>
+          <p:cNvPr id="11" name="Rectangle 10">
+            <a:extLst>
+              <a:ext uri="{FF2B5EF4-FFF2-40B4-BE49-F238E27FC236}">
+                <a16:creationId xmlns:a16="http://schemas.microsoft.com/office/drawing/2014/main" id="{F1333CD7-F87D-6A49-A3D3-F2F33A1449BE}"/>
+              </a:ext>
+            </a:extLst>
+          </p:cNvPr>
+          <p:cNvSpPr/>
+          <p:nvPr/>
+        </p:nvSpPr>
+        <p:spPr>
+          <a:xfrm>
+            <a:off x="6223000" y="1816100"/>
+            <a:ext cx="5676900" cy="3987800"/>
+          </a:xfrm>
+          <a:prstGeom prst="rect">
+            <a:avLst/>
+          </a:prstGeom>
+          <a:solidFill>
+            <a:srgbClr val="1E1E1E"/>
+          </a:solidFill>
+          <a:ln w="19050" cap="flat" cmpd="sng" algn="ctr">
+            <a:noFill/>
+            <a:prstDash val="solid"/>
+            <a:miter lim="800000"/>
+          </a:ln>
+        </p:spPr>
+        <p:style>
+          <a:lnRef idx="2">
+            <a:schemeClr val="accent1">
+              <a:shade val="15000"/>
+            </a:schemeClr>
+          </a:lnRef>
+          <a:fillRef idx="1">
+            <a:schemeClr val="accent1"/>
+          </a:fillRef>
+          <a:effectRef idx="0">
+            <a:schemeClr val="accent1"/>
+          </a:effectRef>
+          <a:fontRef idx="minor">
+            <a:schemeClr val="lt1"/>
+          </a:fontRef>
+        </p:style>
+        <p:txBody>
+          <a:bodyPr vertOverflow="clip" horzOverflow="clip" rtlCol="0" anchor="t"/>
+          <a:lstStyle/>
+          <a:p>
+            <a:pPr algn="l"/>
+            <a:endParaRPr lang="en-US"/>
+          </a:p>
+        </p:txBody>
+      </p:sp>
+      <p:sp>
+        <p:nvSpPr>
+          <p:cNvPr id="12" name="TextBox 11">
+            <a:extLst>
+              <a:ext uri="{FF2B5EF4-FFF2-40B4-BE49-F238E27FC236}">
+                <a16:creationId xmlns:a16="http://schemas.microsoft.com/office/drawing/2014/main" id="{FDF58B31-D5B8-C64D-BE9D-1232B4D1715B}"/>
+              </a:ext>
+            </a:extLst>
+          </p:cNvPr>
+          <p:cNvSpPr txBox="1"/>
+          <p:nvPr/>
+        </p:nvSpPr>
+        <p:spPr>
+          <a:xfrm>
+            <a:off x="6350000" y="1892300"/>
+            <a:ext cx="5422900" cy="3848100"/>
+          </a:xfrm>
+          <a:prstGeom prst="rect">
+            <a:avLst/>
+          </a:prstGeom>
+          <a:noFill/>
+        </p:spPr>
+        <p:txBody>
+          <a:bodyPr vertOverflow="overflow" vert="horz" wrap="square" rtlCol="0" anchor="t">
+            <a:noAutofit/>
+          </a:bodyPr>
+          <a:lstStyle/>
+          <a:p>
+            <a:pPr algn="l">
+              <a:spcBef>
+                <a:spcPts val="0"/>
+              </a:spcBef>
+              <a:buNone/>
+            </a:pPr>
+            <a:r>
+              <a:rPr lang="en-US" sz="1100" dirty="0">
+                <a:solidFill>
+                  <a:srgbClr val="8FBF8F"/>
+                </a:solidFill>
+                <a:latin typeface="Consolas"/>
+                <a:cs typeface="Consolas"/>
+              </a:rPr>
+              <a:t>// Declarative macro — variadic, typed</a:t>
+            </a:r>
+          </a:p>
+          <a:p>
+            <a:pPr algn="l">
+              <a:spcBef>
+                <a:spcPts val="0"/>
+              </a:spcBef>
+              <a:buNone/>
+            </a:pPr>
+            <a:r>
+              <a:rPr lang="en-US" sz="1100" dirty="0">
+                <a:solidFill>
+                  <a:srgbClr val="EEEEEE"/>
+                </a:solidFill>
+                <a:latin typeface="Consolas"/>
+                <a:cs typeface="Consolas"/>
+              </a:rPr>
+              <a:t>macro_rules! min {</a:t>
+            </a:r>
+          </a:p>
+          <a:p>
+            <a:pPr algn="l">
+              <a:spcBef>
+                <a:spcPts val="0"/>
+              </a:spcBef>
+              <a:buNone/>
+            </a:pPr>
+            <a:r>
+              <a:rPr lang="en-US" sz="1100" dirty="0">
+                <a:solidFill>
+                  <a:srgbClr val="8FBF8F"/>
+                </a:solidFill>
+                <a:latin typeface="Consolas"/>
+                <a:cs typeface="Consolas"/>
+              </a:rPr>
+              <a:t>    // base case: one expression</a:t>
+            </a:r>
+          </a:p>
+          <a:p>
+            <a:pPr algn="l">
+              <a:spcBef>
+                <a:spcPts val="0"/>
+              </a:spcBef>
+              <a:buNone/>
+            </a:pPr>
+            <a:r>
+              <a:rPr lang="en-US" sz="1100" dirty="0">
+                <a:solidFill>
+                  <a:srgbClr val="EEEEEE"/>
+                </a:solidFill>
+                <a:latin typeface="Consolas"/>
+                <a:cs typeface="Consolas"/>
+              </a:rPr>
+              <a:t>    ($x:expr) =&gt; { $x };</a:t>
+            </a:r>
+          </a:p>
+          <a:p>
+            <a:pPr algn="l">
+              <a:spcBef>
+                <a:spcPts val="0"/>
+              </a:spcBef>
+              <a:buNone/>
+            </a:pPr>
+            <a:r>
+              <a:rPr lang="en-US" sz="1100" dirty="0">
+                <a:solidFill>
+                  <a:srgbClr val="8FBF8F"/>
+                </a:solidFill>
+                <a:latin typeface="Consolas"/>
+                <a:cs typeface="Consolas"/>
+              </a:rPr>
+              <a:t>    // recursive: head, then the rest</a:t>
+            </a:r>
+          </a:p>
+          <a:p>
+            <a:pPr algn="l">
+              <a:spcBef>
+                <a:spcPts val="0"/>
+              </a:spcBef>
+              <a:buNone/>
+            </a:pPr>
+            <a:r>
+              <a:rPr lang="en-US" sz="1100" dirty="0">
+                <a:solidFill>
+                  <a:srgbClr val="EEEEEE"/>
+                </a:solidFill>
+                <a:latin typeface="Consolas"/>
+                <a:cs typeface="Consolas"/>
+              </a:rPr>
+              <a:t>    ($x:expr, $($rest:expr),+) =&gt; {{</a:t>
+            </a:r>
+          </a:p>
+          <a:p>
+            <a:pPr algn="l">
+              <a:spcBef>
+                <a:spcPts val="0"/>
+              </a:spcBef>
+              <a:buNone/>
+            </a:pPr>
+            <a:r>
+              <a:rPr lang="en-US" sz="1100" dirty="0">
+                <a:solidFill>
+                  <a:srgbClr val="EEEEEE"/>
+                </a:solidFill>
+                <a:latin typeface="Consolas"/>
+                <a:cs typeface="Consolas"/>
+              </a:rPr>
+              <a:t>        let a = $x;</a:t>
+            </a:r>
+          </a:p>
+          <a:p>
+            <a:pPr algn="l">
+              <a:spcBef>
+                <a:spcPts val="0"/>
+              </a:spcBef>
+              <a:buNone/>
+            </a:pPr>
+            <a:r>
+              <a:rPr lang="en-US" sz="1100" dirty="0">
+                <a:solidFill>
+                  <a:srgbClr val="EEEEEE"/>
+                </a:solidFill>
+                <a:latin typeface="Consolas"/>
+                <a:cs typeface="Consolas"/>
+              </a:rPr>
+              <a:t>        let b = min!($($rest),+);</a:t>
+            </a:r>
+          </a:p>
+          <a:p>
+            <a:pPr algn="l">
+              <a:spcBef>
+                <a:spcPts val="0"/>
+              </a:spcBef>
+              <a:buNone/>
+            </a:pPr>
+            <a:r>
+              <a:rPr lang="en-US" sz="1100" dirty="0">
+                <a:solidFill>
+                  <a:srgbClr val="EEEEEE"/>
+                </a:solidFill>
+                <a:latin typeface="Consolas"/>
+                <a:cs typeface="Consolas"/>
+              </a:rPr>
+              <a:t>        if a &lt; b { a } else { b }</a:t>
+            </a:r>
+          </a:p>
+          <a:p>
+            <a:pPr algn="l">
+              <a:spcBef>
+                <a:spcPts val="0"/>
+              </a:spcBef>
+              <a:buNone/>
+            </a:pPr>
+            <a:r>
+              <a:rPr lang="en-US" sz="1100" dirty="0">
+                <a:solidFill>
+                  <a:srgbClr val="EEEEEE"/>
+                </a:solidFill>
+                <a:latin typeface="Consolas"/>
+                <a:cs typeface="Consolas"/>
+              </a:rPr>
+              <a:t>    }};</a:t>
+            </a:r>
+          </a:p>
+          <a:p>
+            <a:pPr algn="l">
+              <a:spcBef>
+                <a:spcPts val="0"/>
+              </a:spcBef>
+              <a:buNone/>
+            </a:pPr>
+            <a:r>
+              <a:rPr lang="en-US" sz="1100" dirty="0">
+                <a:solidFill>
+                  <a:srgbClr val="EEEEEE"/>
+                </a:solidFill>
+                <a:latin typeface="Consolas"/>
+                <a:cs typeface="Consolas"/>
+              </a:rPr>
+              <a:t>}</a:t>
+            </a:r>
+          </a:p>
+          <a:p>
+            <a:pPr algn="l">
+              <a:spcBef>
+                <a:spcPts val="0"/>
+              </a:spcBef>
+              <a:buNone/>
+            </a:pPr>
+            <a:endParaRPr lang="en-US" sz="800" dirty="0">
+              <a:solidFill>
+                <a:srgbClr val="EEEEEE"/>
+              </a:solidFill>
+              <a:latin typeface="Consolas"/>
+              <a:cs typeface="Consolas"/>
+            </a:endParaRPr>
+          </a:p>
+          <a:p>
+            <a:pPr algn="l">
+              <a:spcBef>
+                <a:spcPts val="0"/>
+              </a:spcBef>
+              <a:buNone/>
+            </a:pPr>
+            <a:r>
+              <a:rPr lang="en-US" sz="1100" dirty="0">
+                <a:solidFill>
+                  <a:srgbClr val="EEEEEE"/>
+                </a:solidFill>
+                <a:latin typeface="Consolas"/>
+                <a:cs typeface="Consolas"/>
+              </a:rPr>
+              <a:t>fn main() {</a:t>
+            </a:r>
+          </a:p>
+          <a:p>
+            <a:pPr algn="l">
+              <a:spcBef>
+                <a:spcPts val="0"/>
+              </a:spcBef>
+              <a:buNone/>
+            </a:pPr>
+            <a:r>
+              <a:rPr lang="en-US" sz="1100" dirty="0">
+                <a:solidFill>
+                  <a:srgbClr val="EEEEEE"/>
+                </a:solidFill>
+                <a:latin typeface="Consolas"/>
+                <a:cs typeface="Consolas"/>
+              </a:rPr>
+              <a:t>    let m = min!(3, 1, 4, 1, 5, 9, 2);</a:t>
+            </a:r>
+          </a:p>
+          <a:p>
+            <a:pPr algn="l">
+              <a:spcBef>
+                <a:spcPts val="0"/>
+              </a:spcBef>
+              <a:buNone/>
+            </a:pPr>
+            <a:r>
+              <a:rPr lang="en-US" sz="1100" dirty="0">
+                <a:solidFill>
+                  <a:srgbClr val="EEEEEE"/>
+                </a:solidFill>
+                <a:latin typeface="Consolas"/>
+                <a:cs typeface="Consolas"/>
+              </a:rPr>
+              <a:t>    println!("{m}");  // 1</a:t>
+            </a:r>
+          </a:p>
+          <a:p>
+            <a:pPr algn="l">
+              <a:spcBef>
+                <a:spcPts val="0"/>
+              </a:spcBef>
+              <a:buNone/>
+            </a:pPr>
+            <a:r>
+              <a:rPr lang="en-US" sz="1100" dirty="0">
+                <a:solidFill>
+                  <a:srgbClr val="EEEEEE"/>
+                </a:solidFill>
+                <a:latin typeface="Consolas"/>
+                <a:cs typeface="Consolas"/>
+              </a:rPr>
+              <a:t>}</a:t>
+            </a:r>
+          </a:p>
+          <a:p>
+            <a:pPr algn="l">
+              <a:spcBef>
+                <a:spcPts val="0"/>
+              </a:spcBef>
+              <a:buNone/>
+            </a:pPr>
+            <a:endParaRPr lang="en-US" sz="800" dirty="0">
+              <a:solidFill>
+                <a:srgbClr val="EEEEEE"/>
+              </a:solidFill>
+              <a:latin typeface="Consolas"/>
+              <a:cs typeface="Consolas"/>
+            </a:endParaRPr>
+          </a:p>
+          <a:p>
+            <a:pPr algn="l">
+              <a:spcBef>
+                <a:spcPts val="0"/>
+              </a:spcBef>
+              <a:buNone/>
+            </a:pPr>
+            <a:r>
+              <a:rPr lang="en-US" sz="1100" dirty="0">
+                <a:solidFill>
+                  <a:srgbClr val="8FBF8F"/>
+                </a:solidFill>
+                <a:latin typeface="Consolas"/>
+                <a:cs typeface="Consolas"/>
+              </a:rPr>
+              <a:t>// $x:expr ensures every arg parses as an</a:t>
+            </a:r>
+          </a:p>
+          <a:p>
+            <a:pPr algn="l">
+              <a:spcBef>
+                <a:spcPts val="0"/>
+              </a:spcBef>
+              <a:buNone/>
+            </a:pPr>
+            <a:r>
+              <a:rPr lang="en-US" sz="1100" dirty="0">
+                <a:solidFill>
+                  <a:srgbClr val="8FBF8F"/>
+                </a:solidFill>
+                <a:latin typeface="Consolas"/>
+                <a:cs typeface="Consolas"/>
+              </a:rPr>
+              <a:t>// expression — not raw text. Hygienic:</a:t>
+            </a:r>
+          </a:p>
+          <a:p>
+            <a:pPr algn="l">
+              <a:spcBef>
+                <a:spcPts val="0"/>
+              </a:spcBef>
+              <a:buNone/>
+            </a:pPr>
+            <a:r>
+              <a:rPr lang="en-US" sz="1100" dirty="0">
+                <a:solidFill>
+                  <a:srgbClr val="8FBF8F"/>
+                </a:solidFill>
+                <a:latin typeface="Consolas"/>
+                <a:cs typeface="Consolas"/>
+              </a:rPr>
+              <a:t>// `a` and `b` here never clash with the</a:t>
+            </a:r>
+          </a:p>
+          <a:p>
+            <a:pPr algn="l">
+              <a:spcBef>
+                <a:spcPts val="0"/>
+              </a:spcBef>
+              <a:buNone/>
+            </a:pPr>
+            <a:r>
+              <a:rPr lang="en-US" sz="1100" dirty="0">
+                <a:solidFill>
+                  <a:srgbClr val="8FBF8F"/>
+                </a:solidFill>
+                <a:latin typeface="Consolas"/>
+                <a:cs typeface="Consolas"/>
+              </a:rPr>
+              <a:t>// caller's bindings.</a:t>
+            </a:r>
+          </a:p>
+        </p:txBody>
+      </p:sp>
+      <p:sp>
+        <p:nvSpPr>
+          <p:cNvPr id="13" name="Rectangle 12">
+            <a:extLst>
+              <a:ext uri="{FF2B5EF4-FFF2-40B4-BE49-F238E27FC236}">
+                <a16:creationId xmlns:a16="http://schemas.microsoft.com/office/drawing/2014/main" id="{B02A947B-C523-DA4F-B21E-BFF1EF250F45}"/>
+              </a:ext>
+            </a:extLst>
+          </p:cNvPr>
+          <p:cNvSpPr/>
+          <p:nvPr/>
+        </p:nvSpPr>
+        <p:spPr>
+          <a:xfrm>
+            <a:off x="342900" y="5905500"/>
+            <a:ext cx="11557000" cy="635000"/>
+          </a:xfrm>
+          <a:prstGeom prst="rect">
+            <a:avLst/>
+          </a:prstGeom>
+          <a:solidFill>
+            <a:srgbClr val="F5F0EB"/>
+          </a:solidFill>
+          <a:ln w="19050" cap="flat" cmpd="sng" algn="ctr">
+            <a:noFill/>
+            <a:prstDash val="solid"/>
+            <a:miter lim="800000"/>
+          </a:ln>
+        </p:spPr>
+        <p:style>
+          <a:lnRef idx="2">
+            <a:schemeClr val="accent1">
+              <a:shade val="15000"/>
+            </a:schemeClr>
+          </a:lnRef>
+          <a:fillRef idx="1">
+            <a:schemeClr val="accent1"/>
+          </a:fillRef>
+          <a:effectRef idx="0">
+            <a:schemeClr val="accent1"/>
+          </a:effectRef>
+          <a:fontRef idx="minor">
+            <a:schemeClr val="lt1"/>
+          </a:fontRef>
+        </p:style>
+        <p:txBody>
+          <a:bodyPr vertOverflow="clip" horzOverflow="clip" rtlCol="0" anchor="t"/>
+          <a:lstStyle/>
+          <a:p>
+            <a:pPr algn="l"/>
+            <a:endParaRPr lang="en-US"/>
+          </a:p>
+        </p:txBody>
+      </p:sp>
+      <p:sp>
+        <p:nvSpPr>
+          <p:cNvPr id="14" name="TextBox 13">
+            <a:extLst>
+              <a:ext uri="{FF2B5EF4-FFF2-40B4-BE49-F238E27FC236}">
+                <a16:creationId xmlns:a16="http://schemas.microsoft.com/office/drawing/2014/main" id="{19246589-67B8-DE4D-A34D-17CAA9496ED9}"/>
+              </a:ext>
+            </a:extLst>
+          </p:cNvPr>
+          <p:cNvSpPr txBox="1"/>
+          <p:nvPr/>
+        </p:nvSpPr>
+        <p:spPr>
+          <a:xfrm>
+            <a:off x="469900" y="5981700"/>
+            <a:ext cx="11303000" cy="482600"/>
+          </a:xfrm>
+          <a:prstGeom prst="rect">
+            <a:avLst/>
+          </a:prstGeom>
+          <a:noFill/>
+        </p:spPr>
+        <p:txBody>
+          <a:bodyPr vertOverflow="overflow" vert="horz" wrap="square" rtlCol="0" anchor="t">
+            <a:noAutofit/>
+          </a:bodyPr>
+          <a:lstStyle/>
+          <a:p>
+            <a:pPr algn="l"/>
+            <a:r>
+              <a:rPr lang="en-US" sz="1300" b="1">
+                <a:solidFill>
+                  <a:srgbClr val="1E1E1E"/>
+                </a:solidFill>
+              </a:rPr>
+              <a:t>Takeaway: </a:t>
+            </a:r>
+            <a:r>
+              <a:rPr lang="en-US" sz="1300">
+                <a:solidFill>
+                  <a:srgbClr val="333333"/>
+                </a:solidFill>
+              </a:rPr>
+              <a:t>Rust macros work on tokens, are hygienic, and integrate with the type system — none of the foot-guns of a C preprocessor.</a:t>
+            </a:r>
+          </a:p>
+        </p:txBody>
+      </p:sp>
+    </p:spTree>
+    <p:extLst>
+      <p:ext uri="{BB962C8B-B14F-4D97-AF65-F5344CB8AC3E}">
+        <p14:creationId xmlns:p14="http://schemas.microsoft.com/office/powerpoint/2010/main" val="4086046477"/>
+      </p:ext>
+    </p:extLst>
+  </p:cSld>
+  <p:clrMapOvr>
+    <a:masterClrMapping/>
+  </p:clrMapOvr>
+</p:sld>
+</file>
+
+<file path=ppt/slides/slide36.xml><?xml version="1.0" encoding="utf-8"?>
+<p:sld xmlns:a="http://schemas.openxmlformats.org/drawingml/2006/main" xmlns:r="http://schemas.openxmlformats.org/officeDocument/2006/relationships" xmlns:p="http://schemas.openxmlformats.org/presentationml/2006/main">
+  <p:cSld>
+    <p:spTree>
+      <p:nvGrpSpPr>
+        <p:cNvPr id="1" name=""/>
+        <p:cNvGrpSpPr/>
+        <p:nvPr/>
+      </p:nvGrpSpPr>
+      <p:grpSpPr>
+        <a:xfrm>
+          <a:off x="0" y="0"/>
+          <a:ext cx="0" cy="0"/>
+          <a:chOff x="0" y="0"/>
+          <a:chExt cx="0" cy="0"/>
+        </a:xfrm>
+      </p:grpSpPr>
+      <p:sp>
+        <p:nvSpPr>
+          <p:cNvPr id="2" name="TextBox 1">
+            <a:extLst>
+              <a:ext uri="{FF2B5EF4-FFF2-40B4-BE49-F238E27FC236}">
+                <a16:creationId xmlns:a16="http://schemas.microsoft.com/office/drawing/2014/main" id="{30540DC3-429A-A049-8E0E-3D1A349CCB47}"/>
+              </a:ext>
+            </a:extLst>
+          </p:cNvPr>
+          <p:cNvSpPr txBox="1"/>
+          <p:nvPr/>
+        </p:nvSpPr>
+        <p:spPr>
+          <a:xfrm>
+            <a:off x="838200" y="317500"/>
+            <a:ext cx="10515600" cy="558800"/>
+          </a:xfrm>
+          <a:prstGeom prst="rect">
+            <a:avLst/>
+          </a:prstGeom>
+          <a:noFill/>
+        </p:spPr>
+        <p:txBody>
+          <a:bodyPr vertOverflow="overflow" vert="horz" wrap="square" rtlCol="0" anchor="t">
+            <a:noAutofit/>
+          </a:bodyPr>
+          <a:lstStyle/>
+          <a:p>
+            <a:pPr algn="l"/>
+            <a:r>
+              <a:rPr lang="en-US"/>
+              <a:t>Title</a:t>
+            </a:r>
+          </a:p>
+        </p:txBody>
+      </p:sp>
+      <p:sp>
+        <p:nvSpPr>
+          <p:cNvPr id="3" name="Rectangle 2">
+            <a:extLst>
+              <a:ext uri="{FF2B5EF4-FFF2-40B4-BE49-F238E27FC236}">
+                <a16:creationId xmlns:a16="http://schemas.microsoft.com/office/drawing/2014/main" id="{8F246577-22BD-E143-B6A5-3C1C1E3B1A45}"/>
+              </a:ext>
+            </a:extLst>
+          </p:cNvPr>
+          <p:cNvSpPr/>
+          <p:nvPr/>
+        </p:nvSpPr>
+        <p:spPr>
+          <a:xfrm>
+            <a:off x="838200" y="914400"/>
+            <a:ext cx="762000" cy="50800"/>
+          </a:xfrm>
+          <a:prstGeom prst="rect">
+            <a:avLst/>
+          </a:prstGeom>
+          <a:solidFill>
+            <a:srgbClr val="CE422B"/>
+          </a:solidFill>
+          <a:ln w="19050" cap="flat" cmpd="sng" algn="ctr">
+            <a:noFill/>
+            <a:prstDash val="solid"/>
+            <a:miter lim="800000"/>
+          </a:ln>
+        </p:spPr>
+        <p:style>
+          <a:lnRef idx="2">
+            <a:schemeClr val="accent1">
+              <a:shade val="15000"/>
+            </a:schemeClr>
+          </a:lnRef>
+          <a:fillRef idx="1">
+            <a:schemeClr val="accent1"/>
+          </a:fillRef>
+          <a:effectRef idx="0">
+            <a:schemeClr val="accent1"/>
+          </a:effectRef>
+          <a:fontRef idx="minor">
+            <a:schemeClr val="lt1"/>
+          </a:fontRef>
+        </p:style>
+        <p:txBody>
+          <a:bodyPr vertOverflow="clip" horzOverflow="clip" rtlCol="0" anchor="t"/>
+          <a:lstStyle/>
+          <a:p>
+            <a:pPr algn="l"/>
+            <a:endParaRPr lang="en-US"/>
+          </a:p>
+        </p:txBody>
+      </p:sp>
+      <p:sp>
+        <p:nvSpPr>
+          <p:cNvPr id="4" name="TextBox 3">
+            <a:extLst>
+              <a:ext uri="{FF2B5EF4-FFF2-40B4-BE49-F238E27FC236}">
+                <a16:creationId xmlns:a16="http://schemas.microsoft.com/office/drawing/2014/main" id="{B5C99D77-E053-674D-9FCA-7A70562F7493}"/>
+              </a:ext>
+            </a:extLst>
+          </p:cNvPr>
+          <p:cNvSpPr txBox="1"/>
+          <p:nvPr/>
+        </p:nvSpPr>
+        <p:spPr>
+          <a:xfrm>
+            <a:off x="838200" y="1066800"/>
+            <a:ext cx="10515600" cy="304800"/>
+          </a:xfrm>
+          <a:prstGeom prst="rect">
+            <a:avLst/>
+          </a:prstGeom>
+          <a:noFill/>
+        </p:spPr>
+        <p:txBody>
+          <a:bodyPr vertOverflow="overflow" vert="horz" wrap="square" rtlCol="0" anchor="t">
+            <a:noAutofit/>
+          </a:bodyPr>
+          <a:lstStyle/>
+          <a:p>
+            <a:pPr algn="l"/>
+            <a:r>
+              <a:rPr lang="en-US"/>
+              <a:t>Subtitle</a:t>
+            </a:r>
+          </a:p>
+        </p:txBody>
+      </p:sp>
+      <p:sp>
+        <p:nvSpPr>
+          <p:cNvPr id="5" name="Rectangle 4">
+            <a:extLst>
+              <a:ext uri="{FF2B5EF4-FFF2-40B4-BE49-F238E27FC236}">
+                <a16:creationId xmlns:a16="http://schemas.microsoft.com/office/drawing/2014/main" id="{9033C28E-0B09-EB4F-BD9E-3DCDD14348F6}"/>
+              </a:ext>
+            </a:extLst>
+          </p:cNvPr>
+          <p:cNvSpPr/>
+          <p:nvPr/>
+        </p:nvSpPr>
+        <p:spPr>
+          <a:xfrm>
+            <a:off x="342900" y="1485900"/>
+            <a:ext cx="5676900" cy="330200"/>
+          </a:xfrm>
+          <a:prstGeom prst="rect">
+            <a:avLst/>
+          </a:prstGeom>
+          <a:solidFill>
+            <a:srgbClr val="1E1E1E"/>
+          </a:solidFill>
+          <a:ln w="19050" cap="flat" cmpd="sng" algn="ctr">
+            <a:noFill/>
+            <a:prstDash val="solid"/>
+            <a:miter lim="800000"/>
+          </a:ln>
+        </p:spPr>
+        <p:style>
+          <a:lnRef idx="2">
+            <a:schemeClr val="accent1">
+              <a:shade val="15000"/>
+            </a:schemeClr>
+          </a:lnRef>
+          <a:fillRef idx="1">
+            <a:schemeClr val="accent1"/>
+          </a:fillRef>
+          <a:effectRef idx="0">
+            <a:schemeClr val="accent1"/>
+          </a:effectRef>
+          <a:fontRef idx="minor">
+            <a:schemeClr val="lt1"/>
+          </a:fontRef>
+        </p:style>
+        <p:txBody>
+          <a:bodyPr vertOverflow="clip" horzOverflow="clip" rtlCol="0" anchor="t"/>
+          <a:lstStyle/>
+          <a:p>
+            <a:pPr algn="l"/>
+            <a:endParaRPr lang="en-US"/>
+          </a:p>
+        </p:txBody>
+      </p:sp>
+      <p:sp>
+        <p:nvSpPr>
+          <p:cNvPr id="6" name="TextBox 5">
+            <a:extLst>
+              <a:ext uri="{FF2B5EF4-FFF2-40B4-BE49-F238E27FC236}">
+                <a16:creationId xmlns:a16="http://schemas.microsoft.com/office/drawing/2014/main" id="{60279873-E2F1-6D4A-910D-854FB3D30EB0}"/>
+              </a:ext>
+            </a:extLst>
+          </p:cNvPr>
+          <p:cNvSpPr txBox="1"/>
+          <p:nvPr/>
+        </p:nvSpPr>
+        <p:spPr>
+          <a:xfrm>
+            <a:off x="469900" y="1536700"/>
+            <a:ext cx="5422900" cy="292100"/>
+          </a:xfrm>
+          <a:prstGeom prst="rect">
+            <a:avLst/>
+          </a:prstGeom>
+          <a:noFill/>
+        </p:spPr>
+        <p:txBody>
+          <a:bodyPr vertOverflow="overflow" vert="horz" wrap="square" rtlCol="0" anchor="t">
+            <a:noAutofit/>
+          </a:bodyPr>
+          <a:lstStyle/>
+          <a:p>
+            <a:pPr algn="l"/>
+            <a:r>
+              <a:rPr lang="en-US"/>
+              <a:t>LHead</a:t>
+            </a:r>
+          </a:p>
+        </p:txBody>
+      </p:sp>
+      <p:sp>
+        <p:nvSpPr>
+          <p:cNvPr id="7" name="Rectangle 6">
+            <a:extLst>
+              <a:ext uri="{FF2B5EF4-FFF2-40B4-BE49-F238E27FC236}">
+                <a16:creationId xmlns:a16="http://schemas.microsoft.com/office/drawing/2014/main" id="{EA1DE173-090B-1741-ACC4-426D1E8B4711}"/>
+              </a:ext>
+            </a:extLst>
+          </p:cNvPr>
+          <p:cNvSpPr/>
+          <p:nvPr/>
+        </p:nvSpPr>
+        <p:spPr>
+          <a:xfrm>
+            <a:off x="342900" y="1816100"/>
+            <a:ext cx="5676900" cy="3987800"/>
+          </a:xfrm>
+          <a:prstGeom prst="rect">
+            <a:avLst/>
+          </a:prstGeom>
+          <a:solidFill>
+            <a:srgbClr val="F5F0EB"/>
+          </a:solidFill>
+          <a:ln w="19050" cap="flat" cmpd="sng" algn="ctr">
+            <a:noFill/>
+            <a:prstDash val="solid"/>
+            <a:miter lim="800000"/>
+          </a:ln>
+        </p:spPr>
+        <p:style>
+          <a:lnRef idx="2">
+            <a:schemeClr val="accent1">
+              <a:shade val="15000"/>
+            </a:schemeClr>
+          </a:lnRef>
+          <a:fillRef idx="1">
+            <a:schemeClr val="accent1"/>
+          </a:fillRef>
+          <a:effectRef idx="0">
+            <a:schemeClr val="accent1"/>
+          </a:effectRef>
+          <a:fontRef idx="minor">
+            <a:schemeClr val="lt1"/>
+          </a:fontRef>
+        </p:style>
+        <p:txBody>
+          <a:bodyPr vertOverflow="clip" horzOverflow="clip" rtlCol="0" anchor="t"/>
+          <a:lstStyle/>
+          <a:p>
+            <a:pPr algn="l"/>
+            <a:endParaRPr lang="en-US"/>
+          </a:p>
+        </p:txBody>
+      </p:sp>
+      <p:sp>
+        <p:nvSpPr>
+          <p:cNvPr id="8" name="TextBox 7">
+            <a:extLst>
+              <a:ext uri="{FF2B5EF4-FFF2-40B4-BE49-F238E27FC236}">
+                <a16:creationId xmlns:a16="http://schemas.microsoft.com/office/drawing/2014/main" id="{E314A243-5592-9D43-B70A-E285F413615A}"/>
+              </a:ext>
+            </a:extLst>
+          </p:cNvPr>
+          <p:cNvSpPr txBox="1"/>
+          <p:nvPr/>
+        </p:nvSpPr>
+        <p:spPr>
+          <a:xfrm>
+            <a:off x="596900" y="1943100"/>
+            <a:ext cx="5168900" cy="3733800"/>
+          </a:xfrm>
+          <a:prstGeom prst="rect">
+            <a:avLst/>
+          </a:prstGeom>
+          <a:noFill/>
+        </p:spPr>
+        <p:txBody>
+          <a:bodyPr vertOverflow="overflow" vert="horz" wrap="square" rtlCol="0" anchor="t">
+            <a:noAutofit/>
+          </a:bodyPr>
+          <a:lstStyle/>
+          <a:p>
+            <a:pPr algn="l"/>
+            <a:r>
+              <a:rPr lang="en-US"/>
+              <a:t>LBody</a:t>
+            </a:r>
+          </a:p>
+        </p:txBody>
+      </p:sp>
+      <p:sp>
+        <p:nvSpPr>
+          <p:cNvPr id="9" name="Rectangle 8">
+            <a:extLst>
+              <a:ext uri="{FF2B5EF4-FFF2-40B4-BE49-F238E27FC236}">
+                <a16:creationId xmlns:a16="http://schemas.microsoft.com/office/drawing/2014/main" id="{13D3B962-A7C3-CA48-B83F-8788B0D39A50}"/>
+              </a:ext>
+            </a:extLst>
+          </p:cNvPr>
+          <p:cNvSpPr/>
+          <p:nvPr/>
+        </p:nvSpPr>
+        <p:spPr>
+          <a:xfrm>
+            <a:off x="6223000" y="1485900"/>
+            <a:ext cx="5676900" cy="330200"/>
+          </a:xfrm>
+          <a:prstGeom prst="rect">
+            <a:avLst/>
+          </a:prstGeom>
+          <a:solidFill>
+            <a:srgbClr val="1E1E1E"/>
+          </a:solidFill>
+          <a:ln w="19050" cap="flat" cmpd="sng" algn="ctr">
+            <a:noFill/>
+            <a:prstDash val="solid"/>
+            <a:miter lim="800000"/>
+          </a:ln>
+        </p:spPr>
+        <p:style>
+          <a:lnRef idx="2">
+            <a:schemeClr val="accent1">
+              <a:shade val="15000"/>
+            </a:schemeClr>
+          </a:lnRef>
+          <a:fillRef idx="1">
+            <a:schemeClr val="accent1"/>
+          </a:fillRef>
+          <a:effectRef idx="0">
+            <a:schemeClr val="accent1"/>
+          </a:effectRef>
+          <a:fontRef idx="minor">
+            <a:schemeClr val="lt1"/>
+          </a:fontRef>
+        </p:style>
+        <p:txBody>
+          <a:bodyPr vertOverflow="clip" horzOverflow="clip" rtlCol="0" anchor="t"/>
+          <a:lstStyle/>
+          <a:p>
+            <a:pPr algn="l"/>
+            <a:endParaRPr lang="en-US"/>
+          </a:p>
+        </p:txBody>
+      </p:sp>
+      <p:sp>
+        <p:nvSpPr>
+          <p:cNvPr id="10" name="TextBox 9">
+            <a:extLst>
+              <a:ext uri="{FF2B5EF4-FFF2-40B4-BE49-F238E27FC236}">
+                <a16:creationId xmlns:a16="http://schemas.microsoft.com/office/drawing/2014/main" id="{D5DC1A68-6F89-CF44-90AE-5437B7038788}"/>
+              </a:ext>
+            </a:extLst>
+          </p:cNvPr>
+          <p:cNvSpPr txBox="1"/>
+          <p:nvPr/>
+        </p:nvSpPr>
+        <p:spPr>
+          <a:xfrm>
+            <a:off x="6350000" y="1536700"/>
+            <a:ext cx="5422900" cy="292100"/>
+          </a:xfrm>
+          <a:prstGeom prst="rect">
+            <a:avLst/>
+          </a:prstGeom>
+          <a:noFill/>
+        </p:spPr>
+        <p:txBody>
+          <a:bodyPr vertOverflow="overflow" vert="horz" wrap="square" rtlCol="0" anchor="t">
+            <a:noAutofit/>
+          </a:bodyPr>
+          <a:lstStyle/>
+          <a:p>
+            <a:pPr algn="l"/>
+            <a:r>
+              <a:rPr lang="en-US"/>
+              <a:t>RHead</a:t>
+            </a:r>
+          </a:p>
+        </p:txBody>
+      </p:sp>
+      <p:sp>
+        <p:nvSpPr>
+          <p:cNvPr id="11" name="Rectangle 10">
+            <a:extLst>
+              <a:ext uri="{FF2B5EF4-FFF2-40B4-BE49-F238E27FC236}">
+                <a16:creationId xmlns:a16="http://schemas.microsoft.com/office/drawing/2014/main" id="{11D8E27B-AF49-4E4D-8AA5-7A23B8BD49D2}"/>
+              </a:ext>
+            </a:extLst>
+          </p:cNvPr>
+          <p:cNvSpPr/>
+          <p:nvPr/>
+        </p:nvSpPr>
+        <p:spPr>
+          <a:xfrm>
+            <a:off x="6223000" y="1816100"/>
+            <a:ext cx="5676900" cy="3987800"/>
+          </a:xfrm>
+          <a:prstGeom prst="rect">
+            <a:avLst/>
+          </a:prstGeom>
+          <a:solidFill>
+            <a:srgbClr val="1E1E1E"/>
+          </a:solidFill>
+          <a:ln w="19050" cap="flat" cmpd="sng" algn="ctr">
+            <a:noFill/>
+            <a:prstDash val="solid"/>
+            <a:miter lim="800000"/>
+          </a:ln>
+        </p:spPr>
+        <p:style>
+          <a:lnRef idx="2">
+            <a:schemeClr val="accent1">
+              <a:shade val="15000"/>
+            </a:schemeClr>
+          </a:lnRef>
+          <a:fillRef idx="1">
+            <a:schemeClr val="accent1"/>
+          </a:fillRef>
+          <a:effectRef idx="0">
+            <a:schemeClr val="accent1"/>
+          </a:effectRef>
+          <a:fontRef idx="minor">
+            <a:schemeClr val="lt1"/>
+          </a:fontRef>
+        </p:style>
+        <p:txBody>
+          <a:bodyPr vertOverflow="clip" horzOverflow="clip" rtlCol="0" anchor="t"/>
+          <a:lstStyle/>
+          <a:p>
+            <a:pPr algn="l"/>
+            <a:endParaRPr lang="en-US"/>
+          </a:p>
+        </p:txBody>
+      </p:sp>
+      <p:sp>
+        <p:nvSpPr>
+          <p:cNvPr id="12" name="TextBox 11">
+            <a:extLst>
+              <a:ext uri="{FF2B5EF4-FFF2-40B4-BE49-F238E27FC236}">
+                <a16:creationId xmlns:a16="http://schemas.microsoft.com/office/drawing/2014/main" id="{6C90A764-DCE9-F242-90A4-EFBF9BF84754}"/>
+              </a:ext>
+            </a:extLst>
+          </p:cNvPr>
+          <p:cNvSpPr txBox="1"/>
+          <p:nvPr/>
+        </p:nvSpPr>
+        <p:spPr>
+          <a:xfrm>
+            <a:off x="6350000" y="1892300"/>
+            <a:ext cx="5422900" cy="3848100"/>
+          </a:xfrm>
+          <a:prstGeom prst="rect">
+            <a:avLst/>
+          </a:prstGeom>
+          <a:noFill/>
+        </p:spPr>
+        <p:txBody>
+          <a:bodyPr vertOverflow="overflow" vert="horz" wrap="square" rtlCol="0" anchor="t">
+            <a:noAutofit/>
+          </a:bodyPr>
+          <a:lstStyle/>
+          <a:p>
+            <a:pPr algn="l"/>
+            <a:r>
+              <a:rPr lang="en-US"/>
+              <a:t>RBody</a:t>
+            </a:r>
+          </a:p>
+        </p:txBody>
+      </p:sp>
+      <p:sp>
+        <p:nvSpPr>
+          <p:cNvPr id="13" name="Rectangle 12">
+            <a:extLst>
+              <a:ext uri="{FF2B5EF4-FFF2-40B4-BE49-F238E27FC236}">
+                <a16:creationId xmlns:a16="http://schemas.microsoft.com/office/drawing/2014/main" id="{CFEAF29A-D466-7A40-A9F2-80CFB859150D}"/>
+              </a:ext>
+            </a:extLst>
+          </p:cNvPr>
+          <p:cNvSpPr/>
+          <p:nvPr/>
+        </p:nvSpPr>
+        <p:spPr>
+          <a:xfrm>
+            <a:off x="342900" y="5905500"/>
+            <a:ext cx="11557000" cy="635000"/>
+          </a:xfrm>
+          <a:prstGeom prst="rect">
+            <a:avLst/>
+          </a:prstGeom>
+          <a:solidFill>
+            <a:srgbClr val="F5F0EB"/>
+          </a:solidFill>
+          <a:ln w="19050" cap="flat" cmpd="sng" algn="ctr">
+            <a:noFill/>
+            <a:prstDash val="solid"/>
+            <a:miter lim="800000"/>
+          </a:ln>
+        </p:spPr>
+        <p:style>
+          <a:lnRef idx="2">
+            <a:schemeClr val="accent1">
+              <a:shade val="15000"/>
+            </a:schemeClr>
+          </a:lnRef>
+          <a:fillRef idx="1">
+            <a:schemeClr val="accent1"/>
+          </a:fillRef>
+          <a:effectRef idx="0">
+            <a:schemeClr val="accent1"/>
+          </a:effectRef>
+          <a:fontRef idx="minor">
+            <a:schemeClr val="lt1"/>
+          </a:fontRef>
+        </p:style>
+        <p:txBody>
+          <a:bodyPr vertOverflow="clip" horzOverflow="clip" rtlCol="0" anchor="t"/>
+          <a:lstStyle/>
+          <a:p>
+            <a:pPr algn="l"/>
+            <a:endParaRPr lang="en-US"/>
+          </a:p>
+        </p:txBody>
+      </p:sp>
+      <p:sp>
+        <p:nvSpPr>
+          <p:cNvPr id="14" name="TextBox 13">
+            <a:extLst>
+              <a:ext uri="{FF2B5EF4-FFF2-40B4-BE49-F238E27FC236}">
+                <a16:creationId xmlns:a16="http://schemas.microsoft.com/office/drawing/2014/main" id="{BF6D2F9D-0792-7E42-BFA5-306C45EA85F6}"/>
+              </a:ext>
+            </a:extLst>
+          </p:cNvPr>
+          <p:cNvSpPr txBox="1"/>
+          <p:nvPr/>
+        </p:nvSpPr>
+        <p:spPr>
+          <a:xfrm>
+            <a:off x="469900" y="5981700"/>
+            <a:ext cx="11303000" cy="482600"/>
+          </a:xfrm>
+          <a:prstGeom prst="rect">
+            <a:avLst/>
+          </a:prstGeom>
+          <a:noFill/>
+        </p:spPr>
+        <p:txBody>
+          <a:bodyPr vertOverflow="overflow" vert="horz" wrap="square" rtlCol="0" anchor="t">
+            <a:noAutofit/>
+          </a:bodyPr>
+          <a:lstStyle/>
+          <a:p>
+            <a:pPr algn="l"/>
+            <a:r>
+              <a:rPr lang="en-US"/>
+              <a:t>Takeaway</a:t>
+            </a:r>
+          </a:p>
+        </p:txBody>
+      </p:sp>
+    </p:spTree>
+    <p:extLst>
+      <p:ext uri="{BB962C8B-B14F-4D97-AF65-F5344CB8AC3E}">
+        <p14:creationId xmlns:p14="http://schemas.microsoft.com/office/powerpoint/2010/main" val="2761303159"/>
       </p:ext>
     </p:extLst>
   </p:cSld>

--- a/rust_friday_session.pptx
+++ b/rust_friday_session.pptx
@@ -5,7 +5,7 @@
     <p:sldMasterId id="2147483648" r:id="rId1"/>
   </p:sldMasterIdLst>
   <p:notesMasterIdLst>
-    <p:notesMasterId r:id="rId38"/>
+    <p:notesMasterId r:id="rId39"/>
   </p:notesMasterIdLst>
   <p:sldIdLst>
     <p:sldId id="256" r:id="rId2"/>
@@ -43,7 +43,8 @@
     <p:sldId id="331" r:id="rId34"/>
     <p:sldId id="334" r:id="rId35"/>
     <p:sldId id="336" r:id="rId36"/>
-    <p:sldId id="337" r:id="rId37"/>
+    <p:sldId id="339" r:id="rId37"/>
+    <p:sldId id="340" r:id="rId38"/>
   </p:sldIdLst>
   <p:sldSz cx="12192000" cy="6858000"/>
   <p:notesSz cx="6858000" cy="9144000"/>
@@ -232,7 +233,7 @@
           <a:p>
             <a:fld id="{901B2C63-9184-7B41-897D-B987911E75C8}" type="datetimeFigureOut">
               <a:rPr lang="en-US" smtClean="0"/>
-              <a:t>5/18/26</a:t>
+              <a:t>5/19/26</a:t>
             </a:fld>
             <a:endParaRPr lang="en-US"/>
           </a:p>
@@ -1539,7 +1540,7 @@
           <a:p>
             <a:fld id="{4998A69A-3EA9-0A47-8D25-10A00CFA088E}" type="datetimeFigureOut">
               <a:rPr lang="en-US" smtClean="0"/>
-              <a:t>5/18/26</a:t>
+              <a:t>5/19/26</a:t>
             </a:fld>
             <a:endParaRPr lang="en-US"/>
           </a:p>
@@ -1737,7 +1738,7 @@
           <a:p>
             <a:fld id="{4998A69A-3EA9-0A47-8D25-10A00CFA088E}" type="datetimeFigureOut">
               <a:rPr lang="en-US" smtClean="0"/>
-              <a:t>5/18/26</a:t>
+              <a:t>5/19/26</a:t>
             </a:fld>
             <a:endParaRPr lang="en-US"/>
           </a:p>
@@ -1945,7 +1946,7 @@
           <a:p>
             <a:fld id="{4998A69A-3EA9-0A47-8D25-10A00CFA088E}" type="datetimeFigureOut">
               <a:rPr lang="en-US" smtClean="0"/>
-              <a:t>5/18/26</a:t>
+              <a:t>5/19/26</a:t>
             </a:fld>
             <a:endParaRPr lang="en-US"/>
           </a:p>
@@ -2143,7 +2144,7 @@
           <a:p>
             <a:fld id="{4998A69A-3EA9-0A47-8D25-10A00CFA088E}" type="datetimeFigureOut">
               <a:rPr lang="en-US" smtClean="0"/>
-              <a:t>5/18/26</a:t>
+              <a:t>5/19/26</a:t>
             </a:fld>
             <a:endParaRPr lang="en-US"/>
           </a:p>
@@ -2418,7 +2419,7 @@
           <a:p>
             <a:fld id="{4998A69A-3EA9-0A47-8D25-10A00CFA088E}" type="datetimeFigureOut">
               <a:rPr lang="en-US" smtClean="0"/>
-              <a:t>5/18/26</a:t>
+              <a:t>5/19/26</a:t>
             </a:fld>
             <a:endParaRPr lang="en-US"/>
           </a:p>
@@ -2683,7 +2684,7 @@
           <a:p>
             <a:fld id="{4998A69A-3EA9-0A47-8D25-10A00CFA088E}" type="datetimeFigureOut">
               <a:rPr lang="en-US" smtClean="0"/>
-              <a:t>5/18/26</a:t>
+              <a:t>5/19/26</a:t>
             </a:fld>
             <a:endParaRPr lang="en-US"/>
           </a:p>
@@ -3095,7 +3096,7 @@
           <a:p>
             <a:fld id="{4998A69A-3EA9-0A47-8D25-10A00CFA088E}" type="datetimeFigureOut">
               <a:rPr lang="en-US" smtClean="0"/>
-              <a:t>5/18/26</a:t>
+              <a:t>5/19/26</a:t>
             </a:fld>
             <a:endParaRPr lang="en-US"/>
           </a:p>
@@ -3236,7 +3237,7 @@
           <a:p>
             <a:fld id="{4998A69A-3EA9-0A47-8D25-10A00CFA088E}" type="datetimeFigureOut">
               <a:rPr lang="en-US" smtClean="0"/>
-              <a:t>5/18/26</a:t>
+              <a:t>5/19/26</a:t>
             </a:fld>
             <a:endParaRPr lang="en-US"/>
           </a:p>
@@ -3349,7 +3350,7 @@
           <a:p>
             <a:fld id="{4998A69A-3EA9-0A47-8D25-10A00CFA088E}" type="datetimeFigureOut">
               <a:rPr lang="en-US" smtClean="0"/>
-              <a:t>5/18/26</a:t>
+              <a:t>5/19/26</a:t>
             </a:fld>
             <a:endParaRPr lang="en-US"/>
           </a:p>
@@ -3660,7 +3661,7 @@
           <a:p>
             <a:fld id="{4998A69A-3EA9-0A47-8D25-10A00CFA088E}" type="datetimeFigureOut">
               <a:rPr lang="en-US" smtClean="0"/>
-              <a:t>5/18/26</a:t>
+              <a:t>5/19/26</a:t>
             </a:fld>
             <a:endParaRPr lang="en-US"/>
           </a:p>
@@ -3948,7 +3949,7 @@
           <a:p>
             <a:fld id="{4998A69A-3EA9-0A47-8D25-10A00CFA088E}" type="datetimeFigureOut">
               <a:rPr lang="en-US" smtClean="0"/>
-              <a:t>5/18/26</a:t>
+              <a:t>5/19/26</a:t>
             </a:fld>
             <a:endParaRPr lang="en-US"/>
           </a:p>
@@ -4189,7 +4190,7 @@
           <a:p>
             <a:fld id="{4998A69A-3EA9-0A47-8D25-10A00CFA088E}" type="datetimeFigureOut">
               <a:rPr lang="en-US" smtClean="0"/>
-              <a:t>5/18/26</a:t>
+              <a:t>5/19/26</a:t>
             </a:fld>
             <a:endParaRPr lang="en-US"/>
           </a:p>
@@ -45241,8 +45242,12 @@
           <a:p>
             <a:pPr algn="l"/>
             <a:r>
-              <a:rPr lang="en-US"/>
-              <a:t>Title</a:t>
+              <a:rPr lang="en-US" sz="3000" b="1">
+                <a:solidFill>
+                  <a:srgbClr val="1E1E1E"/>
+                </a:solidFill>
+              </a:rPr>
+              <a:t>Procedural macros</a:t>
             </a:r>
           </a:p>
         </p:txBody>
@@ -45331,8 +45336,12 @@
           <a:p>
             <a:pPr algn="l"/>
             <a:r>
-              <a:rPr lang="en-US"/>
-              <a:t>Subtitle</a:t>
+              <a:rPr lang="en-US" sz="1400">
+                <a:solidFill>
+                  <a:srgbClr val="555555"/>
+                </a:solidFill>
+              </a:rPr>
+              <a:t>A Rust function: fn(TokenStream) -&gt; TokenStream — compiled and run at build time</a:t>
             </a:r>
           </a:p>
         </p:txBody>
@@ -45421,8 +45430,12 @@
           <a:p>
             <a:pPr algn="l"/>
             <a:r>
-              <a:rPr lang="en-US"/>
-              <a:t>LHead</a:t>
+              <a:rPr lang="en-US" sz="1300" b="1">
+                <a:solidFill>
+                  <a:srgbClr val="FFFFFF"/>
+                </a:solidFill>
+              </a:rPr>
+              <a:t>Three kinds</a:t>
             </a:r>
           </a:p>
         </p:txBody>
@@ -45509,10 +45522,191 @@
           </a:bodyPr>
           <a:lstStyle/>
           <a:p>
-            <a:pPr algn="l"/>
-            <a:r>
-              <a:rPr lang="en-US"/>
-              <a:t>LBody</a:t>
+            <a:pPr algn="l">
+              <a:spcBef>
+                <a:spcPts val="0"/>
+              </a:spcBef>
+              <a:buNone/>
+            </a:pPr>
+            <a:r>
+              <a:rPr lang="en-US" sz="1400" b="1" dirty="0">
+                <a:solidFill>
+                  <a:srgbClr val="CE422B"/>
+                </a:solidFill>
+              </a:rPr>
+              <a:t>Derive — #[derive(Serialize)]</a:t>
+            </a:r>
+          </a:p>
+          <a:p>
+            <a:pPr algn="l">
+              <a:spcBef>
+                <a:spcPts val="250"/>
+              </a:spcBef>
+              <a:buNone/>
+            </a:pPr>
+            <a:r>
+              <a:rPr lang="en-US" sz="1300" dirty="0">
+                <a:solidFill>
+                  <a:srgbClr val="1E1E1E"/>
+                </a:solidFill>
+              </a:rPr>
+              <a:t>Generates an impl for the annotated struct or enum. The macro receives the type's tokens and emits new code beside it.</a:t>
+            </a:r>
+          </a:p>
+          <a:p>
+            <a:pPr algn="l">
+              <a:spcBef>
+                <a:spcPts val="450"/>
+              </a:spcBef>
+              <a:buNone/>
+            </a:pPr>
+            <a:r>
+              <a:rPr lang="en-US" sz="1400" b="1" dirty="0">
+                <a:solidFill>
+                  <a:srgbClr val="CE422B"/>
+                </a:solidFill>
+              </a:rPr>
+              <a:t>Attribute — #[route("/api")]</a:t>
+            </a:r>
+          </a:p>
+          <a:p>
+            <a:pPr algn="l">
+              <a:spcBef>
+                <a:spcPts val="250"/>
+              </a:spcBef>
+              <a:buNone/>
+            </a:pPr>
+            <a:r>
+              <a:rPr lang="en-US" sz="1300" dirty="0">
+                <a:solidFill>
+                  <a:srgbClr val="1E1E1E"/>
+                </a:solidFill>
+              </a:rPr>
+              <a:t>Attaches to any item and may rewrite it. Used by frameworks (actix, axum, tokio::main) to wrap functions or expand DSLs.</a:t>
+            </a:r>
+          </a:p>
+          <a:p>
+            <a:pPr algn="l">
+              <a:spcBef>
+                <a:spcPts val="450"/>
+              </a:spcBef>
+              <a:buNone/>
+            </a:pPr>
+            <a:r>
+              <a:rPr lang="en-US" sz="1400" b="1" dirty="0">
+                <a:solidFill>
+                  <a:srgbClr val="CE422B"/>
+                </a:solidFill>
+              </a:rPr>
+              <a:t>Function-like — sqlx::query!("…")</a:t>
+            </a:r>
+          </a:p>
+          <a:p>
+            <a:pPr algn="l">
+              <a:spcBef>
+                <a:spcPts val="250"/>
+              </a:spcBef>
+              <a:buNone/>
+            </a:pPr>
+            <a:r>
+              <a:rPr lang="en-US" sz="1300" dirty="0">
+                <a:solidFill>
+                  <a:srgbClr val="1E1E1E"/>
+                </a:solidFill>
+              </a:rPr>
+              <a:t>Called like </a:t>
+            </a:r>
+            <a:r>
+              <a:rPr lang="en-US" sz="1300" b="1" dirty="0">
+                <a:latin typeface="Consolas"/>
+                <a:cs typeface="Consolas"/>
+              </a:rPr>
+              <a:t>name!(…)</a:t>
+            </a:r>
+            <a:r>
+              <a:rPr lang="en-US" sz="1300" dirty="0">
+                <a:solidFill>
+                  <a:srgbClr val="1E1E1E"/>
+                </a:solidFill>
+              </a:rPr>
+              <a:t> but the body is arbitrary code — used for compile-time SQL checks, HTML templates, etc.</a:t>
+            </a:r>
+          </a:p>
+          <a:p>
+            <a:pPr algn="l">
+              <a:spcBef>
+                <a:spcPts val="450"/>
+              </a:spcBef>
+              <a:buNone/>
+            </a:pPr>
+            <a:r>
+              <a:rPr lang="en-US" sz="1400" b="1" dirty="0">
+                <a:solidFill>
+                  <a:srgbClr val="CE422B"/>
+                </a:solidFill>
+              </a:rPr>
+              <a:t>How they're built</a:t>
+            </a:r>
+          </a:p>
+          <a:p>
+            <a:pPr algn="l">
+              <a:spcBef>
+                <a:spcPts val="250"/>
+              </a:spcBef>
+              <a:buNone/>
+            </a:pPr>
+            <a:r>
+              <a:rPr lang="en-US" sz="1300" dirty="0">
+                <a:solidFill>
+                  <a:srgbClr val="1E1E1E"/>
+                </a:solidFill>
+              </a:rPr>
+              <a:t>Live in their own </a:t>
+            </a:r>
+            <a:r>
+              <a:rPr lang="en-US" sz="1300" b="1" dirty="0">
+                <a:latin typeface="Consolas"/>
+                <a:cs typeface="Consolas"/>
+              </a:rPr>
+              <a:t>proc-macro = true</a:t>
+            </a:r>
+            <a:r>
+              <a:rPr lang="en-US" sz="1300" dirty="0">
+                <a:solidFill>
+                  <a:srgbClr val="1E1E1E"/>
+                </a:solidFill>
+              </a:rPr>
+              <a:t> crate. Use </a:t>
+            </a:r>
+            <a:r>
+              <a:rPr lang="en-US" sz="1300" b="1" dirty="0">
+                <a:latin typeface="Consolas"/>
+                <a:cs typeface="Consolas"/>
+              </a:rPr>
+              <a:t>syn</a:t>
+            </a:r>
+            <a:r>
+              <a:rPr lang="en-US" sz="1300" dirty="0">
+                <a:solidFill>
+                  <a:srgbClr val="1E1E1E"/>
+                </a:solidFill>
+              </a:rPr>
+              <a:t> to parse, </a:t>
+            </a:r>
+            <a:r>
+              <a:rPr lang="en-US" sz="1300" b="1" dirty="0">
+                <a:latin typeface="Consolas"/>
+                <a:cs typeface="Consolas"/>
+              </a:rPr>
+              <a:t>quote!</a:t>
+            </a:r>
+            <a:r>
+              <a:rPr lang="en-US" sz="1300" dirty="0">
+                <a:solidFill>
+                  <a:srgbClr val="1E1E1E"/>
+                </a:solidFill>
+              </a:rPr>
+              <a:t> to emit code.</a:t>
             </a:r>
           </a:p>
         </p:txBody>
@@ -45601,8 +45795,12 @@
           <a:p>
             <a:pPr algn="l"/>
             <a:r>
-              <a:rPr lang="en-US"/>
-              <a:t>RHead</a:t>
+              <a:rPr lang="en-US" sz="1300" b="1">
+                <a:solidFill>
+                  <a:srgbClr val="FFFFFF"/>
+                </a:solidFill>
+              </a:rPr>
+              <a:t>#[derive(Hello)] — derive macro</a:t>
             </a:r>
           </a:p>
         </p:txBody>
@@ -45689,10 +45887,411 @@
           </a:bodyPr>
           <a:lstStyle/>
           <a:p>
-            <a:pPr algn="l"/>
-            <a:r>
-              <a:rPr lang="en-US"/>
-              <a:t>RBody</a:t>
+            <a:pPr algn="l">
+              <a:spcBef>
+                <a:spcPts val="0"/>
+              </a:spcBef>
+              <a:buNone/>
+            </a:pPr>
+            <a:r>
+              <a:rPr lang="en-US" sz="1100" dirty="0">
+                <a:solidFill>
+                  <a:srgbClr val="8FBF8F"/>
+                </a:solidFill>
+                <a:latin typeface="Consolas"/>
+                <a:cs typeface="Consolas"/>
+              </a:rPr>
+              <a:t>// crate hello_derive — proc-macro = true</a:t>
+            </a:r>
+          </a:p>
+          <a:p>
+            <a:pPr algn="l">
+              <a:spcBef>
+                <a:spcPts val="0"/>
+              </a:spcBef>
+              <a:buNone/>
+            </a:pPr>
+            <a:r>
+              <a:rPr lang="en-US" sz="1100" dirty="0">
+                <a:solidFill>
+                  <a:srgbClr val="EEEEEE"/>
+                </a:solidFill>
+                <a:latin typeface="Consolas"/>
+                <a:cs typeface="Consolas"/>
+              </a:rPr>
+              <a:t>use proc_macro::TokenStream;</a:t>
+            </a:r>
+          </a:p>
+          <a:p>
+            <a:pPr algn="l">
+              <a:spcBef>
+                <a:spcPts val="0"/>
+              </a:spcBef>
+              <a:buNone/>
+            </a:pPr>
+            <a:r>
+              <a:rPr lang="en-US" sz="1100" dirty="0">
+                <a:solidFill>
+                  <a:srgbClr val="EEEEEE"/>
+                </a:solidFill>
+                <a:latin typeface="Consolas"/>
+                <a:cs typeface="Consolas"/>
+              </a:rPr>
+              <a:t>use quote::quote;</a:t>
+            </a:r>
+          </a:p>
+          <a:p>
+            <a:pPr algn="l">
+              <a:spcBef>
+                <a:spcPts val="0"/>
+              </a:spcBef>
+              <a:buNone/>
+            </a:pPr>
+            <a:r>
+              <a:rPr lang="en-US" sz="1100" dirty="0">
+                <a:solidFill>
+                  <a:srgbClr val="EEEEEE"/>
+                </a:solidFill>
+                <a:latin typeface="Consolas"/>
+                <a:cs typeface="Consolas"/>
+              </a:rPr>
+              <a:t>use syn::{parse_macro_input, DeriveInput};</a:t>
+            </a:r>
+          </a:p>
+          <a:p>
+            <a:pPr algn="l">
+              <a:spcBef>
+                <a:spcPts val="0"/>
+              </a:spcBef>
+              <a:buNone/>
+            </a:pPr>
+            <a:endParaRPr lang="en-US" sz="800" dirty="0">
+              <a:solidFill>
+                <a:srgbClr val="EEEEEE"/>
+              </a:solidFill>
+              <a:latin typeface="Consolas"/>
+              <a:cs typeface="Consolas"/>
+            </a:endParaRPr>
+          </a:p>
+          <a:p>
+            <a:pPr algn="l">
+              <a:spcBef>
+                <a:spcPts val="0"/>
+              </a:spcBef>
+              <a:buNone/>
+            </a:pPr>
+            <a:r>
+              <a:rPr lang="en-US" sz="1100" dirty="0">
+                <a:solidFill>
+                  <a:srgbClr val="FFB454"/>
+                </a:solidFill>
+                <a:latin typeface="Consolas"/>
+                <a:cs typeface="Consolas"/>
+              </a:rPr>
+              <a:t>#[proc_macro_derive(Hello)]</a:t>
+            </a:r>
+          </a:p>
+          <a:p>
+            <a:pPr algn="l">
+              <a:spcBef>
+                <a:spcPts val="0"/>
+              </a:spcBef>
+              <a:buNone/>
+            </a:pPr>
+            <a:r>
+              <a:rPr lang="en-US" sz="1100" dirty="0">
+                <a:solidFill>
+                  <a:srgbClr val="EEEEEE"/>
+                </a:solidFill>
+                <a:latin typeface="Consolas"/>
+                <a:cs typeface="Consolas"/>
+              </a:rPr>
+              <a:t>pub fn derive_hello(input: TokenStream)</a:t>
+            </a:r>
+          </a:p>
+          <a:p>
+            <a:pPr algn="l">
+              <a:spcBef>
+                <a:spcPts val="0"/>
+              </a:spcBef>
+              <a:buNone/>
+            </a:pPr>
+            <a:r>
+              <a:rPr lang="en-US" sz="1100" dirty="0">
+                <a:solidFill>
+                  <a:srgbClr val="EEEEEE"/>
+                </a:solidFill>
+                <a:latin typeface="Consolas"/>
+                <a:cs typeface="Consolas"/>
+              </a:rPr>
+              <a:t>    -&gt; TokenStream</a:t>
+            </a:r>
+          </a:p>
+          <a:p>
+            <a:pPr algn="l">
+              <a:spcBef>
+                <a:spcPts val="0"/>
+              </a:spcBef>
+              <a:buNone/>
+            </a:pPr>
+            <a:r>
+              <a:rPr lang="en-US" sz="1100" dirty="0">
+                <a:solidFill>
+                  <a:srgbClr val="EEEEEE"/>
+                </a:solidFill>
+                <a:latin typeface="Consolas"/>
+                <a:cs typeface="Consolas"/>
+              </a:rPr>
+              <a:t>{</a:t>
+            </a:r>
+          </a:p>
+          <a:p>
+            <a:pPr algn="l">
+              <a:spcBef>
+                <a:spcPts val="0"/>
+              </a:spcBef>
+              <a:buNone/>
+            </a:pPr>
+            <a:r>
+              <a:rPr lang="en-US" sz="1100" dirty="0">
+                <a:solidFill>
+                  <a:srgbClr val="8FBF8F"/>
+                </a:solidFill>
+                <a:latin typeface="Consolas"/>
+                <a:cs typeface="Consolas"/>
+              </a:rPr>
+              <a:t>    // parse the annotated type</a:t>
+            </a:r>
+          </a:p>
+          <a:p>
+            <a:pPr algn="l">
+              <a:spcBef>
+                <a:spcPts val="0"/>
+              </a:spcBef>
+              <a:buNone/>
+            </a:pPr>
+            <a:r>
+              <a:rPr lang="en-US" sz="1100" dirty="0">
+                <a:solidFill>
+                  <a:srgbClr val="EEEEEE"/>
+                </a:solidFill>
+                <a:latin typeface="Consolas"/>
+                <a:cs typeface="Consolas"/>
+              </a:rPr>
+              <a:t>    let ast = parse_macro_input!(input</a:t>
+            </a:r>
+          </a:p>
+          <a:p>
+            <a:pPr algn="l">
+              <a:spcBef>
+                <a:spcPts val="0"/>
+              </a:spcBef>
+              <a:buNone/>
+            </a:pPr>
+            <a:r>
+              <a:rPr lang="en-US" sz="1100" dirty="0">
+                <a:solidFill>
+                  <a:srgbClr val="EEEEEE"/>
+                </a:solidFill>
+                <a:latin typeface="Consolas"/>
+                <a:cs typeface="Consolas"/>
+              </a:rPr>
+              <a:t>        as DeriveInput);</a:t>
+            </a:r>
+          </a:p>
+          <a:p>
+            <a:pPr algn="l">
+              <a:spcBef>
+                <a:spcPts val="0"/>
+              </a:spcBef>
+              <a:buNone/>
+            </a:pPr>
+            <a:r>
+              <a:rPr lang="en-US" sz="1100" dirty="0">
+                <a:solidFill>
+                  <a:srgbClr val="EEEEEE"/>
+                </a:solidFill>
+                <a:latin typeface="Consolas"/>
+                <a:cs typeface="Consolas"/>
+              </a:rPr>
+              <a:t>    let name = &amp;ast.ident;</a:t>
+            </a:r>
+          </a:p>
+          <a:p>
+            <a:pPr algn="l">
+              <a:spcBef>
+                <a:spcPts val="0"/>
+              </a:spcBef>
+              <a:buNone/>
+            </a:pPr>
+            <a:endParaRPr lang="en-US" sz="800" dirty="0">
+              <a:solidFill>
+                <a:srgbClr val="EEEEEE"/>
+              </a:solidFill>
+              <a:latin typeface="Consolas"/>
+              <a:cs typeface="Consolas"/>
+            </a:endParaRPr>
+          </a:p>
+          <a:p>
+            <a:pPr algn="l">
+              <a:spcBef>
+                <a:spcPts val="0"/>
+              </a:spcBef>
+              <a:buNone/>
+            </a:pPr>
+            <a:r>
+              <a:rPr lang="en-US" sz="1100" dirty="0">
+                <a:solidFill>
+                  <a:srgbClr val="8FBF8F"/>
+                </a:solidFill>
+                <a:latin typeface="Consolas"/>
+                <a:cs typeface="Consolas"/>
+              </a:rPr>
+              <a:t>    // emit an impl block</a:t>
+            </a:r>
+          </a:p>
+          <a:p>
+            <a:pPr algn="l">
+              <a:spcBef>
+                <a:spcPts val="0"/>
+              </a:spcBef>
+              <a:buNone/>
+            </a:pPr>
+            <a:r>
+              <a:rPr lang="en-US" sz="1100" dirty="0">
+                <a:solidFill>
+                  <a:srgbClr val="EEEEEE"/>
+                </a:solidFill>
+                <a:latin typeface="Consolas"/>
+                <a:cs typeface="Consolas"/>
+              </a:rPr>
+              <a:t>    quote! {</a:t>
+            </a:r>
+          </a:p>
+          <a:p>
+            <a:pPr algn="l">
+              <a:spcBef>
+                <a:spcPts val="0"/>
+              </a:spcBef>
+              <a:buNone/>
+            </a:pPr>
+            <a:r>
+              <a:rPr lang="en-US" sz="1100" dirty="0">
+                <a:solidFill>
+                  <a:srgbClr val="EEEEEE"/>
+                </a:solidFill>
+                <a:latin typeface="Consolas"/>
+                <a:cs typeface="Consolas"/>
+              </a:rPr>
+              <a:t>        impl Hello for #name {</a:t>
+            </a:r>
+          </a:p>
+          <a:p>
+            <a:pPr algn="l">
+              <a:spcBef>
+                <a:spcPts val="0"/>
+              </a:spcBef>
+              <a:buNone/>
+            </a:pPr>
+            <a:r>
+              <a:rPr lang="en-US" sz="1100" dirty="0">
+                <a:solidFill>
+                  <a:srgbClr val="EEEEEE"/>
+                </a:solidFill>
+                <a:latin typeface="Consolas"/>
+                <a:cs typeface="Consolas"/>
+              </a:rPr>
+              <a:t>            fn hi() { println!(</a:t>
+            </a:r>
+          </a:p>
+          <a:p>
+            <a:pPr algn="l">
+              <a:spcBef>
+                <a:spcPts val="0"/>
+              </a:spcBef>
+              <a:buNone/>
+            </a:pPr>
+            <a:r>
+              <a:rPr lang="en-US" sz="1100" dirty="0">
+                <a:solidFill>
+                  <a:srgbClr val="EEEEEE"/>
+                </a:solidFill>
+                <a:latin typeface="Consolas"/>
+                <a:cs typeface="Consolas"/>
+              </a:rPr>
+              <a:t>                "hi from {}",</a:t>
+            </a:r>
+          </a:p>
+          <a:p>
+            <a:pPr algn="l">
+              <a:spcBef>
+                <a:spcPts val="0"/>
+              </a:spcBef>
+              <a:buNone/>
+            </a:pPr>
+            <a:r>
+              <a:rPr lang="en-US" sz="1100" dirty="0">
+                <a:solidFill>
+                  <a:srgbClr val="EEEEEE"/>
+                </a:solidFill>
+                <a:latin typeface="Consolas"/>
+                <a:cs typeface="Consolas"/>
+              </a:rPr>
+              <a:t>                stringify!(#name)); }</a:t>
+            </a:r>
+          </a:p>
+          <a:p>
+            <a:pPr algn="l">
+              <a:spcBef>
+                <a:spcPts val="0"/>
+              </a:spcBef>
+              <a:buNone/>
+            </a:pPr>
+            <a:r>
+              <a:rPr lang="en-US" sz="1100" dirty="0">
+                <a:solidFill>
+                  <a:srgbClr val="EEEEEE"/>
+                </a:solidFill>
+                <a:latin typeface="Consolas"/>
+                <a:cs typeface="Consolas"/>
+              </a:rPr>
+              <a:t>        }</a:t>
+            </a:r>
+          </a:p>
+          <a:p>
+            <a:pPr algn="l">
+              <a:spcBef>
+                <a:spcPts val="0"/>
+              </a:spcBef>
+              <a:buNone/>
+            </a:pPr>
+            <a:r>
+              <a:rPr lang="en-US" sz="1100" dirty="0">
+                <a:solidFill>
+                  <a:srgbClr val="EEEEEE"/>
+                </a:solidFill>
+                <a:latin typeface="Consolas"/>
+                <a:cs typeface="Consolas"/>
+              </a:rPr>
+              <a:t>    }.into()</a:t>
+            </a:r>
+          </a:p>
+          <a:p>
+            <a:pPr algn="l">
+              <a:spcBef>
+                <a:spcPts val="0"/>
+              </a:spcBef>
+              <a:buNone/>
+            </a:pPr>
+            <a:r>
+              <a:rPr lang="en-US" sz="1100" dirty="0">
+                <a:solidFill>
+                  <a:srgbClr val="EEEEEE"/>
+                </a:solidFill>
+                <a:latin typeface="Consolas"/>
+                <a:cs typeface="Consolas"/>
+              </a:rPr>
+              <a:t>}</a:t>
             </a:r>
           </a:p>
         </p:txBody>
@@ -45781,8 +46380,20 @@
           <a:p>
             <a:pPr algn="l"/>
             <a:r>
-              <a:rPr lang="en-US"/>
-              <a:t>Takeaway</a:t>
+              <a:rPr lang="en-US" sz="1300" b="1">
+                <a:solidFill>
+                  <a:srgbClr val="1E1E1E"/>
+                </a:solidFill>
+              </a:rPr>
+              <a:t>Takeaway: </a:t>
+            </a:r>
+            <a:r>
+              <a:rPr lang="en-US" sz="1300">
+                <a:solidFill>
+                  <a:srgbClr val="333333"/>
+                </a:solidFill>
+              </a:rPr>
+              <a:t>proc macros are real Rust code that runs at build time — parse with syn, emit with quote, and you've extended the language.</a:t>
             </a:r>
           </a:p>
         </p:txBody>
@@ -45790,7 +46401,37 @@
     </p:spTree>
     <p:extLst>
       <p:ext uri="{BB962C8B-B14F-4D97-AF65-F5344CB8AC3E}">
-        <p14:creationId xmlns:p14="http://schemas.microsoft.com/office/powerpoint/2010/main" val="2761303159"/>
+        <p14:creationId xmlns:p14="http://schemas.microsoft.com/office/powerpoint/2010/main" val="544630756"/>
+      </p:ext>
+    </p:extLst>
+  </p:cSld>
+  <p:clrMapOvr>
+    <a:masterClrMapping/>
+  </p:clrMapOvr>
+</p:sld>
+</file>
+
+<file path=ppt/slides/slide37.xml><?xml version="1.0" encoding="utf-8"?>
+<p:sld xmlns:a="http://schemas.openxmlformats.org/drawingml/2006/main" xmlns:r="http://schemas.openxmlformats.org/officeDocument/2006/relationships" xmlns:p="http://schemas.openxmlformats.org/presentationml/2006/main">
+  <p:cSld>
+    <p:spTree>
+      <p:nvGrpSpPr>
+        <p:cNvPr id="1" name=""/>
+        <p:cNvGrpSpPr/>
+        <p:nvPr/>
+      </p:nvGrpSpPr>
+      <p:grpSpPr>
+        <a:xfrm>
+          <a:off x="0" y="0"/>
+          <a:ext cx="0" cy="0"/>
+          <a:chOff x="0" y="0"/>
+          <a:chExt cx="0" cy="0"/>
+        </a:xfrm>
+      </p:grpSpPr>
+    </p:spTree>
+    <p:extLst>
+      <p:ext uri="{BB962C8B-B14F-4D97-AF65-F5344CB8AC3E}">
+        <p14:creationId xmlns:p14="http://schemas.microsoft.com/office/powerpoint/2010/main" val="2231167723"/>
       </p:ext>
     </p:extLst>
   </p:cSld>

--- a/rust_friday_session.pptx
+++ b/rust_friday_session.pptx
@@ -233,7 +233,7 @@
           <a:p>
             <a:fld id="{901B2C63-9184-7B41-897D-B987911E75C8}" type="datetimeFigureOut">
               <a:rPr lang="en-US" smtClean="0"/>
-              <a:t>5/19/26</a:t>
+              <a:t>5/21/26</a:t>
             </a:fld>
             <a:endParaRPr lang="en-US"/>
           </a:p>
@@ -1353,6 +1353,126 @@
           <a:bodyPr/>
           <a:lstStyle/>
           <a:p>
+            <a:r>
+              <a:rPr lang="en-AZ" sz="1200" b="0" i="0" kern="1200" dirty="0">
+                <a:solidFill>
+                  <a:schemeClr val="tx1"/>
+                </a:solidFill>
+                <a:effectLst/>
+                <a:latin typeface="+mn-lt"/>
+                <a:ea typeface="+mn-ea"/>
+                <a:cs typeface="+mn-cs"/>
+              </a:rPr>
+              <a:t>The idea of "object-safety" is that you must be able to call methods of the trait the same way for </a:t>
+            </a:r>
+            <a:r>
+              <a:rPr lang="en-AZ" sz="1200" b="0" i="1" kern="1200" dirty="0">
+                <a:solidFill>
+                  <a:schemeClr val="tx1"/>
+                </a:solidFill>
+                <a:effectLst/>
+                <a:latin typeface="+mn-lt"/>
+                <a:ea typeface="+mn-ea"/>
+                <a:cs typeface="+mn-cs"/>
+              </a:rPr>
+              <a:t>any</a:t>
+            </a:r>
+            <a:r>
+              <a:rPr lang="en-AZ" sz="1200" b="0" i="0" kern="1200" dirty="0">
+                <a:solidFill>
+                  <a:schemeClr val="tx1"/>
+                </a:solidFill>
+                <a:effectLst/>
+                <a:latin typeface="+mn-lt"/>
+                <a:ea typeface="+mn-ea"/>
+                <a:cs typeface="+mn-cs"/>
+              </a:rPr>
+              <a:t> instance of the trait. So the properties guarantee that, no matter what, the size and shape of the arguments and return value only depend on the bare trait — not on the instance (on Self) or any type arguments (which will have been "forgotten" by runtime)</a:t>
+            </a:r>
+            <a:endParaRPr lang="en-US" dirty="0"/>
+          </a:p>
+        </p:txBody>
+      </p:sp>
+      <p:sp>
+        <p:nvSpPr>
+          <p:cNvPr id="4" name="Slide Number Placeholder 3"/>
+          <p:cNvSpPr>
+            <a:spLocks noGrp="1"/>
+          </p:cNvSpPr>
+          <p:nvPr>
+            <p:ph type="sldNum" sz="quarter" idx="5"/>
+          </p:nvPr>
+        </p:nvSpPr>
+        <p:spPr/>
+        <p:txBody>
+          <a:bodyPr/>
+          <a:lstStyle/>
+          <a:p>
+            <a:fld id="{A39A970C-2A22-694C-8F30-D4BBC57008A9}" type="slidenum">
+              <a:rPr lang="en-US" smtClean="0"/>
+              <a:t>14</a:t>
+            </a:fld>
+            <a:endParaRPr lang="en-US"/>
+          </a:p>
+        </p:txBody>
+      </p:sp>
+    </p:spTree>
+    <p:extLst>
+      <p:ext uri="{BB962C8B-B14F-4D97-AF65-F5344CB8AC3E}">
+        <p14:creationId xmlns:p14="http://schemas.microsoft.com/office/powerpoint/2010/main" val="2999993418"/>
+      </p:ext>
+    </p:extLst>
+  </p:cSld>
+  <p:clrMapOvr>
+    <a:masterClrMapping/>
+  </p:clrMapOvr>
+</p:notes>
+</file>
+
+<file path=ppt/notesSlides/notesSlide7.xml><?xml version="1.0" encoding="utf-8"?>
+<p:notes xmlns:a="http://schemas.openxmlformats.org/drawingml/2006/main" xmlns:r="http://schemas.openxmlformats.org/officeDocument/2006/relationships" xmlns:p="http://schemas.openxmlformats.org/presentationml/2006/main">
+  <p:cSld>
+    <p:spTree>
+      <p:nvGrpSpPr>
+        <p:cNvPr id="1" name=""/>
+        <p:cNvGrpSpPr/>
+        <p:nvPr/>
+      </p:nvGrpSpPr>
+      <p:grpSpPr>
+        <a:xfrm>
+          <a:off x="0" y="0"/>
+          <a:ext cx="0" cy="0"/>
+          <a:chOff x="0" y="0"/>
+          <a:chExt cx="0" cy="0"/>
+        </a:xfrm>
+      </p:grpSpPr>
+      <p:sp>
+        <p:nvSpPr>
+          <p:cNvPr id="2" name="Slide Image Placeholder 1"/>
+          <p:cNvSpPr>
+            <a:spLocks noGrp="1" noRot="1" noChangeAspect="1"/>
+          </p:cNvSpPr>
+          <p:nvPr>
+            <p:ph type="sldImg"/>
+          </p:nvPr>
+        </p:nvSpPr>
+        <p:spPr/>
+      </p:sp>
+      <p:sp>
+        <p:nvSpPr>
+          <p:cNvPr id="3" name="Notes Placeholder 2"/>
+          <p:cNvSpPr>
+            <a:spLocks noGrp="1"/>
+          </p:cNvSpPr>
+          <p:nvPr>
+            <p:ph type="body" idx="1"/>
+          </p:nvPr>
+        </p:nvSpPr>
+        <p:spPr/>
+        <p:txBody>
+          <a:bodyPr/>
+          <a:lstStyle/>
+          <a:p>
             <a:endParaRPr lang="en-AZ" dirty="0"/>
           </a:p>
         </p:txBody>
@@ -1540,7 +1660,7 @@
           <a:p>
             <a:fld id="{4998A69A-3EA9-0A47-8D25-10A00CFA088E}" type="datetimeFigureOut">
               <a:rPr lang="en-US" smtClean="0"/>
-              <a:t>5/19/26</a:t>
+              <a:t>5/21/26</a:t>
             </a:fld>
             <a:endParaRPr lang="en-US"/>
           </a:p>
@@ -1738,7 +1858,7 @@
           <a:p>
             <a:fld id="{4998A69A-3EA9-0A47-8D25-10A00CFA088E}" type="datetimeFigureOut">
               <a:rPr lang="en-US" smtClean="0"/>
-              <a:t>5/19/26</a:t>
+              <a:t>5/21/26</a:t>
             </a:fld>
             <a:endParaRPr lang="en-US"/>
           </a:p>
@@ -1946,7 +2066,7 @@
           <a:p>
             <a:fld id="{4998A69A-3EA9-0A47-8D25-10A00CFA088E}" type="datetimeFigureOut">
               <a:rPr lang="en-US" smtClean="0"/>
-              <a:t>5/19/26</a:t>
+              <a:t>5/21/26</a:t>
             </a:fld>
             <a:endParaRPr lang="en-US"/>
           </a:p>
@@ -2144,7 +2264,7 @@
           <a:p>
             <a:fld id="{4998A69A-3EA9-0A47-8D25-10A00CFA088E}" type="datetimeFigureOut">
               <a:rPr lang="en-US" smtClean="0"/>
-              <a:t>5/19/26</a:t>
+              <a:t>5/21/26</a:t>
             </a:fld>
             <a:endParaRPr lang="en-US"/>
           </a:p>
@@ -2419,7 +2539,7 @@
           <a:p>
             <a:fld id="{4998A69A-3EA9-0A47-8D25-10A00CFA088E}" type="datetimeFigureOut">
               <a:rPr lang="en-US" smtClean="0"/>
-              <a:t>5/19/26</a:t>
+              <a:t>5/21/26</a:t>
             </a:fld>
             <a:endParaRPr lang="en-US"/>
           </a:p>
@@ -2684,7 +2804,7 @@
           <a:p>
             <a:fld id="{4998A69A-3EA9-0A47-8D25-10A00CFA088E}" type="datetimeFigureOut">
               <a:rPr lang="en-US" smtClean="0"/>
-              <a:t>5/19/26</a:t>
+              <a:t>5/21/26</a:t>
             </a:fld>
             <a:endParaRPr lang="en-US"/>
           </a:p>
@@ -3096,7 +3216,7 @@
           <a:p>
             <a:fld id="{4998A69A-3EA9-0A47-8D25-10A00CFA088E}" type="datetimeFigureOut">
               <a:rPr lang="en-US" smtClean="0"/>
-              <a:t>5/19/26</a:t>
+              <a:t>5/21/26</a:t>
             </a:fld>
             <a:endParaRPr lang="en-US"/>
           </a:p>
@@ -3237,7 +3357,7 @@
           <a:p>
             <a:fld id="{4998A69A-3EA9-0A47-8D25-10A00CFA088E}" type="datetimeFigureOut">
               <a:rPr lang="en-US" smtClean="0"/>
-              <a:t>5/19/26</a:t>
+              <a:t>5/21/26</a:t>
             </a:fld>
             <a:endParaRPr lang="en-US"/>
           </a:p>
@@ -3350,7 +3470,7 @@
           <a:p>
             <a:fld id="{4998A69A-3EA9-0A47-8D25-10A00CFA088E}" type="datetimeFigureOut">
               <a:rPr lang="en-US" smtClean="0"/>
-              <a:t>5/19/26</a:t>
+              <a:t>5/21/26</a:t>
             </a:fld>
             <a:endParaRPr lang="en-US"/>
           </a:p>
@@ -3661,7 +3781,7 @@
           <a:p>
             <a:fld id="{4998A69A-3EA9-0A47-8D25-10A00CFA088E}" type="datetimeFigureOut">
               <a:rPr lang="en-US" smtClean="0"/>
-              <a:t>5/19/26</a:t>
+              <a:t>5/21/26</a:t>
             </a:fld>
             <a:endParaRPr lang="en-US"/>
           </a:p>
@@ -3949,7 +4069,7 @@
           <a:p>
             <a:fld id="{4998A69A-3EA9-0A47-8D25-10A00CFA088E}" type="datetimeFigureOut">
               <a:rPr lang="en-US" smtClean="0"/>
-              <a:t>5/19/26</a:t>
+              <a:t>5/21/26</a:t>
             </a:fld>
             <a:endParaRPr lang="en-US"/>
           </a:p>
@@ -4190,7 +4310,7 @@
           <a:p>
             <a:fld id="{4998A69A-3EA9-0A47-8D25-10A00CFA088E}" type="datetimeFigureOut">
               <a:rPr lang="en-US" smtClean="0"/>
-              <a:t>5/19/26</a:t>
+              <a:t>5/21/26</a:t>
             </a:fld>
             <a:endParaRPr lang="en-US"/>
           </a:p>
@@ -46428,6 +46548,94 @@
           <a:chExt cx="0" cy="0"/>
         </a:xfrm>
       </p:grpSpPr>
+      <p:pic>
+        <p:nvPicPr>
+          <p:cNvPr id="1026" name="Picture 2" descr="Great Idea">
+            <a:extLst>
+              <a:ext uri="{FF2B5EF4-FFF2-40B4-BE49-F238E27FC236}">
+                <a16:creationId xmlns:a16="http://schemas.microsoft.com/office/drawing/2014/main" id="{EF6D2271-B0AC-460D-968B-9631AA95D421}"/>
+              </a:ext>
+            </a:extLst>
+          </p:cNvPr>
+          <p:cNvPicPr>
+            <a:picLocks noChangeAspect="1" noChangeArrowheads="1"/>
+          </p:cNvPicPr>
+          <p:nvPr/>
+        </p:nvPicPr>
+        <p:blipFill>
+          <a:blip r:embed="rId2">
+            <a:extLst>
+              <a:ext uri="{28A0092B-C50C-407E-A947-70E740481C1C}">
+                <a14:useLocalDpi xmlns:a14="http://schemas.microsoft.com/office/drawing/2010/main" val="0"/>
+              </a:ext>
+            </a:extLst>
+          </a:blip>
+          <a:srcRect/>
+          <a:stretch>
+            <a:fillRect/>
+          </a:stretch>
+        </p:blipFill>
+        <p:spPr bwMode="auto">
+          <a:xfrm>
+            <a:off x="1701606" y="417602"/>
+            <a:ext cx="7276139" cy="5292629"/>
+          </a:xfrm>
+          <a:prstGeom prst="rect">
+            <a:avLst/>
+          </a:prstGeom>
+          <a:noFill/>
+          <a:extLst>
+            <a:ext uri="{909E8E84-426E-40DD-AFC4-6F175D3DCCD1}">
+              <a14:hiddenFill xmlns:a14="http://schemas.microsoft.com/office/drawing/2010/main">
+                <a:solidFill>
+                  <a:srgbClr val="FFFFFF"/>
+                </a:solidFill>
+              </a14:hiddenFill>
+            </a:ext>
+          </a:extLst>
+        </p:spPr>
+      </p:pic>
+      <p:sp>
+        <p:nvSpPr>
+          <p:cNvPr id="3" name="TextBox 2">
+            <a:extLst>
+              <a:ext uri="{FF2B5EF4-FFF2-40B4-BE49-F238E27FC236}">
+                <a16:creationId xmlns:a16="http://schemas.microsoft.com/office/drawing/2014/main" id="{89E420BA-ECEA-BFA8-7817-C69ECC28DD59}"/>
+              </a:ext>
+            </a:extLst>
+          </p:cNvPr>
+          <p:cNvSpPr txBox="1"/>
+          <p:nvPr/>
+        </p:nvSpPr>
+        <p:spPr>
+          <a:xfrm>
+            <a:off x="1701606" y="5710231"/>
+            <a:ext cx="7739278" cy="523220"/>
+          </a:xfrm>
+          <a:prstGeom prst="rect">
+            <a:avLst/>
+          </a:prstGeom>
+          <a:noFill/>
+        </p:spPr>
+        <p:txBody>
+          <a:bodyPr wrap="square">
+            <a:spAutoFit/>
+          </a:bodyPr>
+          <a:lstStyle/>
+          <a:p>
+            <a:r>
+              <a:rPr lang="en-US" sz="2800" dirty="0">
+                <a:hlinkClick r:id="rId3"/>
+              </a:rPr>
+              <a:t>https://github.com/rahimahmedov/rust_vs_cpp</a:t>
+            </a:r>
+            <a:r>
+              <a:rPr lang="en-US" sz="2800" dirty="0"/>
+              <a:t> </a:t>
+            </a:r>
+          </a:p>
+        </p:txBody>
+      </p:sp>
     </p:spTree>
     <p:extLst>
       <p:ext uri="{BB962C8B-B14F-4D97-AF65-F5344CB8AC3E}">
